--- a/slides/session-2-context-engineering.pptx
+++ b/slides/session-2-context-engineering.pptx
@@ -7947,37 +7947,115 @@
               </a:defRPr>
             </a:pPr>
             <a:r>
-              <a:t># .claude/commands/build-schedule.md</a:t>
+              <a:rPr sz="1300">
+                <a:solidFill>
+                  <a:srgbClr val="E8ECF4"/>
+                </a:solidFill>
+                <a:latin typeface="Courier New"/>
+              </a:rPr>
+              <a:t>---</a:t>
+            </a:r>
+            <a:br/>
+            <a:r>
+              <a:rPr sz="1300">
+                <a:solidFill>
+                  <a:srgbClr val="E8ECF4"/>
+                </a:solidFill>
+                <a:latin typeface="Courier New"/>
+              </a:rPr>
+              <a:t>name: build-schedule</a:t>
+            </a:r>
+            <a:br/>
+            <a:r>
+              <a:rPr sz="1300">
+                <a:solidFill>
+                  <a:srgbClr val="E8ECF4"/>
+                </a:solidFill>
+                <a:latin typeface="Courier New"/>
+              </a:rPr>
+              <a:t>description: Build a schedule from an event plan</a:t>
+            </a:r>
+            <a:br/>
+            <a:r>
+              <a:rPr sz="1300">
+                <a:solidFill>
+                  <a:srgbClr val="E8ECF4"/>
+                </a:solidFill>
+                <a:latin typeface="Courier New"/>
+              </a:rPr>
+              <a:t>argument-hint: [event-plan.json]</a:t>
+            </a:r>
+            <a:br/>
+            <a:r>
+              <a:rPr sz="1300">
+                <a:solidFill>
+                  <a:srgbClr val="E8ECF4"/>
+                </a:solidFill>
+                <a:latin typeface="Courier New"/>
+              </a:rPr>
+              <a:t>allowed-tools: Read, Write</a:t>
+            </a:r>
+            <a:br/>
+            <a:r>
+              <a:rPr sz="1300">
+                <a:solidFill>
+                  <a:srgbClr val="E8ECF4"/>
+                </a:solidFill>
+                <a:latin typeface="Courier New"/>
+              </a:rPr>
+              <a:t>---</a:t>
             </a:r>
             <a:br/>
             <a:br/>
             <a:r>
+              <a:rPr sz="1300">
+                <a:solidFill>
+                  <a:srgbClr val="E8ECF4"/>
+                </a:solidFill>
+                <a:latin typeface="Courier New"/>
+              </a:rPr>
               <a:t>Build a schedule for the event plan at: $ARGUMENTS</a:t>
             </a:r>
             <a:br/>
             <a:br/>
             <a:r>
+              <a:rPr sz="1300">
+                <a:solidFill>
+                  <a:srgbClr val="E8ECF4"/>
+                </a:solidFill>
+                <a:latin typeface="Courier New"/>
+              </a:rPr>
               <a:t>## Steps:</a:t>
             </a:r>
             <a:br/>
             <a:r>
-              <a:t>1. Read the event plan JSON at $ARGUMENTS</a:t>
+              <a:rPr sz="1300">
+                <a:solidFill>
+                  <a:srgbClr val="E8ECF4"/>
+                </a:solidFill>
+                <a:latin typeface="Courier New"/>
+              </a:rPr>
+              <a:t>1. Read $ARGUMENTS and data/speakers.json</a:t>
             </a:r>
             <a:br/>
             <a:r>
-              <a:t>2. Read data/speakers.json for speaker availability</a:t>
+              <a:rPr sz="1300">
+                <a:solidFill>
+                  <a:srgbClr val="E8ECF4"/>
+                </a:solidFill>
+                <a:latin typeface="Courier New"/>
+              </a:rPr>
+              <a:t>2. Fit talks into time slots, breaks every 90 min</a:t>
             </a:r>
             <a:br/>
             <a:r>
-              <a:t>3. Fit talks into time slots respecting availability</a:t>
-            </a:r>
-            <a:br/>
-            <a:r>
-              <a:t>4. Add breaks every 90 minutes</a:t>
-            </a:r>
-            <a:br/>
-            <a:r>
-              <a:t>5. Output markdown table + JSON to schedules/</a:t>
+              <a:rPr sz="1300">
+                <a:solidFill>
+                  <a:srgbClr val="E8ECF4"/>
+                </a:solidFill>
+                <a:latin typeface="Courier New"/>
+              </a:rPr>
+              <a:t>3. Output markdown + JSON to schedules/</a:t>
             </a:r>
           </a:p>
         </p:txBody>
@@ -8013,7 +8091,13 @@
               </a:defRPr>
             </a:pPr>
             <a:r>
-              <a:t>Usage: /build-schedule events/rag-pipelines.json</a:t>
+              <a:rPr sz="1500" i="1">
+                <a:solidFill>
+                  <a:srgbClr val="9CA3B4"/>
+                </a:solidFill>
+                <a:latin typeface="Arial"/>
+              </a:rPr>
+              <a:t>Usage: /build-schedule events/rag-pipelines.json  →  $ARGUMENTS becomes the file path</a:t>
             </a:r>
           </a:p>
         </p:txBody>

--- a/slides/session-2-context-engineering.pptx
+++ b/slides/session-2-context-engineering.pptx
@@ -3169,7 +3169,7 @@
         <p:spPr>
           <a:xfrm>
             <a:off x="685800" y="2377440"/>
-            <a:ext cx="10817352" cy="1463040"/>
+            <a:ext cx="10817352" cy="1645920"/>
           </a:xfrm>
           <a:prstGeom prst="rect">
             <a:avLst/>
@@ -3183,7 +3183,7 @@
           <a:lstStyle/>
           <a:p>
             <a:pPr algn="ctr">
-              <a:defRPr sz="4800" b="1" i="0">
+              <a:defRPr sz="4600" b="1" i="0">
                 <a:solidFill>
                   <a:srgbClr val="E8ECF4"/>
                 </a:solidFill>
@@ -3204,8 +3204,8 @@
         </p:nvSpPr>
         <p:spPr>
           <a:xfrm>
-            <a:off x="1371600" y="3840480"/>
-            <a:ext cx="9445752" cy="822960"/>
+            <a:off x="1371600" y="4023360"/>
+            <a:ext cx="9445752" cy="731520"/>
           </a:xfrm>
           <a:prstGeom prst="rect">
             <a:avLst/>
@@ -3227,7 +3227,7 @@
               </a:defRPr>
             </a:pPr>
             <a:r>
-              <a:t>Session 2 — Context Engineering: Blueprints Beat Prompts</a:t>
+              <a:t>Session 2: Context Engineering</a:t>
             </a:r>
           </a:p>
         </p:txBody>
@@ -3255,7 +3255,7 @@
           <a:lstStyle/>
           <a:p>
             <a:pPr algn="ctr">
-              <a:defRPr sz="1600" b="1" i="0">
+              <a:defRPr sz="1500" b="1" i="0">
                 <a:solidFill>
                   <a:srgbClr val="E8853D"/>
                 </a:solidFill>
@@ -3276,7 +3276,7 @@
         </p:nvSpPr>
         <p:spPr>
           <a:xfrm>
-            <a:off x="1371600" y="5486400"/>
+            <a:off x="1371600" y="5440680"/>
             <a:ext cx="9445752" cy="457200"/>
           </a:xfrm>
           <a:prstGeom prst="rect">
@@ -3332,16 +3332,52 @@
       <p:grpSpPr/>
       <p:sp>
         <p:nvSpPr>
-          <p:cNvPr id="2" name="Rectangle 1"/>
+          <p:cNvPr id="2" name="TextBox 1"/>
+          <p:cNvSpPr txBox="1"/>
+          <p:nvPr/>
+        </p:nvSpPr>
+        <p:spPr>
+          <a:xfrm>
+            <a:off x="457200" y="320040"/>
+            <a:ext cx="9144000" cy="731520"/>
+          </a:xfrm>
+          <a:prstGeom prst="rect">
+            <a:avLst/>
+          </a:prstGeom>
+          <a:noFill/>
+        </p:spPr>
+        <p:txBody>
+          <a:bodyPr wrap="square">
+            <a:spAutoFit/>
+          </a:bodyPr>
+          <a:lstStyle/>
+          <a:p>
+            <a:pPr algn="l">
+              <a:defRPr sz="2800" b="1" i="0">
+                <a:solidFill>
+                  <a:srgbClr val="E8ECF4"/>
+                </a:solidFill>
+                <a:latin typeface="Arial"/>
+              </a:defRPr>
+            </a:pPr>
+            <a:r>
+              <a:t>Good vs. Bad Feature Requests</a:t>
+            </a:r>
+          </a:p>
+        </p:txBody>
+      </p:sp>
+      <p:sp>
+        <p:nvSpPr>
+          <p:cNvPr id="3" name="Rounded Rectangle 2"/>
           <p:cNvSpPr/>
           <p:nvPr/>
         </p:nvSpPr>
         <p:spPr>
           <a:xfrm>
-            <a:off x="0" y="0"/>
-            <a:ext cx="12191695" cy="109728"/>
-          </a:xfrm>
-          <a:prstGeom prst="rect">
+            <a:off x="10515600" y="960120"/>
+            <a:ext cx="1188720" cy="365760"/>
+          </a:xfrm>
+          <a:prstGeom prst="roundRect">
             <a:avLst/>
           </a:prstGeom>
           <a:solidFill>
@@ -3375,14 +3411,14 @@
       </p:sp>
       <p:sp>
         <p:nvSpPr>
-          <p:cNvPr id="3" name="TextBox 2"/>
+          <p:cNvPr id="4" name="TextBox 3"/>
           <p:cNvSpPr txBox="1"/>
           <p:nvPr/>
         </p:nvSpPr>
         <p:spPr>
           <a:xfrm>
-            <a:off x="457200" y="365760"/>
-            <a:ext cx="10972800" cy="822960"/>
+            <a:off x="10515600" y="987552"/>
+            <a:ext cx="1188720" cy="365760"/>
           </a:xfrm>
           <a:prstGeom prst="rect">
             <a:avLst/>
@@ -3395,39 +3431,41 @@
           </a:bodyPr>
           <a:lstStyle/>
           <a:p>
-            <a:pPr algn="l">
-              <a:defRPr sz="3000" b="1" i="0">
-                <a:solidFill>
-                  <a:srgbClr val="E8ECF4"/>
-                </a:solidFill>
-                <a:latin typeface="Arial"/>
+            <a:pPr algn="ctr">
+              <a:defRPr sz="1200" b="1" i="0">
+                <a:solidFill>
+                  <a:srgbClr val="0A0D12"/>
+                </a:solidFill>
+                <a:latin typeface="Courier New"/>
               </a:defRPr>
             </a:pPr>
             <a:r>
-              <a:t>Bad vs. Good Feature Requests</a:t>
-            </a:r>
-          </a:p>
-        </p:txBody>
-      </p:sp>
-      <p:sp>
-        <p:nvSpPr>
-          <p:cNvPr id="4" name="Rectangle 3"/>
+              <a:t>INITIAL</a:t>
+            </a:r>
+          </a:p>
+        </p:txBody>
+      </p:sp>
+      <p:sp>
+        <p:nvSpPr>
+          <p:cNvPr id="5" name="Rounded Rectangle 4"/>
           <p:cNvSpPr/>
           <p:nvPr/>
         </p:nvSpPr>
         <p:spPr>
           <a:xfrm>
-            <a:off x="5989320" y="1371600"/>
-            <a:ext cx="210312" cy="5029200"/>
-          </a:xfrm>
-          <a:prstGeom prst="rect">
-            <a:avLst/>
-          </a:prstGeom>
-          <a:solidFill>
-            <a:srgbClr val="313244"/>
+            <a:off x="457200" y="1188720"/>
+            <a:ext cx="11274552" cy="4389120"/>
+          </a:xfrm>
+          <a:prstGeom prst="roundRect">
+            <a:avLst/>
+          </a:prstGeom>
+          <a:solidFill>
+            <a:srgbClr val="0A0D12"/>
           </a:solidFill>
           <a:ln>
-            <a:noFill/>
+            <a:solidFill>
+              <a:srgbClr val="313244"/>
+            </a:solidFill>
           </a:ln>
         </p:spPr>
         <p:style>
@@ -3454,20 +3492,20 @@
       </p:sp>
       <p:sp>
         <p:nvSpPr>
-          <p:cNvPr id="5" name="Rectangle 4"/>
+          <p:cNvPr id="6" name="Oval 5"/>
           <p:cNvSpPr/>
           <p:nvPr/>
         </p:nvSpPr>
         <p:spPr>
           <a:xfrm>
-            <a:off x="6062472" y="1371600"/>
-            <a:ext cx="64008" cy="5029200"/>
-          </a:xfrm>
-          <a:prstGeom prst="rect">
-            <a:avLst/>
-          </a:prstGeom>
-          <a:solidFill>
-            <a:srgbClr val="E8853D"/>
+            <a:off x="731520" y="1417320"/>
+            <a:ext cx="164592" cy="164592"/>
+          </a:xfrm>
+          <a:prstGeom prst="ellipse">
+            <a:avLst/>
+          </a:prstGeom>
+          <a:solidFill>
+            <a:srgbClr val="F38BA8"/>
           </a:solidFill>
           <a:ln>
             <a:noFill/>
@@ -3497,20 +3535,20 @@
       </p:sp>
       <p:sp>
         <p:nvSpPr>
-          <p:cNvPr id="6" name="Rectangle 5"/>
+          <p:cNvPr id="7" name="Oval 6"/>
           <p:cNvSpPr/>
           <p:nvPr/>
         </p:nvSpPr>
         <p:spPr>
           <a:xfrm>
-            <a:off x="457200" y="1554480"/>
-            <a:ext cx="137160" cy="457200"/>
-          </a:xfrm>
-          <a:prstGeom prst="rect">
-            <a:avLst/>
-          </a:prstGeom>
-          <a:solidFill>
-            <a:srgbClr val="F38BA8"/>
+            <a:off x="1051560" y="1417320"/>
+            <a:ext cx="164592" cy="164592"/>
+          </a:xfrm>
+          <a:prstGeom prst="ellipse">
+            <a:avLst/>
+          </a:prstGeom>
+          <a:solidFill>
+            <a:srgbClr val="F9E2AF"/>
           </a:solidFill>
           <a:ln>
             <a:noFill/>
@@ -3540,56 +3578,20 @@
       </p:sp>
       <p:sp>
         <p:nvSpPr>
-          <p:cNvPr id="7" name="TextBox 6"/>
-          <p:cNvSpPr txBox="1"/>
-          <p:nvPr/>
-        </p:nvSpPr>
-        <p:spPr>
-          <a:xfrm>
-            <a:off x="777240" y="1508760"/>
-            <a:ext cx="5029200" cy="548640"/>
-          </a:xfrm>
-          <a:prstGeom prst="rect">
-            <a:avLst/>
-          </a:prstGeom>
-          <a:noFill/>
-        </p:spPr>
-        <p:txBody>
-          <a:bodyPr wrap="square">
-            <a:spAutoFit/>
-          </a:bodyPr>
-          <a:lstStyle/>
-          <a:p>
-            <a:pPr algn="l">
-              <a:defRPr sz="2200" b="1" i="0">
-                <a:solidFill>
-                  <a:srgbClr val="F38BA8"/>
-                </a:solidFill>
-                <a:latin typeface="Arial"/>
-              </a:defRPr>
-            </a:pPr>
-            <a:r>
-              <a:t>Bad</a:t>
-            </a:r>
-          </a:p>
-        </p:txBody>
-      </p:sp>
-      <p:sp>
-        <p:nvSpPr>
           <p:cNvPr id="8" name="Oval 7"/>
           <p:cNvSpPr/>
           <p:nvPr/>
         </p:nvSpPr>
         <p:spPr>
           <a:xfrm>
-            <a:off x="457200" y="2423160"/>
-            <a:ext cx="91440" cy="91440"/>
+            <a:off x="1371600" y="1417320"/>
+            <a:ext cx="164592" cy="164592"/>
           </a:xfrm>
           <a:prstGeom prst="ellipse">
             <a:avLst/>
           </a:prstGeom>
           <a:solidFill>
-            <a:srgbClr val="F38BA8"/>
+            <a:srgbClr val="A6E3A1"/>
           </a:solidFill>
           <a:ln>
             <a:noFill/>
@@ -3625,8 +3627,70 @@
         </p:nvSpPr>
         <p:spPr>
           <a:xfrm>
-            <a:off x="777240" y="2286000"/>
-            <a:ext cx="5029200" cy="822960"/>
+            <a:off x="731520" y="1920240"/>
+            <a:ext cx="10698480" cy="3611879"/>
+          </a:xfrm>
+          <a:prstGeom prst="rect">
+            <a:avLst/>
+          </a:prstGeom>
+          <a:noFill/>
+        </p:spPr>
+        <p:txBody>
+          <a:bodyPr wrap="none">
+            <a:spAutoFit/>
+          </a:bodyPr>
+          <a:lstStyle/>
+          <a:p>
+            <a:pPr algn="l">
+              <a:defRPr sz="1400" b="0" i="0">
+                <a:solidFill>
+                  <a:srgbClr val="E8ECF4"/>
+                </a:solidFill>
+                <a:latin typeface="Courier New"/>
+              </a:defRPr>
+            </a:pPr>
+            <a:r>
+              <a:t># Bad</a:t>
+            </a:r>
+            <a:br/>
+            <a:r>
+              <a:t>Build a scheduling system for meetups</a:t>
+            </a:r>
+            <a:br/>
+            <a:br/>
+            <a:br/>
+            <a:r>
+              <a:t># Good</a:t>
+            </a:r>
+            <a:br/>
+            <a:r>
+              <a:t>Build a scheduling system that reads event plan JSON from</a:t>
+            </a:r>
+            <a:br/>
+            <a:r>
+              <a:t>/plan-event output, fits talks into time slots using speaker</a:t>
+            </a:r>
+            <a:br/>
+            <a:r>
+              <a:t>availability from data/speakers.json, adds breaks every</a:t>
+            </a:r>
+            <a:br/>
+            <a:r>
+              <a:t>90 min, and outputs both markdown and JSON.</a:t>
+            </a:r>
+          </a:p>
+        </p:txBody>
+      </p:sp>
+      <p:sp>
+        <p:nvSpPr>
+          <p:cNvPr id="10" name="TextBox 9"/>
+          <p:cNvSpPr txBox="1"/>
+          <p:nvPr/>
+        </p:nvSpPr>
+        <p:spPr>
+          <a:xfrm>
+            <a:off x="457200" y="5760720"/>
+            <a:ext cx="11274552" cy="457200"/>
           </a:xfrm>
           <a:prstGeom prst="rect">
             <a:avLst/>
@@ -3639,8 +3703,8 @@
           </a:bodyPr>
           <a:lstStyle/>
           <a:p>
-            <a:pPr algn="l">
-              <a:defRPr sz="1700" b="0" i="0">
+            <a:pPr algn="ctr">
+              <a:defRPr sz="1600" b="1" i="0">
                 <a:solidFill>
                   <a:srgbClr val="E8ECF4"/>
                 </a:solidFill>
@@ -3648,27 +3712,63 @@
               </a:defRPr>
             </a:pPr>
             <a:r>
-              <a:t>'Build a scheduling system for meetups'</a:t>
-            </a:r>
-          </a:p>
-        </p:txBody>
-      </p:sp>
-      <p:sp>
-        <p:nvSpPr>
-          <p:cNvPr id="10" name="Oval 9"/>
+              <a:t>Specific &gt; Vague. Always.</a:t>
+            </a:r>
+          </a:p>
+        </p:txBody>
+      </p:sp>
+      <p:sp>
+        <p:nvSpPr>
+          <p:cNvPr id="11" name="TextBox 10"/>
+          <p:cNvSpPr txBox="1"/>
+          <p:nvPr/>
+        </p:nvSpPr>
+        <p:spPr>
+          <a:xfrm>
+            <a:off x="457200" y="6172200"/>
+            <a:ext cx="11274552" cy="548640"/>
+          </a:xfrm>
+          <a:prstGeom prst="rect">
+            <a:avLst/>
+          </a:prstGeom>
+          <a:noFill/>
+        </p:spPr>
+        <p:txBody>
+          <a:bodyPr wrap="square">
+            <a:spAutoFit/>
+          </a:bodyPr>
+          <a:lstStyle/>
+          <a:p>
+            <a:pPr algn="ctr">
+              <a:defRPr sz="1300" b="0" i="1">
+                <a:solidFill>
+                  <a:srgbClr val="9CA3B4"/>
+                </a:solidFill>
+                <a:latin typeface="Arial"/>
+              </a:defRPr>
+            </a:pPr>
+            <a:r>
+              <a:t>Bad: no data sources, no constraints, no output format. Good: points to files, names constraints, defines outputs.</a:t>
+            </a:r>
+          </a:p>
+        </p:txBody>
+      </p:sp>
+      <p:sp>
+        <p:nvSpPr>
+          <p:cNvPr id="12" name="Rectangle 11"/>
           <p:cNvSpPr/>
           <p:nvPr/>
         </p:nvSpPr>
         <p:spPr>
           <a:xfrm>
-            <a:off x="457200" y="3291840"/>
-            <a:ext cx="91440" cy="91440"/>
-          </a:xfrm>
-          <a:prstGeom prst="ellipse">
-            <a:avLst/>
-          </a:prstGeom>
-          <a:solidFill>
-            <a:srgbClr val="F38BA8"/>
+            <a:off x="0" y="6720840"/>
+            <a:ext cx="12191695" cy="137160"/>
+          </a:xfrm>
+          <a:prstGeom prst="rect">
+            <a:avLst/>
+          </a:prstGeom>
+          <a:solidFill>
+            <a:srgbClr val="5B9CF5"/>
           </a:solidFill>
           <a:ln>
             <a:noFill/>
@@ -3698,14 +3798,14 @@
       </p:sp>
       <p:sp>
         <p:nvSpPr>
-          <p:cNvPr id="11" name="TextBox 10"/>
+          <p:cNvPr id="13" name="TextBox 12"/>
           <p:cNvSpPr txBox="1"/>
           <p:nvPr/>
         </p:nvSpPr>
         <p:spPr>
           <a:xfrm>
-            <a:off x="777240" y="3154680"/>
-            <a:ext cx="5029200" cy="822960"/>
+            <a:off x="11430000" y="6446520"/>
+            <a:ext cx="457200" cy="274320"/>
           </a:xfrm>
           <a:prstGeom prst="rect">
             <a:avLst/>
@@ -3718,597 +3818,8 @@
           </a:bodyPr>
           <a:lstStyle/>
           <a:p>
-            <a:pPr algn="l">
-              <a:defRPr sz="1700" b="0" i="0">
-                <a:solidFill>
-                  <a:srgbClr val="E8ECF4"/>
-                </a:solidFill>
-                <a:latin typeface="Arial"/>
-              </a:defRPr>
-            </a:pPr>
-            <a:r>
-              <a:t>No data sources</a:t>
-            </a:r>
-          </a:p>
-        </p:txBody>
-      </p:sp>
-      <p:sp>
-        <p:nvSpPr>
-          <p:cNvPr id="12" name="Oval 11"/>
-          <p:cNvSpPr/>
-          <p:nvPr/>
-        </p:nvSpPr>
-        <p:spPr>
-          <a:xfrm>
-            <a:off x="457200" y="4160520"/>
-            <a:ext cx="91440" cy="91440"/>
-          </a:xfrm>
-          <a:prstGeom prst="ellipse">
-            <a:avLst/>
-          </a:prstGeom>
-          <a:solidFill>
-            <a:srgbClr val="F38BA8"/>
-          </a:solidFill>
-          <a:ln>
-            <a:noFill/>
-          </a:ln>
-        </p:spPr>
-        <p:style>
-          <a:lnRef idx="1">
-            <a:schemeClr val="accent1"/>
-          </a:lnRef>
-          <a:fillRef idx="3">
-            <a:schemeClr val="accent1"/>
-          </a:fillRef>
-          <a:effectRef idx="2">
-            <a:schemeClr val="accent1"/>
-          </a:effectRef>
-          <a:fontRef idx="minor">
-            <a:schemeClr val="lt1"/>
-          </a:fontRef>
-        </p:style>
-        <p:txBody>
-          <a:bodyPr rtlCol="0" anchor="ctr"/>
-          <a:lstStyle/>
-          <a:p>
-            <a:pPr algn="ctr"/>
-          </a:p>
-        </p:txBody>
-      </p:sp>
-      <p:sp>
-        <p:nvSpPr>
-          <p:cNvPr id="13" name="TextBox 12"/>
-          <p:cNvSpPr txBox="1"/>
-          <p:nvPr/>
-        </p:nvSpPr>
-        <p:spPr>
-          <a:xfrm>
-            <a:off x="777240" y="4023360"/>
-            <a:ext cx="5029200" cy="822960"/>
-          </a:xfrm>
-          <a:prstGeom prst="rect">
-            <a:avLst/>
-          </a:prstGeom>
-          <a:noFill/>
-        </p:spPr>
-        <p:txBody>
-          <a:bodyPr wrap="square">
-            <a:spAutoFit/>
-          </a:bodyPr>
-          <a:lstStyle/>
-          <a:p>
-            <a:pPr algn="l">
-              <a:defRPr sz="1700" b="0" i="0">
-                <a:solidFill>
-                  <a:srgbClr val="E8ECF4"/>
-                </a:solidFill>
-                <a:latin typeface="Arial"/>
-              </a:defRPr>
-            </a:pPr>
-            <a:r>
-              <a:t>No constraints</a:t>
-            </a:r>
-          </a:p>
-        </p:txBody>
-      </p:sp>
-      <p:sp>
-        <p:nvSpPr>
-          <p:cNvPr id="14" name="Oval 13"/>
-          <p:cNvSpPr/>
-          <p:nvPr/>
-        </p:nvSpPr>
-        <p:spPr>
-          <a:xfrm>
-            <a:off x="457200" y="5029200"/>
-            <a:ext cx="91440" cy="91440"/>
-          </a:xfrm>
-          <a:prstGeom prst="ellipse">
-            <a:avLst/>
-          </a:prstGeom>
-          <a:solidFill>
-            <a:srgbClr val="F38BA8"/>
-          </a:solidFill>
-          <a:ln>
-            <a:noFill/>
-          </a:ln>
-        </p:spPr>
-        <p:style>
-          <a:lnRef idx="1">
-            <a:schemeClr val="accent1"/>
-          </a:lnRef>
-          <a:fillRef idx="3">
-            <a:schemeClr val="accent1"/>
-          </a:fillRef>
-          <a:effectRef idx="2">
-            <a:schemeClr val="accent1"/>
-          </a:effectRef>
-          <a:fontRef idx="minor">
-            <a:schemeClr val="lt1"/>
-          </a:fontRef>
-        </p:style>
-        <p:txBody>
-          <a:bodyPr rtlCol="0" anchor="ctr"/>
-          <a:lstStyle/>
-          <a:p>
-            <a:pPr algn="ctr"/>
-          </a:p>
-        </p:txBody>
-      </p:sp>
-      <p:sp>
-        <p:nvSpPr>
-          <p:cNvPr id="15" name="TextBox 14"/>
-          <p:cNvSpPr txBox="1"/>
-          <p:nvPr/>
-        </p:nvSpPr>
-        <p:spPr>
-          <a:xfrm>
-            <a:off x="777240" y="4892040"/>
-            <a:ext cx="5029200" cy="822960"/>
-          </a:xfrm>
-          <a:prstGeom prst="rect">
-            <a:avLst/>
-          </a:prstGeom>
-          <a:noFill/>
-        </p:spPr>
-        <p:txBody>
-          <a:bodyPr wrap="square">
-            <a:spAutoFit/>
-          </a:bodyPr>
-          <a:lstStyle/>
-          <a:p>
-            <a:pPr algn="l">
-              <a:defRPr sz="1700" b="0" i="0">
-                <a:solidFill>
-                  <a:srgbClr val="E8ECF4"/>
-                </a:solidFill>
-                <a:latin typeface="Arial"/>
-              </a:defRPr>
-            </a:pPr>
-            <a:r>
-              <a:t>Ambiguous scope</a:t>
-            </a:r>
-          </a:p>
-        </p:txBody>
-      </p:sp>
-      <p:sp>
-        <p:nvSpPr>
-          <p:cNvPr id="16" name="Rectangle 15"/>
-          <p:cNvSpPr/>
-          <p:nvPr/>
-        </p:nvSpPr>
-        <p:spPr>
-          <a:xfrm>
-            <a:off x="6336792" y="1554480"/>
-            <a:ext cx="137160" cy="457200"/>
-          </a:xfrm>
-          <a:prstGeom prst="rect">
-            <a:avLst/>
-          </a:prstGeom>
-          <a:solidFill>
-            <a:srgbClr val="56C495"/>
-          </a:solidFill>
-          <a:ln>
-            <a:noFill/>
-          </a:ln>
-        </p:spPr>
-        <p:style>
-          <a:lnRef idx="1">
-            <a:schemeClr val="accent1"/>
-          </a:lnRef>
-          <a:fillRef idx="3">
-            <a:schemeClr val="accent1"/>
-          </a:fillRef>
-          <a:effectRef idx="2">
-            <a:schemeClr val="accent1"/>
-          </a:effectRef>
-          <a:fontRef idx="minor">
-            <a:schemeClr val="lt1"/>
-          </a:fontRef>
-        </p:style>
-        <p:txBody>
-          <a:bodyPr rtlCol="0" anchor="ctr"/>
-          <a:lstStyle/>
-          <a:p>
-            <a:pPr algn="ctr"/>
-          </a:p>
-        </p:txBody>
-      </p:sp>
-      <p:sp>
-        <p:nvSpPr>
-          <p:cNvPr id="17" name="TextBox 16"/>
-          <p:cNvSpPr txBox="1"/>
-          <p:nvPr/>
-        </p:nvSpPr>
-        <p:spPr>
-          <a:xfrm>
-            <a:off x="6656832" y="1508760"/>
-            <a:ext cx="5029200" cy="548640"/>
-          </a:xfrm>
-          <a:prstGeom prst="rect">
-            <a:avLst/>
-          </a:prstGeom>
-          <a:noFill/>
-        </p:spPr>
-        <p:txBody>
-          <a:bodyPr wrap="square">
-            <a:spAutoFit/>
-          </a:bodyPr>
-          <a:lstStyle/>
-          <a:p>
-            <a:pPr algn="l">
-              <a:defRPr sz="2200" b="1" i="0">
-                <a:solidFill>
-                  <a:srgbClr val="56C495"/>
-                </a:solidFill>
-                <a:latin typeface="Arial"/>
-              </a:defRPr>
-            </a:pPr>
-            <a:r>
-              <a:t>Good</a:t>
-            </a:r>
-          </a:p>
-        </p:txBody>
-      </p:sp>
-      <p:sp>
-        <p:nvSpPr>
-          <p:cNvPr id="18" name="Oval 17"/>
-          <p:cNvSpPr/>
-          <p:nvPr/>
-        </p:nvSpPr>
-        <p:spPr>
-          <a:xfrm>
-            <a:off x="6336792" y="2423160"/>
-            <a:ext cx="91440" cy="91440"/>
-          </a:xfrm>
-          <a:prstGeom prst="ellipse">
-            <a:avLst/>
-          </a:prstGeom>
-          <a:solidFill>
-            <a:srgbClr val="56C495"/>
-          </a:solidFill>
-          <a:ln>
-            <a:noFill/>
-          </a:ln>
-        </p:spPr>
-        <p:style>
-          <a:lnRef idx="1">
-            <a:schemeClr val="accent1"/>
-          </a:lnRef>
-          <a:fillRef idx="3">
-            <a:schemeClr val="accent1"/>
-          </a:fillRef>
-          <a:effectRef idx="2">
-            <a:schemeClr val="accent1"/>
-          </a:effectRef>
-          <a:fontRef idx="minor">
-            <a:schemeClr val="lt1"/>
-          </a:fontRef>
-        </p:style>
-        <p:txBody>
-          <a:bodyPr rtlCol="0" anchor="ctr"/>
-          <a:lstStyle/>
-          <a:p>
-            <a:pPr algn="ctr"/>
-          </a:p>
-        </p:txBody>
-      </p:sp>
-      <p:sp>
-        <p:nvSpPr>
-          <p:cNvPr id="19" name="TextBox 18"/>
-          <p:cNvSpPr txBox="1"/>
-          <p:nvPr/>
-        </p:nvSpPr>
-        <p:spPr>
-          <a:xfrm>
-            <a:off x="6656832" y="2286000"/>
-            <a:ext cx="5029200" cy="822960"/>
-          </a:xfrm>
-          <a:prstGeom prst="rect">
-            <a:avLst/>
-          </a:prstGeom>
-          <a:noFill/>
-        </p:spPr>
-        <p:txBody>
-          <a:bodyPr wrap="square">
-            <a:spAutoFit/>
-          </a:bodyPr>
-          <a:lstStyle/>
-          <a:p>
-            <a:pPr algn="l">
-              <a:defRPr sz="1700" b="0" i="0">
-                <a:solidFill>
-                  <a:srgbClr val="E8ECF4"/>
-                </a:solidFill>
-                <a:latin typeface="Arial"/>
-              </a:defRPr>
-            </a:pPr>
-            <a:r>
-              <a:t>Reads event plan JSON from /plan-event</a:t>
-            </a:r>
-          </a:p>
-        </p:txBody>
-      </p:sp>
-      <p:sp>
-        <p:nvSpPr>
-          <p:cNvPr id="20" name="Oval 19"/>
-          <p:cNvSpPr/>
-          <p:nvPr/>
-        </p:nvSpPr>
-        <p:spPr>
-          <a:xfrm>
-            <a:off x="6336792" y="3291840"/>
-            <a:ext cx="91440" cy="91440"/>
-          </a:xfrm>
-          <a:prstGeom prst="ellipse">
-            <a:avLst/>
-          </a:prstGeom>
-          <a:solidFill>
-            <a:srgbClr val="56C495"/>
-          </a:solidFill>
-          <a:ln>
-            <a:noFill/>
-          </a:ln>
-        </p:spPr>
-        <p:style>
-          <a:lnRef idx="1">
-            <a:schemeClr val="accent1"/>
-          </a:lnRef>
-          <a:fillRef idx="3">
-            <a:schemeClr val="accent1"/>
-          </a:fillRef>
-          <a:effectRef idx="2">
-            <a:schemeClr val="accent1"/>
-          </a:effectRef>
-          <a:fontRef idx="minor">
-            <a:schemeClr val="lt1"/>
-          </a:fontRef>
-        </p:style>
-        <p:txBody>
-          <a:bodyPr rtlCol="0" anchor="ctr"/>
-          <a:lstStyle/>
-          <a:p>
-            <a:pPr algn="ctr"/>
-          </a:p>
-        </p:txBody>
-      </p:sp>
-      <p:sp>
-        <p:nvSpPr>
-          <p:cNvPr id="21" name="TextBox 20"/>
-          <p:cNvSpPr txBox="1"/>
-          <p:nvPr/>
-        </p:nvSpPr>
-        <p:spPr>
-          <a:xfrm>
-            <a:off x="6656832" y="3154680"/>
-            <a:ext cx="5029200" cy="822960"/>
-          </a:xfrm>
-          <a:prstGeom prst="rect">
-            <a:avLst/>
-          </a:prstGeom>
-          <a:noFill/>
-        </p:spPr>
-        <p:txBody>
-          <a:bodyPr wrap="square">
-            <a:spAutoFit/>
-          </a:bodyPr>
-          <a:lstStyle/>
-          <a:p>
-            <a:pPr algn="l">
-              <a:defRPr sz="1700" b="0" i="0">
-                <a:solidFill>
-                  <a:srgbClr val="E8ECF4"/>
-                </a:solidFill>
-                <a:latin typeface="Arial"/>
-              </a:defRPr>
-            </a:pPr>
-            <a:r>
-              <a:t>Uses speaker availability from data/speakers.json</a:t>
-            </a:r>
-          </a:p>
-        </p:txBody>
-      </p:sp>
-      <p:sp>
-        <p:nvSpPr>
-          <p:cNvPr id="22" name="Oval 21"/>
-          <p:cNvSpPr/>
-          <p:nvPr/>
-        </p:nvSpPr>
-        <p:spPr>
-          <a:xfrm>
-            <a:off x="6336792" y="4160520"/>
-            <a:ext cx="91440" cy="91440"/>
-          </a:xfrm>
-          <a:prstGeom prst="ellipse">
-            <a:avLst/>
-          </a:prstGeom>
-          <a:solidFill>
-            <a:srgbClr val="56C495"/>
-          </a:solidFill>
-          <a:ln>
-            <a:noFill/>
-          </a:ln>
-        </p:spPr>
-        <p:style>
-          <a:lnRef idx="1">
-            <a:schemeClr val="accent1"/>
-          </a:lnRef>
-          <a:fillRef idx="3">
-            <a:schemeClr val="accent1"/>
-          </a:fillRef>
-          <a:effectRef idx="2">
-            <a:schemeClr val="accent1"/>
-          </a:effectRef>
-          <a:fontRef idx="minor">
-            <a:schemeClr val="lt1"/>
-          </a:fontRef>
-        </p:style>
-        <p:txBody>
-          <a:bodyPr rtlCol="0" anchor="ctr"/>
-          <a:lstStyle/>
-          <a:p>
-            <a:pPr algn="ctr"/>
-          </a:p>
-        </p:txBody>
-      </p:sp>
-      <p:sp>
-        <p:nvSpPr>
-          <p:cNvPr id="23" name="TextBox 22"/>
-          <p:cNvSpPr txBox="1"/>
-          <p:nvPr/>
-        </p:nvSpPr>
-        <p:spPr>
-          <a:xfrm>
-            <a:off x="6656832" y="4023360"/>
-            <a:ext cx="5029200" cy="822960"/>
-          </a:xfrm>
-          <a:prstGeom prst="rect">
-            <a:avLst/>
-          </a:prstGeom>
-          <a:noFill/>
-        </p:spPr>
-        <p:txBody>
-          <a:bodyPr wrap="square">
-            <a:spAutoFit/>
-          </a:bodyPr>
-          <a:lstStyle/>
-          <a:p>
-            <a:pPr algn="l">
-              <a:defRPr sz="1700" b="0" i="0">
-                <a:solidFill>
-                  <a:srgbClr val="E8ECF4"/>
-                </a:solidFill>
-                <a:latin typeface="Arial"/>
-              </a:defRPr>
-            </a:pPr>
-            <a:r>
-              <a:t>Adds breaks every 90 min</a:t>
-            </a:r>
-          </a:p>
-        </p:txBody>
-      </p:sp>
-      <p:sp>
-        <p:nvSpPr>
-          <p:cNvPr id="24" name="Oval 23"/>
-          <p:cNvSpPr/>
-          <p:nvPr/>
-        </p:nvSpPr>
-        <p:spPr>
-          <a:xfrm>
-            <a:off x="6336792" y="5029200"/>
-            <a:ext cx="91440" cy="91440"/>
-          </a:xfrm>
-          <a:prstGeom prst="ellipse">
-            <a:avLst/>
-          </a:prstGeom>
-          <a:solidFill>
-            <a:srgbClr val="56C495"/>
-          </a:solidFill>
-          <a:ln>
-            <a:noFill/>
-          </a:ln>
-        </p:spPr>
-        <p:style>
-          <a:lnRef idx="1">
-            <a:schemeClr val="accent1"/>
-          </a:lnRef>
-          <a:fillRef idx="3">
-            <a:schemeClr val="accent1"/>
-          </a:fillRef>
-          <a:effectRef idx="2">
-            <a:schemeClr val="accent1"/>
-          </a:effectRef>
-          <a:fontRef idx="minor">
-            <a:schemeClr val="lt1"/>
-          </a:fontRef>
-        </p:style>
-        <p:txBody>
-          <a:bodyPr rtlCol="0" anchor="ctr"/>
-          <a:lstStyle/>
-          <a:p>
-            <a:pPr algn="ctr"/>
-          </a:p>
-        </p:txBody>
-      </p:sp>
-      <p:sp>
-        <p:nvSpPr>
-          <p:cNvPr id="25" name="TextBox 24"/>
-          <p:cNvSpPr txBox="1"/>
-          <p:nvPr/>
-        </p:nvSpPr>
-        <p:spPr>
-          <a:xfrm>
-            <a:off x="6656832" y="4892040"/>
-            <a:ext cx="5029200" cy="822960"/>
-          </a:xfrm>
-          <a:prstGeom prst="rect">
-            <a:avLst/>
-          </a:prstGeom>
-          <a:noFill/>
-        </p:spPr>
-        <p:txBody>
-          <a:bodyPr wrap="square">
-            <a:spAutoFit/>
-          </a:bodyPr>
-          <a:lstStyle/>
-          <a:p>
-            <a:pPr algn="l">
-              <a:defRPr sz="1700" b="0" i="0">
-                <a:solidFill>
-                  <a:srgbClr val="E8ECF4"/>
-                </a:solidFill>
-                <a:latin typeface="Arial"/>
-              </a:defRPr>
-            </a:pPr>
-            <a:r>
-              <a:t>Outputs both markdown and JSON</a:t>
-            </a:r>
-          </a:p>
-        </p:txBody>
-      </p:sp>
-      <p:sp>
-        <p:nvSpPr>
-          <p:cNvPr id="26" name="TextBox 25"/>
-          <p:cNvSpPr txBox="1"/>
-          <p:nvPr/>
-        </p:nvSpPr>
-        <p:spPr>
-          <a:xfrm>
-            <a:off x="11430000" y="6400800"/>
-            <a:ext cx="457200" cy="274320"/>
-          </a:xfrm>
-          <a:prstGeom prst="rect">
-            <a:avLst/>
-          </a:prstGeom>
-          <a:noFill/>
-        </p:spPr>
-        <p:txBody>
-          <a:bodyPr wrap="square">
-            <a:spAutoFit/>
-          </a:bodyPr>
-          <a:lstStyle/>
-          <a:p>
             <a:pPr algn="r">
-              <a:defRPr sz="1200" b="0" i="0">
+              <a:defRPr sz="1100" b="0" i="0">
                 <a:solidFill>
                   <a:srgbClr val="9CA3B4"/>
                 </a:solidFill>
@@ -4349,56 +3860,20 @@
       <p:grpSpPr/>
       <p:sp>
         <p:nvSpPr>
-          <p:cNvPr id="2" name="TextBox 1"/>
-          <p:cNvSpPr txBox="1"/>
-          <p:nvPr/>
-        </p:nvSpPr>
-        <p:spPr>
-          <a:xfrm>
-            <a:off x="457200" y="457200"/>
-            <a:ext cx="11430000" cy="914400"/>
-          </a:xfrm>
-          <a:prstGeom prst="rect">
-            <a:avLst/>
-          </a:prstGeom>
-          <a:noFill/>
-        </p:spPr>
-        <p:txBody>
-          <a:bodyPr wrap="square">
-            <a:spAutoFit/>
-          </a:bodyPr>
-          <a:lstStyle/>
-          <a:p>
-            <a:pPr algn="ctr">
-              <a:defRPr sz="3600" b="1" i="0">
-                <a:solidFill>
-                  <a:srgbClr val="E8ECF4"/>
-                </a:solidFill>
-                <a:latin typeface="Arial"/>
-              </a:defRPr>
-            </a:pPr>
-            <a:r>
-              <a:t>PRPs — Implementation Blueprints</a:t>
-            </a:r>
-          </a:p>
-        </p:txBody>
-      </p:sp>
-      <p:sp>
-        <p:nvSpPr>
-          <p:cNvPr id="3" name="Rounded Rectangle 2"/>
+          <p:cNvPr id="2" name="Rectangle 1"/>
           <p:cNvSpPr/>
           <p:nvPr/>
         </p:nvSpPr>
         <p:spPr>
           <a:xfrm>
-            <a:off x="868680" y="1965960"/>
-            <a:ext cx="3840480" cy="3657600"/>
-          </a:xfrm>
-          <a:prstGeom prst="roundRect">
-            <a:avLst/>
-          </a:prstGeom>
-          <a:solidFill>
-            <a:srgbClr val="070910"/>
+            <a:off x="0" y="0"/>
+            <a:ext cx="73152" cy="6858000"/>
+          </a:xfrm>
+          <a:prstGeom prst="rect">
+            <a:avLst/>
+          </a:prstGeom>
+          <a:solidFill>
+            <a:srgbClr val="E8853D"/>
           </a:solidFill>
           <a:ln>
             <a:noFill/>
@@ -4428,20 +3903,56 @@
       </p:sp>
       <p:sp>
         <p:nvSpPr>
-          <p:cNvPr id="4" name="Rounded Rectangle 3"/>
+          <p:cNvPr id="3" name="TextBox 2"/>
+          <p:cNvSpPr txBox="1"/>
+          <p:nvPr/>
+        </p:nvSpPr>
+        <p:spPr>
+          <a:xfrm>
+            <a:off x="548640" y="365760"/>
+            <a:ext cx="10972800" cy="822960"/>
+          </a:xfrm>
+          <a:prstGeom prst="rect">
+            <a:avLst/>
+          </a:prstGeom>
+          <a:noFill/>
+        </p:spPr>
+        <p:txBody>
+          <a:bodyPr wrap="square">
+            <a:spAutoFit/>
+          </a:bodyPr>
+          <a:lstStyle/>
+          <a:p>
+            <a:pPr algn="l">
+              <a:defRPr sz="3200" b="1" i="0">
+                <a:solidFill>
+                  <a:srgbClr val="E8ECF4"/>
+                </a:solidFill>
+                <a:latin typeface="Arial"/>
+              </a:defRPr>
+            </a:pPr>
+            <a:r>
+              <a:t>PRPs — Implementation Blueprints</a:t>
+            </a:r>
+          </a:p>
+        </p:txBody>
+      </p:sp>
+      <p:sp>
+        <p:nvSpPr>
+          <p:cNvPr id="4" name="Rectangle 3"/>
           <p:cNvSpPr/>
           <p:nvPr/>
         </p:nvSpPr>
         <p:spPr>
           <a:xfrm>
-            <a:off x="731520" y="1828800"/>
-            <a:ext cx="3840480" cy="3657600"/>
-          </a:xfrm>
-          <a:prstGeom prst="roundRect">
-            <a:avLst/>
-          </a:prstGeom>
-          <a:solidFill>
-            <a:srgbClr val="1A2030"/>
+            <a:off x="548640" y="1207008"/>
+            <a:ext cx="2286000" cy="54864"/>
+          </a:xfrm>
+          <a:prstGeom prst="rect">
+            <a:avLst/>
+          </a:prstGeom>
+          <a:solidFill>
+            <a:srgbClr val="5B9CF5"/>
           </a:solidFill>
           <a:ln>
             <a:noFill/>
@@ -4471,14 +3982,50 @@
       </p:sp>
       <p:sp>
         <p:nvSpPr>
-          <p:cNvPr id="5" name="Rectangle 4"/>
+          <p:cNvPr id="5" name="TextBox 4"/>
+          <p:cNvSpPr txBox="1"/>
+          <p:nvPr/>
+        </p:nvSpPr>
+        <p:spPr>
+          <a:xfrm>
+            <a:off x="548640" y="1508760"/>
+            <a:ext cx="10972800" cy="640080"/>
+          </a:xfrm>
+          <a:prstGeom prst="rect">
+            <a:avLst/>
+          </a:prstGeom>
+          <a:noFill/>
+        </p:spPr>
+        <p:txBody>
+          <a:bodyPr wrap="square">
+            <a:spAutoFit/>
+          </a:bodyPr>
+          <a:lstStyle/>
+          <a:p>
+            <a:pPr algn="l">
+              <a:defRPr sz="1900" b="0" i="1">
+                <a:solidFill>
+                  <a:srgbClr val="9CA3B4"/>
+                </a:solidFill>
+                <a:latin typeface="Arial"/>
+              </a:defRPr>
+            </a:pPr>
+            <a:r>
+              <a:t>PRP = Product Requirements Prompt. Like a PRD, but for AI coding assistants.</a:t>
+            </a:r>
+          </a:p>
+        </p:txBody>
+      </p:sp>
+      <p:sp>
+        <p:nvSpPr>
+          <p:cNvPr id="6" name="Rectangle 5"/>
           <p:cNvSpPr/>
           <p:nvPr/>
         </p:nvSpPr>
         <p:spPr>
           <a:xfrm>
-            <a:off x="1005840" y="2103120"/>
-            <a:ext cx="731520" cy="109728"/>
+            <a:off x="548640" y="2450592"/>
+            <a:ext cx="109728" cy="109728"/>
           </a:xfrm>
           <a:prstGeom prst="rect">
             <a:avLst/>
@@ -4514,14 +4061,14 @@
       </p:sp>
       <p:sp>
         <p:nvSpPr>
-          <p:cNvPr id="6" name="TextBox 5"/>
+          <p:cNvPr id="7" name="TextBox 6"/>
           <p:cNvSpPr txBox="1"/>
           <p:nvPr/>
         </p:nvSpPr>
         <p:spPr>
           <a:xfrm>
-            <a:off x="1005840" y="2377440"/>
-            <a:ext cx="914400" cy="731520"/>
+            <a:off x="914400" y="2286000"/>
+            <a:ext cx="10515600" cy="868680"/>
           </a:xfrm>
           <a:prstGeom prst="rect">
             <a:avLst/>
@@ -4535,107 +4082,35 @@
           <a:lstStyle/>
           <a:p>
             <a:pPr algn="l">
-              <a:defRPr sz="3000" b="1" i="0">
-                <a:solidFill>
-                  <a:srgbClr val="E8853D"/>
+              <a:defRPr sz="1800" b="0" i="0">
+                <a:solidFill>
+                  <a:srgbClr val="E8ECF4"/>
                 </a:solidFill>
                 <a:latin typeface="Arial"/>
               </a:defRPr>
             </a:pPr>
             <a:r>
-              <a:t>01</a:t>
-            </a:r>
-          </a:p>
-        </p:txBody>
-      </p:sp>
-      <p:sp>
-        <p:nvSpPr>
-          <p:cNvPr id="7" name="TextBox 6"/>
-          <p:cNvSpPr txBox="1"/>
-          <p:nvPr/>
-        </p:nvSpPr>
-        <p:spPr>
-          <a:xfrm>
-            <a:off x="1005840" y="3200400"/>
-            <a:ext cx="3291840" cy="914400"/>
-          </a:xfrm>
-          <a:prstGeom prst="rect">
-            <a:avLst/>
-          </a:prstGeom>
-          <a:noFill/>
-        </p:spPr>
-        <p:txBody>
-          <a:bodyPr wrap="square">
-            <a:spAutoFit/>
-          </a:bodyPr>
-          <a:lstStyle/>
-          <a:p>
-            <a:pPr algn="l">
-              <a:defRPr sz="2200" b="1" i="0">
-                <a:solidFill>
-                  <a:srgbClr val="E8ECF4"/>
-                </a:solidFill>
-                <a:latin typeface="Arial"/>
-              </a:defRPr>
-            </a:pPr>
-            <a:r>
-              <a:t>Complete Context</a:t>
-            </a:r>
-          </a:p>
-        </p:txBody>
-      </p:sp>
-      <p:sp>
-        <p:nvSpPr>
-          <p:cNvPr id="8" name="TextBox 7"/>
-          <p:cNvSpPr txBox="1"/>
-          <p:nvPr/>
-        </p:nvSpPr>
-        <p:spPr>
-          <a:xfrm>
-            <a:off x="1005840" y="4206240"/>
-            <a:ext cx="3291840" cy="1097280"/>
-          </a:xfrm>
-          <a:prstGeom prst="rect">
-            <a:avLst/>
-          </a:prstGeom>
-          <a:noFill/>
-        </p:spPr>
-        <p:txBody>
-          <a:bodyPr wrap="square">
-            <a:spAutoFit/>
-          </a:bodyPr>
-          <a:lstStyle/>
-          <a:p>
-            <a:pPr algn="l">
-              <a:defRPr sz="1600" b="0" i="0">
-                <a:solidFill>
-                  <a:srgbClr val="9CA3B4"/>
-                </a:solidFill>
-                <a:latin typeface="Arial"/>
-              </a:defRPr>
-            </a:pPr>
-            <a:r>
-              <a:t>Everything the AI needs to know, in one file</a:t>
-            </a:r>
-          </a:p>
-        </p:txBody>
-      </p:sp>
-      <p:sp>
-        <p:nvSpPr>
-          <p:cNvPr id="9" name="Rounded Rectangle 8"/>
+              <a:t>Complete context — everything the AI needs, in one file</a:t>
+            </a:r>
+          </a:p>
+        </p:txBody>
+      </p:sp>
+      <p:sp>
+        <p:nvSpPr>
+          <p:cNvPr id="8" name="Rectangle 7"/>
           <p:cNvSpPr/>
           <p:nvPr/>
         </p:nvSpPr>
         <p:spPr>
           <a:xfrm>
-            <a:off x="4251960" y="2331720"/>
-            <a:ext cx="3840480" cy="3657600"/>
-          </a:xfrm>
-          <a:prstGeom prst="roundRect">
-            <a:avLst/>
-          </a:prstGeom>
-          <a:solidFill>
-            <a:srgbClr val="070910"/>
+            <a:off x="548640" y="3364992"/>
+            <a:ext cx="109728" cy="109728"/>
+          </a:xfrm>
+          <a:prstGeom prst="rect">
+            <a:avLst/>
+          </a:prstGeom>
+          <a:solidFill>
+            <a:srgbClr val="E8853D"/>
           </a:solidFill>
           <a:ln>
             <a:noFill/>
@@ -4665,20 +4140,56 @@
       </p:sp>
       <p:sp>
         <p:nvSpPr>
-          <p:cNvPr id="10" name="Rounded Rectangle 9"/>
+          <p:cNvPr id="9" name="TextBox 8"/>
+          <p:cNvSpPr txBox="1"/>
+          <p:nvPr/>
+        </p:nvSpPr>
+        <p:spPr>
+          <a:xfrm>
+            <a:off x="914400" y="3200400"/>
+            <a:ext cx="10515600" cy="868680"/>
+          </a:xfrm>
+          <a:prstGeom prst="rect">
+            <a:avLst/>
+          </a:prstGeom>
+          <a:noFill/>
+        </p:spPr>
+        <p:txBody>
+          <a:bodyPr wrap="square">
+            <a:spAutoFit/>
+          </a:bodyPr>
+          <a:lstStyle/>
+          <a:p>
+            <a:pPr algn="l">
+              <a:defRPr sz="1800" b="0" i="0">
+                <a:solidFill>
+                  <a:srgbClr val="E8ECF4"/>
+                </a:solidFill>
+                <a:latin typeface="Arial"/>
+              </a:defRPr>
+            </a:pPr>
+            <a:r>
+              <a:t>Step-by-step plan — ordered tasks with dependencies</a:t>
+            </a:r>
+          </a:p>
+        </p:txBody>
+      </p:sp>
+      <p:sp>
+        <p:nvSpPr>
+          <p:cNvPr id="10" name="Rectangle 9"/>
           <p:cNvSpPr/>
           <p:nvPr/>
         </p:nvSpPr>
         <p:spPr>
           <a:xfrm>
-            <a:off x="4114800" y="2194560"/>
-            <a:ext cx="3840480" cy="3657600"/>
-          </a:xfrm>
-          <a:prstGeom prst="roundRect">
-            <a:avLst/>
-          </a:prstGeom>
-          <a:solidFill>
-            <a:srgbClr val="222A3A"/>
+            <a:off x="548640" y="4279392"/>
+            <a:ext cx="109728" cy="109728"/>
+          </a:xfrm>
+          <a:prstGeom prst="rect">
+            <a:avLst/>
+          </a:prstGeom>
+          <a:solidFill>
+            <a:srgbClr val="E8853D"/>
           </a:solidFill>
           <a:ln>
             <a:noFill/>
@@ -4708,20 +4219,56 @@
       </p:sp>
       <p:sp>
         <p:nvSpPr>
-          <p:cNvPr id="11" name="Rectangle 10"/>
+          <p:cNvPr id="11" name="TextBox 10"/>
+          <p:cNvSpPr txBox="1"/>
+          <p:nvPr/>
+        </p:nvSpPr>
+        <p:spPr>
+          <a:xfrm>
+            <a:off x="914400" y="4114800"/>
+            <a:ext cx="10515600" cy="868680"/>
+          </a:xfrm>
+          <a:prstGeom prst="rect">
+            <a:avLst/>
+          </a:prstGeom>
+          <a:noFill/>
+        </p:spPr>
+        <p:txBody>
+          <a:bodyPr wrap="square">
+            <a:spAutoFit/>
+          </a:bodyPr>
+          <a:lstStyle/>
+          <a:p>
+            <a:pPr algn="l">
+              <a:defRPr sz="1800" b="0" i="0">
+                <a:solidFill>
+                  <a:srgbClr val="E8ECF4"/>
+                </a:solidFill>
+                <a:latin typeface="Arial"/>
+              </a:defRPr>
+            </a:pPr>
+            <a:r>
+              <a:t>Validation gates — tests and checks that must pass</a:t>
+            </a:r>
+          </a:p>
+        </p:txBody>
+      </p:sp>
+      <p:sp>
+        <p:nvSpPr>
+          <p:cNvPr id="12" name="Rectangle 11"/>
           <p:cNvSpPr/>
           <p:nvPr/>
         </p:nvSpPr>
         <p:spPr>
           <a:xfrm>
-            <a:off x="4389120" y="2468879"/>
-            <a:ext cx="731520" cy="109728"/>
-          </a:xfrm>
-          <a:prstGeom prst="rect">
-            <a:avLst/>
-          </a:prstGeom>
-          <a:solidFill>
-            <a:srgbClr val="5B9CF5"/>
+            <a:off x="548640" y="5193792"/>
+            <a:ext cx="109728" cy="109728"/>
+          </a:xfrm>
+          <a:prstGeom prst="rect">
+            <a:avLst/>
+          </a:prstGeom>
+          <a:solidFill>
+            <a:srgbClr val="E8853D"/>
           </a:solidFill>
           <a:ln>
             <a:noFill/>
@@ -4751,14 +4298,14 @@
       </p:sp>
       <p:sp>
         <p:nvSpPr>
-          <p:cNvPr id="12" name="TextBox 11"/>
+          <p:cNvPr id="13" name="TextBox 12"/>
           <p:cNvSpPr txBox="1"/>
           <p:nvPr/>
         </p:nvSpPr>
         <p:spPr>
           <a:xfrm>
-            <a:off x="4389120" y="2743200"/>
-            <a:ext cx="914400" cy="731520"/>
+            <a:off x="914400" y="5029200"/>
+            <a:ext cx="10515600" cy="868680"/>
           </a:xfrm>
           <a:prstGeom prst="rect">
             <a:avLst/>
@@ -4772,29 +4319,29 @@
           <a:lstStyle/>
           <a:p>
             <a:pPr algn="l">
-              <a:defRPr sz="3000" b="1" i="0">
-                <a:solidFill>
-                  <a:srgbClr val="5B9CF5"/>
+              <a:defRPr sz="1800" b="0" i="0">
+                <a:solidFill>
+                  <a:srgbClr val="E8ECF4"/>
                 </a:solidFill>
                 <a:latin typeface="Arial"/>
               </a:defRPr>
             </a:pPr>
             <a:r>
-              <a:t>02</a:t>
-            </a:r>
-          </a:p>
-        </p:txBody>
-      </p:sp>
-      <p:sp>
-        <p:nvSpPr>
-          <p:cNvPr id="13" name="TextBox 12"/>
+              <a:t>Error handling — what to do when things go wrong</a:t>
+            </a:r>
+          </a:p>
+        </p:txBody>
+      </p:sp>
+      <p:sp>
+        <p:nvSpPr>
+          <p:cNvPr id="14" name="TextBox 13"/>
           <p:cNvSpPr txBox="1"/>
           <p:nvPr/>
         </p:nvSpPr>
         <p:spPr>
           <a:xfrm>
-            <a:off x="4389120" y="3566160"/>
-            <a:ext cx="3291840" cy="914400"/>
+            <a:off x="548640" y="6126480"/>
+            <a:ext cx="10972800" cy="365760"/>
           </a:xfrm>
           <a:prstGeom prst="rect">
             <a:avLst/>
@@ -4808,29 +4355,29 @@
           <a:lstStyle/>
           <a:p>
             <a:pPr algn="l">
-              <a:defRPr sz="2200" b="1" i="0">
-                <a:solidFill>
-                  <a:srgbClr val="E8ECF4"/>
+              <a:defRPr sz="1400" b="0" i="1">
+                <a:solidFill>
+                  <a:srgbClr val="9CA3B4"/>
                 </a:solidFill>
                 <a:latin typeface="Arial"/>
               </a:defRPr>
             </a:pPr>
             <a:r>
-              <a:t>Step-by-Step Plan</a:t>
-            </a:r>
-          </a:p>
-        </p:txBody>
-      </p:sp>
-      <p:sp>
-        <p:nvSpPr>
-          <p:cNvPr id="14" name="TextBox 13"/>
+              <a:t>Generated from INITIAL.md by /generate-prp. Templates in templates/.claude/commands/.</a:t>
+            </a:r>
+          </a:p>
+        </p:txBody>
+      </p:sp>
+      <p:sp>
+        <p:nvSpPr>
+          <p:cNvPr id="15" name="TextBox 14"/>
           <p:cNvSpPr txBox="1"/>
           <p:nvPr/>
         </p:nvSpPr>
         <p:spPr>
           <a:xfrm>
-            <a:off x="4389120" y="4572000"/>
-            <a:ext cx="3291840" cy="1097280"/>
+            <a:off x="11430000" y="6446520"/>
+            <a:ext cx="457200" cy="274320"/>
           </a:xfrm>
           <a:prstGeom prst="rect">
             <a:avLst/>
@@ -4843,281 +4390,8 @@
           </a:bodyPr>
           <a:lstStyle/>
           <a:p>
-            <a:pPr algn="l">
-              <a:defRPr sz="1600" b="0" i="0">
-                <a:solidFill>
-                  <a:srgbClr val="9CA3B4"/>
-                </a:solidFill>
-                <a:latin typeface="Arial"/>
-              </a:defRPr>
-            </a:pPr>
-            <a:r>
-              <a:t>Ordered tasks with dependencies and outputs</a:t>
-            </a:r>
-          </a:p>
-        </p:txBody>
-      </p:sp>
-      <p:sp>
-        <p:nvSpPr>
-          <p:cNvPr id="15" name="Rounded Rectangle 14"/>
-          <p:cNvSpPr/>
-          <p:nvPr/>
-        </p:nvSpPr>
-        <p:spPr>
-          <a:xfrm>
-            <a:off x="7635240" y="1783080"/>
-            <a:ext cx="3840480" cy="3657600"/>
-          </a:xfrm>
-          <a:prstGeom prst="roundRect">
-            <a:avLst/>
-          </a:prstGeom>
-          <a:solidFill>
-            <a:srgbClr val="070910"/>
-          </a:solidFill>
-          <a:ln>
-            <a:noFill/>
-          </a:ln>
-        </p:spPr>
-        <p:style>
-          <a:lnRef idx="1">
-            <a:schemeClr val="accent1"/>
-          </a:lnRef>
-          <a:fillRef idx="3">
-            <a:schemeClr val="accent1"/>
-          </a:fillRef>
-          <a:effectRef idx="2">
-            <a:schemeClr val="accent1"/>
-          </a:effectRef>
-          <a:fontRef idx="minor">
-            <a:schemeClr val="lt1"/>
-          </a:fontRef>
-        </p:style>
-        <p:txBody>
-          <a:bodyPr rtlCol="0" anchor="ctr"/>
-          <a:lstStyle/>
-          <a:p>
-            <a:pPr algn="ctr"/>
-          </a:p>
-        </p:txBody>
-      </p:sp>
-      <p:sp>
-        <p:nvSpPr>
-          <p:cNvPr id="16" name="Rounded Rectangle 15"/>
-          <p:cNvSpPr/>
-          <p:nvPr/>
-        </p:nvSpPr>
-        <p:spPr>
-          <a:xfrm>
-            <a:off x="7498079" y="1645920"/>
-            <a:ext cx="3840480" cy="3657600"/>
-          </a:xfrm>
-          <a:prstGeom prst="roundRect">
-            <a:avLst/>
-          </a:prstGeom>
-          <a:solidFill>
-            <a:srgbClr val="1A2030"/>
-          </a:solidFill>
-          <a:ln>
-            <a:noFill/>
-          </a:ln>
-        </p:spPr>
-        <p:style>
-          <a:lnRef idx="1">
-            <a:schemeClr val="accent1"/>
-          </a:lnRef>
-          <a:fillRef idx="3">
-            <a:schemeClr val="accent1"/>
-          </a:fillRef>
-          <a:effectRef idx="2">
-            <a:schemeClr val="accent1"/>
-          </a:effectRef>
-          <a:fontRef idx="minor">
-            <a:schemeClr val="lt1"/>
-          </a:fontRef>
-        </p:style>
-        <p:txBody>
-          <a:bodyPr rtlCol="0" anchor="ctr"/>
-          <a:lstStyle/>
-          <a:p>
-            <a:pPr algn="ctr"/>
-          </a:p>
-        </p:txBody>
-      </p:sp>
-      <p:sp>
-        <p:nvSpPr>
-          <p:cNvPr id="17" name="Rectangle 16"/>
-          <p:cNvSpPr/>
-          <p:nvPr/>
-        </p:nvSpPr>
-        <p:spPr>
-          <a:xfrm>
-            <a:off x="7772400" y="1920240"/>
-            <a:ext cx="731520" cy="109728"/>
-          </a:xfrm>
-          <a:prstGeom prst="rect">
-            <a:avLst/>
-          </a:prstGeom>
-          <a:solidFill>
-            <a:srgbClr val="56C495"/>
-          </a:solidFill>
-          <a:ln>
-            <a:noFill/>
-          </a:ln>
-        </p:spPr>
-        <p:style>
-          <a:lnRef idx="1">
-            <a:schemeClr val="accent1"/>
-          </a:lnRef>
-          <a:fillRef idx="3">
-            <a:schemeClr val="accent1"/>
-          </a:fillRef>
-          <a:effectRef idx="2">
-            <a:schemeClr val="accent1"/>
-          </a:effectRef>
-          <a:fontRef idx="minor">
-            <a:schemeClr val="lt1"/>
-          </a:fontRef>
-        </p:style>
-        <p:txBody>
-          <a:bodyPr rtlCol="0" anchor="ctr"/>
-          <a:lstStyle/>
-          <a:p>
-            <a:pPr algn="ctr"/>
-          </a:p>
-        </p:txBody>
-      </p:sp>
-      <p:sp>
-        <p:nvSpPr>
-          <p:cNvPr id="18" name="TextBox 17"/>
-          <p:cNvSpPr txBox="1"/>
-          <p:nvPr/>
-        </p:nvSpPr>
-        <p:spPr>
-          <a:xfrm>
-            <a:off x="7772400" y="2194560"/>
-            <a:ext cx="914400" cy="731520"/>
-          </a:xfrm>
-          <a:prstGeom prst="rect">
-            <a:avLst/>
-          </a:prstGeom>
-          <a:noFill/>
-        </p:spPr>
-        <p:txBody>
-          <a:bodyPr wrap="square">
-            <a:spAutoFit/>
-          </a:bodyPr>
-          <a:lstStyle/>
-          <a:p>
-            <a:pPr algn="l">
-              <a:defRPr sz="3000" b="1" i="0">
-                <a:solidFill>
-                  <a:srgbClr val="56C495"/>
-                </a:solidFill>
-                <a:latin typeface="Arial"/>
-              </a:defRPr>
-            </a:pPr>
-            <a:r>
-              <a:t>03</a:t>
-            </a:r>
-          </a:p>
-        </p:txBody>
-      </p:sp>
-      <p:sp>
-        <p:nvSpPr>
-          <p:cNvPr id="19" name="TextBox 18"/>
-          <p:cNvSpPr txBox="1"/>
-          <p:nvPr/>
-        </p:nvSpPr>
-        <p:spPr>
-          <a:xfrm>
-            <a:off x="7772400" y="3017520"/>
-            <a:ext cx="3291840" cy="914400"/>
-          </a:xfrm>
-          <a:prstGeom prst="rect">
-            <a:avLst/>
-          </a:prstGeom>
-          <a:noFill/>
-        </p:spPr>
-        <p:txBody>
-          <a:bodyPr wrap="square">
-            <a:spAutoFit/>
-          </a:bodyPr>
-          <a:lstStyle/>
-          <a:p>
-            <a:pPr algn="l">
-              <a:defRPr sz="2200" b="1" i="0">
-                <a:solidFill>
-                  <a:srgbClr val="E8ECF4"/>
-                </a:solidFill>
-                <a:latin typeface="Arial"/>
-              </a:defRPr>
-            </a:pPr>
-            <a:r>
-              <a:t>Validation Gates</a:t>
-            </a:r>
-          </a:p>
-        </p:txBody>
-      </p:sp>
-      <p:sp>
-        <p:nvSpPr>
-          <p:cNvPr id="20" name="TextBox 19"/>
-          <p:cNvSpPr txBox="1"/>
-          <p:nvPr/>
-        </p:nvSpPr>
-        <p:spPr>
-          <a:xfrm>
-            <a:off x="7772400" y="4023360"/>
-            <a:ext cx="3291840" cy="1097280"/>
-          </a:xfrm>
-          <a:prstGeom prst="rect">
-            <a:avLst/>
-          </a:prstGeom>
-          <a:noFill/>
-        </p:spPr>
-        <p:txBody>
-          <a:bodyPr wrap="square">
-            <a:spAutoFit/>
-          </a:bodyPr>
-          <a:lstStyle/>
-          <a:p>
-            <a:pPr algn="l">
-              <a:defRPr sz="1600" b="0" i="0">
-                <a:solidFill>
-                  <a:srgbClr val="9CA3B4"/>
-                </a:solidFill>
-                <a:latin typeface="Arial"/>
-              </a:defRPr>
-            </a:pPr>
-            <a:r>
-              <a:t>Tests and checks that must pass before moving on</a:t>
-            </a:r>
-          </a:p>
-        </p:txBody>
-      </p:sp>
-      <p:sp>
-        <p:nvSpPr>
-          <p:cNvPr id="21" name="TextBox 20"/>
-          <p:cNvSpPr txBox="1"/>
-          <p:nvPr/>
-        </p:nvSpPr>
-        <p:spPr>
-          <a:xfrm>
-            <a:off x="11430000" y="6400800"/>
-            <a:ext cx="457200" cy="274320"/>
-          </a:xfrm>
-          <a:prstGeom prst="rect">
-            <a:avLst/>
-          </a:prstGeom>
-          <a:noFill/>
-        </p:spPr>
-        <p:txBody>
-          <a:bodyPr wrap="square">
-            <a:spAutoFit/>
-          </a:bodyPr>
-          <a:lstStyle/>
-          <a:p>
             <a:pPr algn="r">
-              <a:defRPr sz="1200" b="0" i="0">
+              <a:defRPr sz="1100" b="0" i="0">
                 <a:solidFill>
                   <a:srgbClr val="9CA3B4"/>
                 </a:solidFill>
@@ -5164,7 +4438,7 @@
         </p:nvSpPr>
         <p:spPr>
           <a:xfrm>
-            <a:off x="457200" y="365760"/>
+            <a:off x="457200" y="320040"/>
             <a:ext cx="9144000" cy="731520"/>
           </a:xfrm>
           <a:prstGeom prst="rect">
@@ -5179,7 +4453,7 @@
           <a:lstStyle/>
           <a:p>
             <a:pPr algn="l">
-              <a:defRPr sz="3000" b="1" i="0">
+              <a:defRPr sz="2800" b="1" i="0">
                 <a:solidFill>
                   <a:srgbClr val="E8ECF4"/>
                 </a:solidFill>
@@ -5200,7 +4474,7 @@
         </p:nvSpPr>
         <p:spPr>
           <a:xfrm>
-            <a:off x="10515600" y="1051560"/>
+            <a:off x="10515600" y="960120"/>
             <a:ext cx="1188720" cy="365760"/>
           </a:xfrm>
           <a:prstGeom prst="roundRect">
@@ -5243,7 +4517,7 @@
         </p:nvSpPr>
         <p:spPr>
           <a:xfrm>
-            <a:off x="10515600" y="1078992"/>
+            <a:off x="10515600" y="987552"/>
             <a:ext cx="1188720" cy="365760"/>
           </a:xfrm>
           <a:prstGeom prst="rect">
@@ -5279,8 +4553,8 @@
         </p:nvSpPr>
         <p:spPr>
           <a:xfrm>
-            <a:off x="457200" y="1280160"/>
-            <a:ext cx="11274552" cy="4389120"/>
+            <a:off x="457200" y="1188720"/>
+            <a:ext cx="11274552" cy="4937760"/>
           </a:xfrm>
           <a:prstGeom prst="roundRect">
             <a:avLst/>
@@ -5324,7 +4598,7 @@
         </p:nvSpPr>
         <p:spPr>
           <a:xfrm>
-            <a:off x="731520" y="1508760"/>
+            <a:off x="731520" y="1417320"/>
             <a:ext cx="164592" cy="164592"/>
           </a:xfrm>
           <a:prstGeom prst="ellipse">
@@ -5367,7 +4641,7 @@
         </p:nvSpPr>
         <p:spPr>
           <a:xfrm>
-            <a:off x="1051560" y="1508760"/>
+            <a:off x="1051560" y="1417320"/>
             <a:ext cx="164592" cy="164592"/>
           </a:xfrm>
           <a:prstGeom prst="ellipse">
@@ -5410,7 +4684,7 @@
         </p:nvSpPr>
         <p:spPr>
           <a:xfrm>
-            <a:off x="1371600" y="1508760"/>
+            <a:off x="1371600" y="1417320"/>
             <a:ext cx="164592" cy="164592"/>
           </a:xfrm>
           <a:prstGeom prst="ellipse">
@@ -5453,8 +4727,8 @@
         </p:nvSpPr>
         <p:spPr>
           <a:xfrm>
-            <a:off x="731520" y="2011680"/>
-            <a:ext cx="10698480" cy="3474720"/>
+            <a:off x="731520" y="1920240"/>
+            <a:ext cx="10698480" cy="4160520"/>
           </a:xfrm>
           <a:prstGeom prst="rect">
             <a:avLst/>
@@ -5468,7 +4742,7 @@
           <a:lstStyle/>
           <a:p>
             <a:pPr algn="l">
-              <a:defRPr sz="1500" b="0" i="0">
+              <a:defRPr sz="1200" b="0" i="0">
                 <a:solidFill>
                   <a:srgbClr val="E8ECF4"/>
                 </a:solidFill>
@@ -5476,7 +4750,7 @@
               </a:defRPr>
             </a:pPr>
             <a:r>
-              <a:t>INITIAL.md   →   /generate-prp   →   PRPs/comms.md   →   /execute-prp   →   Code</a:t>
+              <a:t>INITIAL.md  --&gt;  /generate-prp  --&gt;  PRPs/meetup-comms.md  --&gt;  /execute-prp  --&gt;  Code</a:t>
             </a:r>
             <a:br/>
             <a:r>
@@ -5488,20 +4762,24 @@
             </a:r>
             <a:br/>
             <a:r>
-              <a:t>You write the WHAT                Claude builds the HOW</a:t>
+              <a:t>You write this                Claude researches the</a:t>
+            </a:r>
+            <a:br/>
+            <a:r>
+              <a:t>                              codebase and builds this</a:t>
             </a:r>
             <a:br/>
             <a:br/>
             <a:r>
-              <a:t>  1. You describe the feature in INITIAL.md</a:t>
+              <a:t>  1. Describe the feature in INITIAL.md</a:t>
             </a:r>
             <a:br/>
             <a:r>
-              <a:t>  2. /generate-prp researches your codebase, generates a blueprint</a:t>
+              <a:t>  2. /generate-prp reads codebase, analyzes patterns, generates blueprint</a:t>
             </a:r>
             <a:br/>
             <a:r>
-              <a:t>  3. You review the PRP — catch misunderstandings early</a:t>
+              <a:t>  3. Review the PRP — catch misunderstandings early</a:t>
             </a:r>
             <a:br/>
             <a:r>
@@ -5518,8 +4796,8 @@
         </p:nvSpPr>
         <p:spPr>
           <a:xfrm>
-            <a:off x="457200" y="5852160"/>
-            <a:ext cx="11274552" cy="548640"/>
+            <a:off x="457200" y="6309360"/>
+            <a:ext cx="11274552" cy="457200"/>
           </a:xfrm>
           <a:prstGeom prst="rect">
             <a:avLst/>
@@ -5533,15 +4811,15 @@
           <a:lstStyle/>
           <a:p>
             <a:pPr algn="ctr">
-              <a:defRPr sz="1700" b="0" i="1">
-                <a:solidFill>
-                  <a:srgbClr val="9CA3B4"/>
+              <a:defRPr sz="1600" b="1" i="0">
+                <a:solidFill>
+                  <a:srgbClr val="E8ECF4"/>
                 </a:solidFill>
                 <a:latin typeface="Arial"/>
               </a:defRPr>
             </a:pPr>
             <a:r>
-              <a:t>Review the PRP before executing. The PRP is your checkpoint.</a:t>
+              <a:t>Review the PRP before executing. Catching errors here is cheap.</a:t>
             </a:r>
           </a:p>
         </p:txBody>
@@ -5597,7 +4875,7 @@
         </p:nvSpPr>
         <p:spPr>
           <a:xfrm>
-            <a:off x="11430000" y="6400800"/>
+            <a:off x="11430000" y="6446520"/>
             <a:ext cx="457200" cy="274320"/>
           </a:xfrm>
           <a:prstGeom prst="rect">
@@ -5612,7 +4890,7 @@
           <a:lstStyle/>
           <a:p>
             <a:pPr algn="r">
-              <a:defRPr sz="1200" b="0" i="0">
+              <a:defRPr sz="1100" b="0" i="0">
                 <a:solidFill>
                   <a:srgbClr val="9CA3B4"/>
                 </a:solidFill>
@@ -5702,8 +4980,8 @@
         </p:nvSpPr>
         <p:spPr>
           <a:xfrm>
-            <a:off x="548640" y="457200"/>
-            <a:ext cx="10972800" cy="914400"/>
+            <a:off x="548640" y="365760"/>
+            <a:ext cx="10972800" cy="822960"/>
           </a:xfrm>
           <a:prstGeom prst="rect">
             <a:avLst/>
@@ -5717,7 +4995,7 @@
           <a:lstStyle/>
           <a:p>
             <a:pPr algn="l">
-              <a:defRPr sz="3400" b="1" i="0">
+              <a:defRPr sz="3200" b="1" i="0">
                 <a:solidFill>
                   <a:srgbClr val="E8ECF4"/>
                 </a:solidFill>
@@ -5738,7 +5016,7 @@
         </p:nvSpPr>
         <p:spPr>
           <a:xfrm>
-            <a:off x="548640" y="1325880"/>
+            <a:off x="548640" y="1207008"/>
             <a:ext cx="2286000" cy="54864"/>
           </a:xfrm>
           <a:prstGeom prst="rect">
@@ -5775,13 +5053,49 @@
       </p:sp>
       <p:sp>
         <p:nvSpPr>
-          <p:cNvPr id="5" name="Rectangle 4"/>
+          <p:cNvPr id="5" name="TextBox 4"/>
+          <p:cNvSpPr txBox="1"/>
+          <p:nvPr/>
+        </p:nvSpPr>
+        <p:spPr>
+          <a:xfrm>
+            <a:off x="548640" y="1508760"/>
+            <a:ext cx="10972800" cy="640080"/>
+          </a:xfrm>
+          <a:prstGeom prst="rect">
+            <a:avLst/>
+          </a:prstGeom>
+          <a:noFill/>
+        </p:spPr>
+        <p:txBody>
+          <a:bodyPr wrap="square">
+            <a:spAutoFit/>
+          </a:bodyPr>
+          <a:lstStyle/>
+          <a:p>
+            <a:pPr algn="l">
+              <a:defRPr sz="1900" b="0" i="1">
+                <a:solidFill>
+                  <a:srgbClr val="9CA3B4"/>
+                </a:solidFill>
+                <a:latin typeface="Arial"/>
+              </a:defRPr>
+            </a:pPr>
+            <a:r>
+              <a:t>Run: /generate-prp INITIAL.md</a:t>
+            </a:r>
+          </a:p>
+        </p:txBody>
+      </p:sp>
+      <p:sp>
+        <p:nvSpPr>
+          <p:cNvPr id="6" name="Rectangle 5"/>
           <p:cNvSpPr/>
           <p:nvPr/>
         </p:nvSpPr>
         <p:spPr>
           <a:xfrm>
-            <a:off x="548640" y="1965960"/>
+            <a:off x="548640" y="2450592"/>
             <a:ext cx="109728" cy="109728"/>
           </a:xfrm>
           <a:prstGeom prst="rect">
@@ -5818,14 +5132,14 @@
       </p:sp>
       <p:sp>
         <p:nvSpPr>
-          <p:cNvPr id="6" name="TextBox 5"/>
+          <p:cNvPr id="7" name="TextBox 6"/>
           <p:cNvSpPr txBox="1"/>
           <p:nvPr/>
         </p:nvSpPr>
         <p:spPr>
           <a:xfrm>
-            <a:off x="914400" y="1828800"/>
-            <a:ext cx="10515600" cy="914400"/>
+            <a:off x="914400" y="2286000"/>
+            <a:ext cx="10515600" cy="868680"/>
           </a:xfrm>
           <a:prstGeom prst="rect">
             <a:avLst/>
@@ -5839,7 +5153,7 @@
           <a:lstStyle/>
           <a:p>
             <a:pPr algn="l">
-              <a:defRPr sz="2000" b="0" i="0">
+              <a:defRPr sz="1800" b="0" i="0">
                 <a:solidFill>
                   <a:srgbClr val="E8ECF4"/>
                 </a:solidFill>
@@ -5847,20 +5161,20 @@
               </a:defRPr>
             </a:pPr>
             <a:r>
-              <a:t>Run: /generate-prp INITIAL.md</a:t>
-            </a:r>
-          </a:p>
-        </p:txBody>
-      </p:sp>
-      <p:sp>
-        <p:nvSpPr>
-          <p:cNvPr id="7" name="Rectangle 6"/>
+              <a:t>Reads the feature request</a:t>
+            </a:r>
+          </a:p>
+        </p:txBody>
+      </p:sp>
+      <p:sp>
+        <p:nvSpPr>
+          <p:cNvPr id="8" name="Rectangle 7"/>
           <p:cNvSpPr/>
           <p:nvPr/>
         </p:nvSpPr>
         <p:spPr>
           <a:xfrm>
-            <a:off x="548640" y="3017520"/>
+            <a:off x="548640" y="3364992"/>
             <a:ext cx="109728" cy="109728"/>
           </a:xfrm>
           <a:prstGeom prst="rect">
@@ -5897,14 +5211,14 @@
       </p:sp>
       <p:sp>
         <p:nvSpPr>
-          <p:cNvPr id="8" name="TextBox 7"/>
+          <p:cNvPr id="9" name="TextBox 8"/>
           <p:cNvSpPr txBox="1"/>
           <p:nvPr/>
         </p:nvSpPr>
         <p:spPr>
           <a:xfrm>
-            <a:off x="914400" y="2880360"/>
-            <a:ext cx="10515600" cy="914400"/>
+            <a:off x="914400" y="3200400"/>
+            <a:ext cx="10515600" cy="868680"/>
           </a:xfrm>
           <a:prstGeom prst="rect">
             <a:avLst/>
@@ -5918,7 +5232,7 @@
           <a:lstStyle/>
           <a:p>
             <a:pPr algn="l">
-              <a:defRPr sz="2000" b="0" i="0">
+              <a:defRPr sz="1800" b="0" i="0">
                 <a:solidFill>
                   <a:srgbClr val="E8ECF4"/>
                 </a:solidFill>
@@ -5926,20 +5240,20 @@
               </a:defRPr>
             </a:pPr>
             <a:r>
-              <a:t>Claude reads INITIAL.md, CLAUDE.md, and your existing commands</a:t>
-            </a:r>
-          </a:p>
-        </p:txBody>
-      </p:sp>
-      <p:sp>
-        <p:nvSpPr>
-          <p:cNvPr id="9" name="Rectangle 8"/>
+              <a:t>Analyzes existing code (CLAUDE.md, commands, data files)</a:t>
+            </a:r>
+          </a:p>
+        </p:txBody>
+      </p:sp>
+      <p:sp>
+        <p:nvSpPr>
+          <p:cNvPr id="10" name="Rectangle 9"/>
           <p:cNvSpPr/>
           <p:nvPr/>
         </p:nvSpPr>
         <p:spPr>
           <a:xfrm>
-            <a:off x="548640" y="4069080"/>
+            <a:off x="548640" y="4279392"/>
             <a:ext cx="109728" cy="109728"/>
           </a:xfrm>
           <a:prstGeom prst="rect">
@@ -5976,14 +5290,14 @@
       </p:sp>
       <p:sp>
         <p:nvSpPr>
-          <p:cNvPr id="10" name="TextBox 9"/>
+          <p:cNvPr id="11" name="TextBox 10"/>
           <p:cNvSpPr txBox="1"/>
           <p:nvPr/>
         </p:nvSpPr>
         <p:spPr>
           <a:xfrm>
-            <a:off x="914400" y="3931920"/>
-            <a:ext cx="10515600" cy="914400"/>
+            <a:off x="914400" y="4114800"/>
+            <a:ext cx="10515600" cy="868680"/>
           </a:xfrm>
           <a:prstGeom prst="rect">
             <a:avLst/>
@@ -5997,7 +5311,7 @@
           <a:lstStyle/>
           <a:p>
             <a:pPr algn="l">
-              <a:defRPr sz="2000" b="0" i="0">
+              <a:defRPr sz="1800" b="0" i="0">
                 <a:solidFill>
                   <a:srgbClr val="E8ECF4"/>
                 </a:solidFill>
@@ -6005,20 +5319,20 @@
               </a:defRPr>
             </a:pPr>
             <a:r>
-              <a:t>Researches patterns from examples/ and data/</a:t>
-            </a:r>
-          </a:p>
-        </p:txBody>
-      </p:sp>
-      <p:sp>
-        <p:nvSpPr>
-          <p:cNvPr id="11" name="Rectangle 10"/>
+              <a:t>Researches patterns from examples/</a:t>
+            </a:r>
+          </a:p>
+        </p:txBody>
+      </p:sp>
+      <p:sp>
+        <p:nvSpPr>
+          <p:cNvPr id="12" name="Rectangle 11"/>
           <p:cNvSpPr/>
           <p:nvPr/>
         </p:nvSpPr>
         <p:spPr>
           <a:xfrm>
-            <a:off x="548640" y="5120640"/>
+            <a:off x="548640" y="5193792"/>
             <a:ext cx="109728" cy="109728"/>
           </a:xfrm>
           <a:prstGeom prst="rect">
@@ -6055,14 +5369,14 @@
       </p:sp>
       <p:sp>
         <p:nvSpPr>
-          <p:cNvPr id="12" name="TextBox 11"/>
+          <p:cNvPr id="13" name="TextBox 12"/>
           <p:cNvSpPr txBox="1"/>
           <p:nvPr/>
         </p:nvSpPr>
         <p:spPr>
           <a:xfrm>
-            <a:off x="914400" y="4983479"/>
-            <a:ext cx="10515600" cy="914400"/>
+            <a:off x="914400" y="5029200"/>
+            <a:ext cx="10515600" cy="868680"/>
           </a:xfrm>
           <a:prstGeom prst="rect">
             <a:avLst/>
@@ -6076,7 +5390,7 @@
           <a:lstStyle/>
           <a:p>
             <a:pPr algn="l">
-              <a:defRPr sz="2000" b="0" i="0">
+              <a:defRPr sz="1800" b="0" i="0">
                 <a:solidFill>
                   <a:srgbClr val="E8ECF4"/>
                 </a:solidFill>
@@ -6084,21 +5398,21 @@
               </a:defRPr>
             </a:pPr>
             <a:r>
-              <a:t>Writes PRPs/meetup-comms.md — review it before executing</a:t>
-            </a:r>
-          </a:p>
-        </p:txBody>
-      </p:sp>
-      <p:sp>
-        <p:nvSpPr>
-          <p:cNvPr id="13" name="TextBox 12"/>
+              <a:t>Generates a blueprint at PRPs/meetup-comms.md</a:t>
+            </a:r>
+          </a:p>
+        </p:txBody>
+      </p:sp>
+      <p:sp>
+        <p:nvSpPr>
+          <p:cNvPr id="14" name="TextBox 13"/>
           <p:cNvSpPr txBox="1"/>
           <p:nvPr/>
         </p:nvSpPr>
         <p:spPr>
           <a:xfrm>
-            <a:off x="11430000" y="6400800"/>
-            <a:ext cx="457200" cy="274320"/>
+            <a:off x="548640" y="6126480"/>
+            <a:ext cx="10972800" cy="365760"/>
           </a:xfrm>
           <a:prstGeom prst="rect">
             <a:avLst/>
@@ -6111,8 +5425,44 @@
           </a:bodyPr>
           <a:lstStyle/>
           <a:p>
+            <a:pPr algn="l">
+              <a:defRPr sz="1400" b="0" i="1">
+                <a:solidFill>
+                  <a:srgbClr val="9CA3B4"/>
+                </a:solidFill>
+                <a:latin typeface="Arial"/>
+              </a:defRPr>
+            </a:pPr>
+            <a:r>
+              <a:t>Review questions: Does it understand the data flow? Pick up the speaker availability constraint? Reference the right files? Validation steps?</a:t>
+            </a:r>
+          </a:p>
+        </p:txBody>
+      </p:sp>
+      <p:sp>
+        <p:nvSpPr>
+          <p:cNvPr id="15" name="TextBox 14"/>
+          <p:cNvSpPr txBox="1"/>
+          <p:nvPr/>
+        </p:nvSpPr>
+        <p:spPr>
+          <a:xfrm>
+            <a:off x="11430000" y="6446520"/>
+            <a:ext cx="457200" cy="274320"/>
+          </a:xfrm>
+          <a:prstGeom prst="rect">
+            <a:avLst/>
+          </a:prstGeom>
+          <a:noFill/>
+        </p:spPr>
+        <p:txBody>
+          <a:bodyPr wrap="square">
+            <a:spAutoFit/>
+          </a:bodyPr>
+          <a:lstStyle/>
+          <a:p>
             <a:pPr algn="r">
-              <a:defRPr sz="1200" b="0" i="0">
+              <a:defRPr sz="1100" b="0" i="0">
                 <a:solidFill>
                   <a:srgbClr val="9CA3B4"/>
                 </a:solidFill>
@@ -6202,8 +5552,8 @@
         </p:nvSpPr>
         <p:spPr>
           <a:xfrm>
-            <a:off x="548640" y="457200"/>
-            <a:ext cx="10972800" cy="914400"/>
+            <a:off x="548640" y="365760"/>
+            <a:ext cx="10972800" cy="822960"/>
           </a:xfrm>
           <a:prstGeom prst="rect">
             <a:avLst/>
@@ -6217,7 +5567,7 @@
           <a:lstStyle/>
           <a:p>
             <a:pPr algn="l">
-              <a:defRPr sz="3400" b="1" i="0">
+              <a:defRPr sz="3200" b="1" i="0">
                 <a:solidFill>
                   <a:srgbClr val="E8ECF4"/>
                 </a:solidFill>
@@ -6238,7 +5588,7 @@
         </p:nvSpPr>
         <p:spPr>
           <a:xfrm>
-            <a:off x="548640" y="1325880"/>
+            <a:off x="548640" y="1207008"/>
             <a:ext cx="2286000" cy="54864"/>
           </a:xfrm>
           <a:prstGeom prst="rect">
@@ -6275,13 +5625,49 @@
       </p:sp>
       <p:sp>
         <p:nvSpPr>
-          <p:cNvPr id="5" name="Rectangle 4"/>
+          <p:cNvPr id="5" name="TextBox 4"/>
+          <p:cNvSpPr txBox="1"/>
+          <p:nvPr/>
+        </p:nvSpPr>
+        <p:spPr>
+          <a:xfrm>
+            <a:off x="548640" y="1508760"/>
+            <a:ext cx="10972800" cy="640080"/>
+          </a:xfrm>
+          <a:prstGeom prst="rect">
+            <a:avLst/>
+          </a:prstGeom>
+          <a:noFill/>
+        </p:spPr>
+        <p:txBody>
+          <a:bodyPr wrap="square">
+            <a:spAutoFit/>
+          </a:bodyPr>
+          <a:lstStyle/>
+          <a:p>
+            <a:pPr algn="l">
+              <a:defRPr sz="1900" b="0" i="1">
+                <a:solidFill>
+                  <a:srgbClr val="9CA3B4"/>
+                </a:solidFill>
+                <a:latin typeface="Arial"/>
+              </a:defRPr>
+            </a:pPr>
+            <a:r>
+              <a:t>Run: /execute-prp PRPs/meetup-comms.md</a:t>
+            </a:r>
+          </a:p>
+        </p:txBody>
+      </p:sp>
+      <p:sp>
+        <p:nvSpPr>
+          <p:cNvPr id="6" name="Rectangle 5"/>
           <p:cNvSpPr/>
           <p:nvPr/>
         </p:nvSpPr>
         <p:spPr>
           <a:xfrm>
-            <a:off x="548640" y="1965960"/>
+            <a:off x="548640" y="2450592"/>
             <a:ext cx="109728" cy="109728"/>
           </a:xfrm>
           <a:prstGeom prst="rect">
@@ -6318,14 +5704,14 @@
       </p:sp>
       <p:sp>
         <p:nvSpPr>
-          <p:cNvPr id="6" name="TextBox 5"/>
+          <p:cNvPr id="7" name="TextBox 6"/>
           <p:cNvSpPr txBox="1"/>
           <p:nvPr/>
         </p:nvSpPr>
         <p:spPr>
           <a:xfrm>
-            <a:off x="914400" y="1828800"/>
-            <a:ext cx="10515600" cy="914400"/>
+            <a:off x="914400" y="2286000"/>
+            <a:ext cx="10515600" cy="704087"/>
           </a:xfrm>
           <a:prstGeom prst="rect">
             <a:avLst/>
@@ -6339,7 +5725,7 @@
           <a:lstStyle/>
           <a:p>
             <a:pPr algn="l">
-              <a:defRPr sz="2000" b="0" i="0">
+              <a:defRPr sz="1800" b="0" i="0">
                 <a:solidFill>
                   <a:srgbClr val="E8ECF4"/>
                 </a:solidFill>
@@ -6347,20 +5733,20 @@
               </a:defRPr>
             </a:pPr>
             <a:r>
-              <a:t>Run: /execute-prp PRPs/meetup-comms.md</a:t>
-            </a:r>
-          </a:p>
-        </p:txBody>
-      </p:sp>
-      <p:sp>
-        <p:nvSpPr>
-          <p:cNvPr id="7" name="Rectangle 6"/>
+              <a:t>Reads the full PRP</a:t>
+            </a:r>
+          </a:p>
+        </p:txBody>
+      </p:sp>
+      <p:sp>
+        <p:nvSpPr>
+          <p:cNvPr id="8" name="Rectangle 7"/>
           <p:cNvSpPr/>
           <p:nvPr/>
         </p:nvSpPr>
         <p:spPr>
           <a:xfrm>
-            <a:off x="548640" y="3017520"/>
+            <a:off x="548640" y="3200400"/>
             <a:ext cx="109728" cy="109728"/>
           </a:xfrm>
           <a:prstGeom prst="rect">
@@ -6397,14 +5783,14 @@
       </p:sp>
       <p:sp>
         <p:nvSpPr>
-          <p:cNvPr id="8" name="TextBox 7"/>
+          <p:cNvPr id="9" name="TextBox 8"/>
           <p:cNvSpPr txBox="1"/>
           <p:nvPr/>
         </p:nvSpPr>
         <p:spPr>
           <a:xfrm>
-            <a:off x="914400" y="2880360"/>
-            <a:ext cx="10515600" cy="914400"/>
+            <a:off x="914400" y="3035808"/>
+            <a:ext cx="10515600" cy="704087"/>
           </a:xfrm>
           <a:prstGeom prst="rect">
             <a:avLst/>
@@ -6418,7 +5804,7 @@
           <a:lstStyle/>
           <a:p>
             <a:pPr algn="l">
-              <a:defRPr sz="2000" b="0" i="0">
+              <a:defRPr sz="1800" b="0" i="0">
                 <a:solidFill>
                   <a:srgbClr val="E8ECF4"/>
                 </a:solidFill>
@@ -6426,20 +5812,20 @@
               </a:defRPr>
             </a:pPr>
             <a:r>
-              <a:t>Creates build-schedule, draft-announcement, draft-speaker-outreach</a:t>
-            </a:r>
-          </a:p>
-        </p:txBody>
-      </p:sp>
-      <p:sp>
-        <p:nvSpPr>
-          <p:cNvPr id="9" name="Rectangle 8"/>
+              <a:t>Creates .claude/commands/build-schedule.md</a:t>
+            </a:r>
+          </a:p>
+        </p:txBody>
+      </p:sp>
+      <p:sp>
+        <p:nvSpPr>
+          <p:cNvPr id="10" name="Rectangle 9"/>
           <p:cNvSpPr/>
           <p:nvPr/>
         </p:nvSpPr>
         <p:spPr>
           <a:xfrm>
-            <a:off x="548640" y="4069080"/>
+            <a:off x="548640" y="3950207"/>
             <a:ext cx="109728" cy="109728"/>
           </a:xfrm>
           <a:prstGeom prst="rect">
@@ -6476,14 +5862,14 @@
       </p:sp>
       <p:sp>
         <p:nvSpPr>
-          <p:cNvPr id="10" name="TextBox 9"/>
+          <p:cNvPr id="11" name="TextBox 10"/>
           <p:cNvSpPr txBox="1"/>
           <p:nvPr/>
         </p:nvSpPr>
         <p:spPr>
           <a:xfrm>
-            <a:off x="914400" y="3931920"/>
-            <a:ext cx="10515600" cy="914400"/>
+            <a:off x="914400" y="3785615"/>
+            <a:ext cx="10515600" cy="704087"/>
           </a:xfrm>
           <a:prstGeom prst="rect">
             <a:avLst/>
@@ -6497,7 +5883,7 @@
           <a:lstStyle/>
           <a:p>
             <a:pPr algn="l">
-              <a:defRPr sz="2000" b="0" i="0">
+              <a:defRPr sz="1800" b="0" i="0">
                 <a:solidFill>
                   <a:srgbClr val="E8ECF4"/>
                 </a:solidFill>
@@ -6505,20 +5891,20 @@
               </a:defRPr>
             </a:pPr>
             <a:r>
-              <a:t>Validates against the event plan schema</a:t>
-            </a:r>
-          </a:p>
-        </p:txBody>
-      </p:sp>
-      <p:sp>
-        <p:nvSpPr>
-          <p:cNvPr id="11" name="Rectangle 10"/>
+              <a:t>Creates .claude/commands/draft-announcement.md</a:t>
+            </a:r>
+          </a:p>
+        </p:txBody>
+      </p:sp>
+      <p:sp>
+        <p:nvSpPr>
+          <p:cNvPr id="12" name="Rectangle 11"/>
           <p:cNvSpPr/>
           <p:nvPr/>
         </p:nvSpPr>
         <p:spPr>
           <a:xfrm>
-            <a:off x="548640" y="5120640"/>
+            <a:off x="548640" y="4700016"/>
             <a:ext cx="109728" cy="109728"/>
           </a:xfrm>
           <a:prstGeom prst="rect">
@@ -6555,14 +5941,14 @@
       </p:sp>
       <p:sp>
         <p:nvSpPr>
-          <p:cNvPr id="12" name="TextBox 11"/>
+          <p:cNvPr id="13" name="TextBox 12"/>
           <p:cNvSpPr txBox="1"/>
           <p:nvPr/>
         </p:nvSpPr>
         <p:spPr>
           <a:xfrm>
-            <a:off x="914400" y="4983479"/>
-            <a:ext cx="10515600" cy="914400"/>
+            <a:off x="914400" y="4535424"/>
+            <a:ext cx="10515600" cy="704087"/>
           </a:xfrm>
           <a:prstGeom prst="rect">
             <a:avLst/>
@@ -6576,7 +5962,7 @@
           <a:lstStyle/>
           <a:p>
             <a:pPr algn="l">
-              <a:defRPr sz="2000" b="0" i="0">
+              <a:defRPr sz="1800" b="0" i="0">
                 <a:solidFill>
                   <a:srgbClr val="E8ECF4"/>
                 </a:solidFill>
@@ -6584,21 +5970,64 @@
               </a:defRPr>
             </a:pPr>
             <a:r>
-              <a:t>Following a blueprint you reviewed — not guessing</a:t>
-            </a:r>
-          </a:p>
-        </p:txBody>
-      </p:sp>
-      <p:sp>
-        <p:nvSpPr>
-          <p:cNvPr id="13" name="TextBox 12"/>
+              <a:t>Creates .claude/commands/draft-speaker-outreach.md</a:t>
+            </a:r>
+          </a:p>
+        </p:txBody>
+      </p:sp>
+      <p:sp>
+        <p:nvSpPr>
+          <p:cNvPr id="14" name="Rectangle 13"/>
+          <p:cNvSpPr/>
+          <p:nvPr/>
+        </p:nvSpPr>
+        <p:spPr>
+          <a:xfrm>
+            <a:off x="548640" y="5449824"/>
+            <a:ext cx="109728" cy="109728"/>
+          </a:xfrm>
+          <a:prstGeom prst="rect">
+            <a:avLst/>
+          </a:prstGeom>
+          <a:solidFill>
+            <a:srgbClr val="E8853D"/>
+          </a:solidFill>
+          <a:ln>
+            <a:noFill/>
+          </a:ln>
+        </p:spPr>
+        <p:style>
+          <a:lnRef idx="1">
+            <a:schemeClr val="accent1"/>
+          </a:lnRef>
+          <a:fillRef idx="3">
+            <a:schemeClr val="accent1"/>
+          </a:fillRef>
+          <a:effectRef idx="2">
+            <a:schemeClr val="accent1"/>
+          </a:effectRef>
+          <a:fontRef idx="minor">
+            <a:schemeClr val="lt1"/>
+          </a:fontRef>
+        </p:style>
+        <p:txBody>
+          <a:bodyPr rtlCol="0" anchor="ctr"/>
+          <a:lstStyle/>
+          <a:p>
+            <a:pPr algn="ctr"/>
+          </a:p>
+        </p:txBody>
+      </p:sp>
+      <p:sp>
+        <p:nvSpPr>
+          <p:cNvPr id="15" name="TextBox 14"/>
           <p:cNvSpPr txBox="1"/>
           <p:nvPr/>
         </p:nvSpPr>
         <p:spPr>
           <a:xfrm>
-            <a:off x="11430000" y="6400800"/>
-            <a:ext cx="457200" cy="274320"/>
+            <a:off x="914400" y="5285232"/>
+            <a:ext cx="10515600" cy="704087"/>
           </a:xfrm>
           <a:prstGeom prst="rect">
             <a:avLst/>
@@ -6611,8 +6040,80 @@
           </a:bodyPr>
           <a:lstStyle/>
           <a:p>
+            <a:pPr algn="l">
+              <a:defRPr sz="1800" b="0" i="0">
+                <a:solidFill>
+                  <a:srgbClr val="E8ECF4"/>
+                </a:solidFill>
+                <a:latin typeface="Arial"/>
+              </a:defRPr>
+            </a:pPr>
+            <a:r>
+              <a:t>Validates against the event plan schema</a:t>
+            </a:r>
+          </a:p>
+        </p:txBody>
+      </p:sp>
+      <p:sp>
+        <p:nvSpPr>
+          <p:cNvPr id="16" name="TextBox 15"/>
+          <p:cNvSpPr txBox="1"/>
+          <p:nvPr/>
+        </p:nvSpPr>
+        <p:spPr>
+          <a:xfrm>
+            <a:off x="548640" y="6126480"/>
+            <a:ext cx="10972800" cy="365760"/>
+          </a:xfrm>
+          <a:prstGeom prst="rect">
+            <a:avLst/>
+          </a:prstGeom>
+          <a:noFill/>
+        </p:spPr>
+        <p:txBody>
+          <a:bodyPr wrap="square">
+            <a:spAutoFit/>
+          </a:bodyPr>
+          <a:lstStyle/>
+          <a:p>
+            <a:pPr algn="l">
+              <a:defRPr sz="1400" b="0" i="1">
+                <a:solidFill>
+                  <a:srgbClr val="9CA3B4"/>
+                </a:solidFill>
+                <a:latin typeface="Arial"/>
+              </a:defRPr>
+            </a:pPr>
+            <a:r>
+              <a:t>Claude is following a blueprint you reviewed, not guessing.</a:t>
+            </a:r>
+          </a:p>
+        </p:txBody>
+      </p:sp>
+      <p:sp>
+        <p:nvSpPr>
+          <p:cNvPr id="17" name="TextBox 16"/>
+          <p:cNvSpPr txBox="1"/>
+          <p:nvPr/>
+        </p:nvSpPr>
+        <p:spPr>
+          <a:xfrm>
+            <a:off x="11430000" y="6446520"/>
+            <a:ext cx="457200" cy="274320"/>
+          </a:xfrm>
+          <a:prstGeom prst="rect">
+            <a:avLst/>
+          </a:prstGeom>
+          <a:noFill/>
+        </p:spPr>
+        <p:txBody>
+          <a:bodyPr wrap="square">
+            <a:spAutoFit/>
+          </a:bodyPr>
+          <a:lstStyle/>
+          <a:p>
             <a:pPr algn="r">
-              <a:defRPr sz="1200" b="0" i="0">
+              <a:defRPr sz="1100" b="0" i="0">
                 <a:solidFill>
                   <a:srgbClr val="9CA3B4"/>
                 </a:solidFill>
@@ -6659,7 +6160,7 @@
         </p:nvSpPr>
         <p:spPr>
           <a:xfrm>
-            <a:off x="457200" y="365760"/>
+            <a:off x="457200" y="320040"/>
             <a:ext cx="9144000" cy="731520"/>
           </a:xfrm>
           <a:prstGeom prst="rect">
@@ -6674,7 +6175,7 @@
           <a:lstStyle/>
           <a:p>
             <a:pPr algn="l">
-              <a:defRPr sz="3000" b="1" i="0">
+              <a:defRPr sz="2800" b="1" i="0">
                 <a:solidFill>
                   <a:srgbClr val="E8ECF4"/>
                 </a:solidFill>
@@ -6682,7 +6183,7 @@
               </a:defRPr>
             </a:pPr>
             <a:r>
-              <a:t>The Examples/ Folder Trick</a:t>
+              <a:t>The Examples/ Folder</a:t>
             </a:r>
           </a:p>
         </p:txBody>
@@ -6695,7 +6196,7 @@
         </p:nvSpPr>
         <p:spPr>
           <a:xfrm>
-            <a:off x="10515600" y="1051560"/>
+            <a:off x="10515600" y="960120"/>
             <a:ext cx="1188720" cy="365760"/>
           </a:xfrm>
           <a:prstGeom prst="roundRect">
@@ -6738,7 +6239,7 @@
         </p:nvSpPr>
         <p:spPr>
           <a:xfrm>
-            <a:off x="10515600" y="1078992"/>
+            <a:off x="10515600" y="987552"/>
             <a:ext cx="1188720" cy="365760"/>
           </a:xfrm>
           <a:prstGeom prst="rect">
@@ -6774,8 +6275,8 @@
         </p:nvSpPr>
         <p:spPr>
           <a:xfrm>
-            <a:off x="457200" y="1280160"/>
-            <a:ext cx="11274552" cy="4389120"/>
+            <a:off x="457200" y="1188720"/>
+            <a:ext cx="11274552" cy="4754880"/>
           </a:xfrm>
           <a:prstGeom prst="roundRect">
             <a:avLst/>
@@ -6819,7 +6320,7 @@
         </p:nvSpPr>
         <p:spPr>
           <a:xfrm>
-            <a:off x="731520" y="1508760"/>
+            <a:off x="731520" y="1417320"/>
             <a:ext cx="164592" cy="164592"/>
           </a:xfrm>
           <a:prstGeom prst="ellipse">
@@ -6862,7 +6363,7 @@
         </p:nvSpPr>
         <p:spPr>
           <a:xfrm>
-            <a:off x="1051560" y="1508760"/>
+            <a:off x="1051560" y="1417320"/>
             <a:ext cx="164592" cy="164592"/>
           </a:xfrm>
           <a:prstGeom prst="ellipse">
@@ -6905,7 +6406,7 @@
         </p:nvSpPr>
         <p:spPr>
           <a:xfrm>
-            <a:off x="1371600" y="1508760"/>
+            <a:off x="1371600" y="1417320"/>
             <a:ext cx="164592" cy="164592"/>
           </a:xfrm>
           <a:prstGeom prst="ellipse">
@@ -6948,8 +6449,8 @@
         </p:nvSpPr>
         <p:spPr>
           <a:xfrm>
-            <a:off x="731520" y="2011680"/>
-            <a:ext cx="10698480" cy="3474720"/>
+            <a:off x="731520" y="1920240"/>
+            <a:ext cx="10698480" cy="3977640"/>
           </a:xfrm>
           <a:prstGeom prst="rect">
             <a:avLst/>
@@ -6963,7 +6464,7 @@
           <a:lstStyle/>
           <a:p>
             <a:pPr algn="l">
-              <a:defRPr sz="1500" b="0" i="0">
+              <a:defRPr sz="1300" b="0" i="0">
                 <a:solidFill>
                   <a:srgbClr val="E8ECF4"/>
                 </a:solidFill>
@@ -6993,7 +6494,15 @@
             <a:br/>
             <a:br/>
             <a:r>
-              <a:t>Show it. Don't describe it.</a:t>
+              <a:t>  - Specific JSON schema      -&gt;  show a sample file</a:t>
+            </a:r>
+            <a:br/>
+            <a:r>
+              <a:t>  - Particular email tone     -&gt;  include a real example</a:t>
+            </a:r>
+            <a:br/>
+            <a:r>
+              <a:t>  - Consistent formatting     -&gt;  provide a template</a:t>
             </a:r>
           </a:p>
         </p:txBody>
@@ -7006,8 +6515,8 @@
         </p:nvSpPr>
         <p:spPr>
           <a:xfrm>
-            <a:off x="457200" y="5852160"/>
-            <a:ext cx="11274552" cy="548640"/>
+            <a:off x="457200" y="6126480"/>
+            <a:ext cx="11274552" cy="457200"/>
           </a:xfrm>
           <a:prstGeom prst="rect">
             <a:avLst/>
@@ -7021,7 +6530,43 @@
           <a:lstStyle/>
           <a:p>
             <a:pPr algn="ctr">
-              <a:defRPr sz="1700" b="0" i="1">
+              <a:defRPr sz="1600" b="1" i="0">
+                <a:solidFill>
+                  <a:srgbClr val="E8ECF4"/>
+                </a:solidFill>
+                <a:latin typeface="Arial"/>
+              </a:defRPr>
+            </a:pPr>
+            <a:r>
+              <a:t>Show it. Don't describe it.</a:t>
+            </a:r>
+          </a:p>
+        </p:txBody>
+      </p:sp>
+      <p:sp>
+        <p:nvSpPr>
+          <p:cNvPr id="11" name="TextBox 10"/>
+          <p:cNvSpPr txBox="1"/>
+          <p:nvPr/>
+        </p:nvSpPr>
+        <p:spPr>
+          <a:xfrm>
+            <a:off x="457200" y="6537960"/>
+            <a:ext cx="11274552" cy="548640"/>
+          </a:xfrm>
+          <a:prstGeom prst="rect">
+            <a:avLst/>
+          </a:prstGeom>
+          <a:noFill/>
+        </p:spPr>
+        <p:txBody>
+          <a:bodyPr wrap="square">
+            <a:spAutoFit/>
+          </a:bodyPr>
+          <a:lstStyle/>
+          <a:p>
+            <a:pPr algn="ctr">
+              <a:defRPr sz="1300" b="0" i="1">
                 <a:solidFill>
                   <a:srgbClr val="9CA3B4"/>
                 </a:solidFill>
@@ -7029,14 +6574,14 @@
               </a:defRPr>
             </a:pPr>
             <a:r>
-              <a:t>More examples = dramatically better output.</a:t>
-            </a:r>
-          </a:p>
-        </p:txBody>
-      </p:sp>
-      <p:sp>
-        <p:nvSpPr>
-          <p:cNvPr id="11" name="Rectangle 10"/>
+              <a:t>The design slop sites all look the same because the AI had no examples to differentiate against.</a:t>
+            </a:r>
+          </a:p>
+        </p:txBody>
+      </p:sp>
+      <p:sp>
+        <p:nvSpPr>
+          <p:cNvPr id="12" name="Rectangle 11"/>
           <p:cNvSpPr/>
           <p:nvPr/>
         </p:nvSpPr>
@@ -7079,13 +6624,13 @@
       </p:sp>
       <p:sp>
         <p:nvSpPr>
-          <p:cNvPr id="12" name="TextBox 11"/>
+          <p:cNvPr id="13" name="TextBox 12"/>
           <p:cNvSpPr txBox="1"/>
           <p:nvPr/>
         </p:nvSpPr>
         <p:spPr>
           <a:xfrm>
-            <a:off x="11430000" y="6400800"/>
+            <a:off x="11430000" y="6446520"/>
             <a:ext cx="457200" cy="274320"/>
           </a:xfrm>
           <a:prstGeom prst="rect">
@@ -7100,7 +6645,7 @@
           <a:lstStyle/>
           <a:p>
             <a:pPr algn="r">
-              <a:defRPr sz="1200" b="0" i="0">
+              <a:defRPr sz="1100" b="0" i="0">
                 <a:solidFill>
                   <a:srgbClr val="9CA3B4"/>
                 </a:solidFill>
@@ -7147,7 +6692,7 @@
         </p:nvSpPr>
         <p:spPr>
           <a:xfrm>
-            <a:off x="457200" y="365760"/>
+            <a:off x="457200" y="320040"/>
             <a:ext cx="9144000" cy="731520"/>
           </a:xfrm>
           <a:prstGeom prst="rect">
@@ -7162,7 +6707,7 @@
           <a:lstStyle/>
           <a:p>
             <a:pPr algn="l">
-              <a:defRPr sz="3000" b="1" i="0">
+              <a:defRPr sz="2800" b="1" i="0">
                 <a:solidFill>
                   <a:srgbClr val="E8ECF4"/>
                 </a:solidFill>
@@ -7183,7 +6728,7 @@
         </p:nvSpPr>
         <p:spPr>
           <a:xfrm>
-            <a:off x="10515600" y="1051560"/>
+            <a:off x="10515600" y="960120"/>
             <a:ext cx="1188720" cy="365760"/>
           </a:xfrm>
           <a:prstGeom prst="roundRect">
@@ -7226,7 +6771,7 @@
         </p:nvSpPr>
         <p:spPr>
           <a:xfrm>
-            <a:off x="10515600" y="1078992"/>
+            <a:off x="10515600" y="987552"/>
             <a:ext cx="1188720" cy="365760"/>
           </a:xfrm>
           <a:prstGeom prst="rect">
@@ -7262,8 +6807,8 @@
         </p:nvSpPr>
         <p:spPr>
           <a:xfrm>
-            <a:off x="457200" y="1280160"/>
-            <a:ext cx="11274552" cy="4389120"/>
+            <a:off x="457200" y="1188720"/>
+            <a:ext cx="11274552" cy="5120640"/>
           </a:xfrm>
           <a:prstGeom prst="roundRect">
             <a:avLst/>
@@ -7307,7 +6852,7 @@
         </p:nvSpPr>
         <p:spPr>
           <a:xfrm>
-            <a:off x="731520" y="1508760"/>
+            <a:off x="731520" y="1417320"/>
             <a:ext cx="164592" cy="164592"/>
           </a:xfrm>
           <a:prstGeom prst="ellipse">
@@ -7350,7 +6895,7 @@
         </p:nvSpPr>
         <p:spPr>
           <a:xfrm>
-            <a:off x="1051560" y="1508760"/>
+            <a:off x="1051560" y="1417320"/>
             <a:ext cx="164592" cy="164592"/>
           </a:xfrm>
           <a:prstGeom prst="ellipse">
@@ -7393,7 +6938,7 @@
         </p:nvSpPr>
         <p:spPr>
           <a:xfrm>
-            <a:off x="1371600" y="1508760"/>
+            <a:off x="1371600" y="1417320"/>
             <a:ext cx="164592" cy="164592"/>
           </a:xfrm>
           <a:prstGeom prst="ellipse">
@@ -7436,8 +6981,8 @@
         </p:nvSpPr>
         <p:spPr>
           <a:xfrm>
-            <a:off x="731520" y="2011680"/>
-            <a:ext cx="10698480" cy="3474720"/>
+            <a:off x="731520" y="1920240"/>
+            <a:ext cx="10698480" cy="4343400"/>
           </a:xfrm>
           <a:prstGeom prst="rect">
             <a:avLst/>
@@ -7451,7 +6996,7 @@
           <a:lstStyle/>
           <a:p>
             <a:pPr algn="l">
-              <a:defRPr sz="1500" b="0" i="0">
+              <a:defRPr sz="1200" b="0" i="0">
                 <a:solidFill>
                   <a:srgbClr val="E8ECF4"/>
                 </a:solidFill>
@@ -7463,7 +7008,7 @@
             </a:r>
             <a:br/>
             <a:r>
-              <a:t>    → events/rag-pipelines.json</a:t>
+              <a:t>    --&gt; outputs events/rag-pipelines.json</a:t>
             </a:r>
             <a:br/>
             <a:br/>
@@ -7472,7 +7017,7 @@
             </a:r>
             <a:br/>
             <a:r>
-              <a:t>    → schedules/rag-pipelines.md  +  .json</a:t>
+              <a:t>    --&gt; outputs schedules/rag-pipelines.md + .json</a:t>
             </a:r>
             <a:br/>
             <a:br/>
@@ -7481,50 +7026,32 @@
             </a:r>
             <a:br/>
             <a:r>
-              <a:t>    → comms/rag-pipelines-announcement.md</a:t>
-            </a:r>
-          </a:p>
-        </p:txBody>
-      </p:sp>
-      <p:sp>
-        <p:nvSpPr>
-          <p:cNvPr id="10" name="TextBox 9"/>
-          <p:cNvSpPr txBox="1"/>
-          <p:nvPr/>
-        </p:nvSpPr>
-        <p:spPr>
-          <a:xfrm>
-            <a:off x="457200" y="5852160"/>
-            <a:ext cx="11274552" cy="548640"/>
-          </a:xfrm>
-          <a:prstGeom prst="rect">
-            <a:avLst/>
-          </a:prstGeom>
-          <a:noFill/>
-        </p:spPr>
-        <p:txBody>
-          <a:bodyPr wrap="square">
-            <a:spAutoFit/>
-          </a:bodyPr>
-          <a:lstStyle/>
-          <a:p>
-            <a:pPr algn="ctr">
-              <a:defRPr sz="1700" b="0" i="1">
-                <a:solidFill>
-                  <a:srgbClr val="9CA3B4"/>
-                </a:solidFill>
-                <a:latin typeface="Arial"/>
-              </a:defRPr>
-            </a:pPr>
+              <a:t>    --&gt; outputs comms/rag-pipelines-announcement.md</a:t>
+            </a:r>
+            <a:br/>
+            <a:br/>
+            <a:br/>
             <a:r>
               <a:t>Each command reads structured data from the previous one.</a:t>
             </a:r>
-          </a:p>
-        </p:txBody>
-      </p:sp>
-      <p:sp>
-        <p:nvSpPr>
-          <p:cNvPr id="11" name="Rectangle 10"/>
+            <a:br/>
+            <a:r>
+              <a:t>  - Predictable format          -&gt;  reliable piping</a:t>
+            </a:r>
+            <a:br/>
+            <a:r>
+              <a:t>  - Schema in CLAUDE.md         -&gt;  every command knows the contract</a:t>
+            </a:r>
+            <a:br/>
+            <a:r>
+              <a:t>  - Structured beats freeform   -&gt;  for agent-to-agent communication</a:t>
+            </a:r>
+          </a:p>
+        </p:txBody>
+      </p:sp>
+      <p:sp>
+        <p:nvSpPr>
+          <p:cNvPr id="10" name="Rectangle 9"/>
           <p:cNvSpPr/>
           <p:nvPr/>
         </p:nvSpPr>
@@ -7567,13 +7094,13 @@
       </p:sp>
       <p:sp>
         <p:nvSpPr>
-          <p:cNvPr id="12" name="TextBox 11"/>
+          <p:cNvPr id="11" name="TextBox 10"/>
           <p:cNvSpPr txBox="1"/>
           <p:nvPr/>
         </p:nvSpPr>
         <p:spPr>
           <a:xfrm>
-            <a:off x="11430000" y="6400800"/>
+            <a:off x="11430000" y="6446520"/>
             <a:ext cx="457200" cy="274320"/>
           </a:xfrm>
           <a:prstGeom prst="rect">
@@ -7588,7 +7115,7 @@
           <a:lstStyle/>
           <a:p>
             <a:pPr algn="r">
-              <a:defRPr sz="1200" b="0" i="0">
+              <a:defRPr sz="1100" b="0" i="0">
                 <a:solidFill>
                   <a:srgbClr val="9CA3B4"/>
                 </a:solidFill>
@@ -7635,7 +7162,7 @@
         </p:nvSpPr>
         <p:spPr>
           <a:xfrm>
-            <a:off x="457200" y="365760"/>
+            <a:off x="457200" y="320040"/>
             <a:ext cx="9144000" cy="731520"/>
           </a:xfrm>
           <a:prstGeom prst="rect">
@@ -7650,7 +7177,7 @@
           <a:lstStyle/>
           <a:p>
             <a:pPr algn="l">
-              <a:defRPr sz="3000" b="1" i="0">
+              <a:defRPr sz="2800" b="1" i="0">
                 <a:solidFill>
                   <a:srgbClr val="E8ECF4"/>
                 </a:solidFill>
@@ -7671,7 +7198,7 @@
         </p:nvSpPr>
         <p:spPr>
           <a:xfrm>
-            <a:off x="10515600" y="1051560"/>
+            <a:off x="10515600" y="960120"/>
             <a:ext cx="1188720" cy="365760"/>
           </a:xfrm>
           <a:prstGeom prst="roundRect">
@@ -7714,7 +7241,7 @@
         </p:nvSpPr>
         <p:spPr>
           <a:xfrm>
-            <a:off x="10515600" y="1078992"/>
+            <a:off x="10515600" y="987552"/>
             <a:ext cx="1188720" cy="365760"/>
           </a:xfrm>
           <a:prstGeom prst="rect">
@@ -7750,8 +7277,8 @@
         </p:nvSpPr>
         <p:spPr>
           <a:xfrm>
-            <a:off x="457200" y="1280160"/>
-            <a:ext cx="11274552" cy="4389120"/>
+            <a:off x="457200" y="1188720"/>
+            <a:ext cx="11274552" cy="4572000"/>
           </a:xfrm>
           <a:prstGeom prst="roundRect">
             <a:avLst/>
@@ -7795,7 +7322,7 @@
         </p:nvSpPr>
         <p:spPr>
           <a:xfrm>
-            <a:off x="731520" y="1508760"/>
+            <a:off x="731520" y="1417320"/>
             <a:ext cx="164592" cy="164592"/>
           </a:xfrm>
           <a:prstGeom prst="ellipse">
@@ -7838,7 +7365,7 @@
         </p:nvSpPr>
         <p:spPr>
           <a:xfrm>
-            <a:off x="1051560" y="1508760"/>
+            <a:off x="1051560" y="1417320"/>
             <a:ext cx="164592" cy="164592"/>
           </a:xfrm>
           <a:prstGeom prst="ellipse">
@@ -7881,7 +7408,7 @@
         </p:nvSpPr>
         <p:spPr>
           <a:xfrm>
-            <a:off x="1371600" y="1508760"/>
+            <a:off x="1371600" y="1417320"/>
             <a:ext cx="164592" cy="164592"/>
           </a:xfrm>
           <a:prstGeom prst="ellipse">
@@ -7924,8 +7451,8 @@
         </p:nvSpPr>
         <p:spPr>
           <a:xfrm>
-            <a:off x="731520" y="2011680"/>
-            <a:ext cx="10698480" cy="3474720"/>
+            <a:off x="731520" y="1920240"/>
+            <a:ext cx="10698480" cy="3794760"/>
           </a:xfrm>
           <a:prstGeom prst="rect">
             <a:avLst/>
@@ -7939,7 +7466,7 @@
           <a:lstStyle/>
           <a:p>
             <a:pPr algn="l">
-              <a:defRPr sz="1500" b="0" i="0">
+              <a:defRPr sz="1300" b="0" i="0">
                 <a:solidFill>
                   <a:srgbClr val="E8ECF4"/>
                 </a:solidFill>
@@ -7947,114 +7474,48 @@
               </a:defRPr>
             </a:pPr>
             <a:r>
-              <a:rPr sz="1300">
-                <a:solidFill>
-                  <a:srgbClr val="E8ECF4"/>
-                </a:solidFill>
-                <a:latin typeface="Courier New"/>
-              </a:rPr>
               <a:t>---</a:t>
             </a:r>
             <a:br/>
             <a:r>
-              <a:rPr sz="1300">
-                <a:solidFill>
-                  <a:srgbClr val="E8ECF4"/>
-                </a:solidFill>
-                <a:latin typeface="Courier New"/>
-              </a:rPr>
               <a:t>name: build-schedule</a:t>
             </a:r>
             <a:br/>
             <a:r>
-              <a:rPr sz="1300">
-                <a:solidFill>
-                  <a:srgbClr val="E8ECF4"/>
-                </a:solidFill>
-                <a:latin typeface="Courier New"/>
-              </a:rPr>
               <a:t>description: Build a schedule from an event plan</a:t>
             </a:r>
             <a:br/>
             <a:r>
-              <a:rPr sz="1300">
-                <a:solidFill>
-                  <a:srgbClr val="E8ECF4"/>
-                </a:solidFill>
-                <a:latin typeface="Courier New"/>
-              </a:rPr>
               <a:t>argument-hint: [event-plan.json]</a:t>
             </a:r>
             <a:br/>
             <a:r>
-              <a:rPr sz="1300">
-                <a:solidFill>
-                  <a:srgbClr val="E8ECF4"/>
-                </a:solidFill>
-                <a:latin typeface="Courier New"/>
-              </a:rPr>
               <a:t>allowed-tools: Read, Write</a:t>
             </a:r>
             <a:br/>
             <a:r>
-              <a:rPr sz="1300">
-                <a:solidFill>
-                  <a:srgbClr val="E8ECF4"/>
-                </a:solidFill>
-                <a:latin typeface="Courier New"/>
-              </a:rPr>
               <a:t>---</a:t>
             </a:r>
             <a:br/>
             <a:br/>
             <a:r>
-              <a:rPr sz="1300">
-                <a:solidFill>
-                  <a:srgbClr val="E8ECF4"/>
-                </a:solidFill>
-                <a:latin typeface="Courier New"/>
-              </a:rPr>
               <a:t>Build a schedule for the event plan at: $ARGUMENTS</a:t>
             </a:r>
             <a:br/>
             <a:br/>
             <a:r>
-              <a:rPr sz="1300">
-                <a:solidFill>
-                  <a:srgbClr val="E8ECF4"/>
-                </a:solidFill>
-                <a:latin typeface="Courier New"/>
-              </a:rPr>
               <a:t>## Steps:</a:t>
             </a:r>
             <a:br/>
             <a:r>
-              <a:rPr sz="1300">
-                <a:solidFill>
-                  <a:srgbClr val="E8ECF4"/>
-                </a:solidFill>
-                <a:latin typeface="Courier New"/>
-              </a:rPr>
               <a:t>1. Read $ARGUMENTS and data/speakers.json</a:t>
             </a:r>
             <a:br/>
             <a:r>
-              <a:rPr sz="1300">
-                <a:solidFill>
-                  <a:srgbClr val="E8ECF4"/>
-                </a:solidFill>
-                <a:latin typeface="Courier New"/>
-              </a:rPr>
               <a:t>2. Fit talks into time slots, breaks every 90 min</a:t>
             </a:r>
             <a:br/>
             <a:r>
-              <a:rPr sz="1300">
-                <a:solidFill>
-                  <a:srgbClr val="E8ECF4"/>
-                </a:solidFill>
-                <a:latin typeface="Courier New"/>
-              </a:rPr>
               <a:t>3. Output markdown + JSON to schedules/</a:t>
             </a:r>
           </a:p>
@@ -8068,8 +7529,8 @@
         </p:nvSpPr>
         <p:spPr>
           <a:xfrm>
-            <a:off x="457200" y="5852160"/>
-            <a:ext cx="11274552" cy="548640"/>
+            <a:off x="457200" y="5943600"/>
+            <a:ext cx="11274552" cy="457200"/>
           </a:xfrm>
           <a:prstGeom prst="rect">
             <a:avLst/>
@@ -8083,7 +7544,43 @@
           <a:lstStyle/>
           <a:p>
             <a:pPr algn="ctr">
-              <a:defRPr sz="1700" b="0" i="1">
+              <a:defRPr sz="1600" b="1" i="0">
+                <a:solidFill>
+                  <a:srgbClr val="E8ECF4"/>
+                </a:solidFill>
+                <a:latin typeface="Arial"/>
+              </a:defRPr>
+            </a:pPr>
+            <a:r>
+              <a:t>/build-schedule events/rag-pipelines.json  →  $ARGUMENTS becomes the file path</a:t>
+            </a:r>
+          </a:p>
+        </p:txBody>
+      </p:sp>
+      <p:sp>
+        <p:nvSpPr>
+          <p:cNvPr id="11" name="TextBox 10"/>
+          <p:cNvSpPr txBox="1"/>
+          <p:nvPr/>
+        </p:nvSpPr>
+        <p:spPr>
+          <a:xfrm>
+            <a:off x="457200" y="6355080"/>
+            <a:ext cx="11274552" cy="548640"/>
+          </a:xfrm>
+          <a:prstGeom prst="rect">
+            <a:avLst/>
+          </a:prstGeom>
+          <a:noFill/>
+        </p:spPr>
+        <p:txBody>
+          <a:bodyPr wrap="square">
+            <a:spAutoFit/>
+          </a:bodyPr>
+          <a:lstStyle/>
+          <a:p>
+            <a:pPr algn="ctr">
+              <a:defRPr sz="1300" b="0" i="1">
                 <a:solidFill>
                   <a:srgbClr val="9CA3B4"/>
                 </a:solidFill>
@@ -8091,20 +7588,14 @@
               </a:defRPr>
             </a:pPr>
             <a:r>
-              <a:rPr sz="1500" i="1">
-                <a:solidFill>
-                  <a:srgbClr val="9CA3B4"/>
-                </a:solidFill>
-                <a:latin typeface="Arial"/>
-              </a:rPr>
-              <a:t>Usage: /build-schedule events/rag-pipelines.json  →  $ARGUMENTS becomes the file path</a:t>
-            </a:r>
-          </a:p>
-        </p:txBody>
-      </p:sp>
-      <p:sp>
-        <p:nvSpPr>
-          <p:cNvPr id="11" name="Rectangle 10"/>
+              <a:t>YAML frontmatter is the current convention. Plain markdown still works. Skills (.claude/skills/&lt;name&gt;/SKILL.md) — Session 3.</a:t>
+            </a:r>
+          </a:p>
+        </p:txBody>
+      </p:sp>
+      <p:sp>
+        <p:nvSpPr>
+          <p:cNvPr id="12" name="Rectangle 11"/>
           <p:cNvSpPr/>
           <p:nvPr/>
         </p:nvSpPr>
@@ -8147,13 +7638,13 @@
       </p:sp>
       <p:sp>
         <p:nvSpPr>
-          <p:cNvPr id="12" name="TextBox 11"/>
+          <p:cNvPr id="13" name="TextBox 12"/>
           <p:cNvSpPr txBox="1"/>
           <p:nvPr/>
         </p:nvSpPr>
         <p:spPr>
           <a:xfrm>
-            <a:off x="11430000" y="6400800"/>
+            <a:off x="11430000" y="6446520"/>
             <a:ext cx="457200" cy="274320"/>
           </a:xfrm>
           <a:prstGeom prst="rect">
@@ -8168,7 +7659,7 @@
           <a:lstStyle/>
           <a:p>
             <a:pPr algn="r">
-              <a:defRPr sz="1200" b="0" i="0">
+              <a:defRPr sz="1100" b="0" i="0">
                 <a:solidFill>
                   <a:srgbClr val="9CA3B4"/>
                 </a:solidFill>
@@ -8258,8 +7749,8 @@
         </p:nvSpPr>
         <p:spPr>
           <a:xfrm>
-            <a:off x="457200" y="365760"/>
-            <a:ext cx="10972800" cy="822960"/>
+            <a:off x="457200" y="320040"/>
+            <a:ext cx="10972800" cy="777240"/>
           </a:xfrm>
           <a:prstGeom prst="rect">
             <a:avLst/>
@@ -8273,7 +7764,7 @@
           <a:lstStyle/>
           <a:p>
             <a:pPr algn="l">
-              <a:defRPr sz="3000" b="1" i="0">
+              <a:defRPr sz="2800" b="1" i="0">
                 <a:solidFill>
                   <a:srgbClr val="E8ECF4"/>
                 </a:solidFill>
@@ -8294,8 +7785,8 @@
         </p:nvSpPr>
         <p:spPr>
           <a:xfrm>
-            <a:off x="5989320" y="1371600"/>
-            <a:ext cx="210312" cy="5029200"/>
+            <a:off x="5989320" y="1280160"/>
+            <a:ext cx="210312" cy="4937760"/>
           </a:xfrm>
           <a:prstGeom prst="rect">
             <a:avLst/>
@@ -8337,8 +7828,8 @@
         </p:nvSpPr>
         <p:spPr>
           <a:xfrm>
-            <a:off x="6062472" y="1371600"/>
-            <a:ext cx="64008" cy="5029200"/>
+            <a:off x="6062472" y="1280160"/>
+            <a:ext cx="64008" cy="4937760"/>
           </a:xfrm>
           <a:prstGeom prst="rect">
             <a:avLst/>
@@ -8380,7 +7871,7 @@
         </p:nvSpPr>
         <p:spPr>
           <a:xfrm>
-            <a:off x="457200" y="1554480"/>
+            <a:off x="457200" y="1417320"/>
             <a:ext cx="137160" cy="457200"/>
           </a:xfrm>
           <a:prstGeom prst="rect">
@@ -8423,8 +7914,8 @@
         </p:nvSpPr>
         <p:spPr>
           <a:xfrm>
-            <a:off x="777240" y="1508760"/>
-            <a:ext cx="5029200" cy="548640"/>
+            <a:off x="777240" y="1371600"/>
+            <a:ext cx="5029200" cy="502920"/>
           </a:xfrm>
           <a:prstGeom prst="rect">
             <a:avLst/>
@@ -8459,7 +7950,7 @@
         </p:nvSpPr>
         <p:spPr>
           <a:xfrm>
-            <a:off x="457200" y="2423160"/>
+            <a:off x="457200" y="2240279"/>
             <a:ext cx="91440" cy="91440"/>
           </a:xfrm>
           <a:prstGeom prst="ellipse">
@@ -8502,8 +7993,8 @@
         </p:nvSpPr>
         <p:spPr>
           <a:xfrm>
-            <a:off x="777240" y="2286000"/>
-            <a:ext cx="5029200" cy="822960"/>
+            <a:off x="777240" y="2103120"/>
+            <a:ext cx="5029200" cy="777240"/>
           </a:xfrm>
           <a:prstGeom prst="rect">
             <a:avLst/>
@@ -8517,7 +8008,7 @@
           <a:lstStyle/>
           <a:p>
             <a:pPr algn="l">
-              <a:defRPr sz="1700" b="0" i="0">
+              <a:defRPr sz="1600" b="0" i="0">
                 <a:solidFill>
                   <a:srgbClr val="E8ECF4"/>
                 </a:solidFill>
@@ -8538,7 +8029,7 @@
         </p:nvSpPr>
         <p:spPr>
           <a:xfrm>
-            <a:off x="457200" y="3291840"/>
+            <a:off x="457200" y="3017520"/>
             <a:ext cx="91440" cy="91440"/>
           </a:xfrm>
           <a:prstGeom prst="ellipse">
@@ -8581,8 +8072,8 @@
         </p:nvSpPr>
         <p:spPr>
           <a:xfrm>
-            <a:off x="777240" y="3154680"/>
-            <a:ext cx="5029200" cy="822960"/>
+            <a:off x="777240" y="2880360"/>
+            <a:ext cx="5029200" cy="777240"/>
           </a:xfrm>
           <a:prstGeom prst="rect">
             <a:avLst/>
@@ -8596,7 +8087,7 @@
           <a:lstStyle/>
           <a:p>
             <a:pPr algn="l">
-              <a:defRPr sz="1700" b="0" i="0">
+              <a:defRPr sz="1600" b="0" i="0">
                 <a:solidFill>
                   <a:srgbClr val="E8ECF4"/>
                 </a:solidFill>
@@ -8604,7 +8095,7 @@
               </a:defRPr>
             </a:pPr>
             <a:r>
-              <a:t>Write vague EXAMPLES — point to specific files</a:t>
+              <a:t>Write vague EXAMPLES sections</a:t>
             </a:r>
           </a:p>
         </p:txBody>
@@ -8617,7 +8108,7 @@
         </p:nvSpPr>
         <p:spPr>
           <a:xfrm>
-            <a:off x="457200" y="4160520"/>
+            <a:off x="457200" y="3794760"/>
             <a:ext cx="91440" cy="91440"/>
           </a:xfrm>
           <a:prstGeom prst="ellipse">
@@ -8660,8 +8151,8 @@
         </p:nvSpPr>
         <p:spPr>
           <a:xfrm>
-            <a:off x="777240" y="4023360"/>
-            <a:ext cx="5029200" cy="822960"/>
+            <a:off x="777240" y="3657600"/>
+            <a:ext cx="5029200" cy="777240"/>
           </a:xfrm>
           <a:prstGeom prst="rect">
             <a:avLst/>
@@ -8675,7 +8166,7 @@
           <a:lstStyle/>
           <a:p>
             <a:pPr algn="l">
-              <a:defRPr sz="1700" b="0" i="0">
+              <a:defRPr sz="1600" b="0" i="0">
                 <a:solidFill>
                   <a:srgbClr val="E8ECF4"/>
                 </a:solidFill>
@@ -8696,7 +8187,7 @@
         </p:nvSpPr>
         <p:spPr>
           <a:xfrm>
-            <a:off x="6336792" y="1554480"/>
+            <a:off x="6336792" y="1417320"/>
             <a:ext cx="137160" cy="457200"/>
           </a:xfrm>
           <a:prstGeom prst="rect">
@@ -8739,8 +8230,8 @@
         </p:nvSpPr>
         <p:spPr>
           <a:xfrm>
-            <a:off x="6656832" y="1508760"/>
-            <a:ext cx="5029200" cy="548640"/>
+            <a:off x="6656832" y="1371600"/>
+            <a:ext cx="5029200" cy="502920"/>
           </a:xfrm>
           <a:prstGeom prst="rect">
             <a:avLst/>
@@ -8775,7 +8266,7 @@
         </p:nvSpPr>
         <p:spPr>
           <a:xfrm>
-            <a:off x="6336792" y="2423160"/>
+            <a:off x="6336792" y="2240279"/>
             <a:ext cx="91440" cy="91440"/>
           </a:xfrm>
           <a:prstGeom prst="ellipse">
@@ -8818,8 +8309,8 @@
         </p:nvSpPr>
         <p:spPr>
           <a:xfrm>
-            <a:off x="6656832" y="2286000"/>
-            <a:ext cx="5029200" cy="822960"/>
+            <a:off x="6656832" y="2103120"/>
+            <a:ext cx="5029200" cy="777240"/>
           </a:xfrm>
           <a:prstGeom prst="rect">
             <a:avLst/>
@@ -8833,7 +8324,7 @@
           <a:lstStyle/>
           <a:p>
             <a:pPr algn="l">
-              <a:defRPr sz="1700" b="0" i="0">
+              <a:defRPr sz="1600" b="0" i="0">
                 <a:solidFill>
                   <a:srgbClr val="E8ECF4"/>
                 </a:solidFill>
@@ -8854,7 +8345,7 @@
         </p:nvSpPr>
         <p:spPr>
           <a:xfrm>
-            <a:off x="6336792" y="3291840"/>
+            <a:off x="6336792" y="3017520"/>
             <a:ext cx="91440" cy="91440"/>
           </a:xfrm>
           <a:prstGeom prst="ellipse">
@@ -8897,8 +8388,8 @@
         </p:nvSpPr>
         <p:spPr>
           <a:xfrm>
-            <a:off x="6656832" y="3154680"/>
-            <a:ext cx="5029200" cy="822960"/>
+            <a:off x="6656832" y="2880360"/>
+            <a:ext cx="5029200" cy="777240"/>
           </a:xfrm>
           <a:prstGeom prst="rect">
             <a:avLst/>
@@ -8912,7 +8403,7 @@
           <a:lstStyle/>
           <a:p>
             <a:pPr algn="l">
-              <a:defRPr sz="1700" b="0" i="0">
+              <a:defRPr sz="1600" b="0" i="0">
                 <a:solidFill>
                   <a:srgbClr val="E8ECF4"/>
                 </a:solidFill>
@@ -8933,7 +8424,7 @@
         </p:nvSpPr>
         <p:spPr>
           <a:xfrm>
-            <a:off x="6336792" y="4160520"/>
+            <a:off x="6336792" y="3794760"/>
             <a:ext cx="91440" cy="91440"/>
           </a:xfrm>
           <a:prstGeom prst="ellipse">
@@ -8976,8 +8467,8 @@
         </p:nvSpPr>
         <p:spPr>
           <a:xfrm>
-            <a:off x="6656832" y="4023360"/>
-            <a:ext cx="5029200" cy="822960"/>
+            <a:off x="6656832" y="3657600"/>
+            <a:ext cx="5029200" cy="777240"/>
           </a:xfrm>
           <a:prstGeom prst="rect">
             <a:avLst/>
@@ -8991,7 +8482,7 @@
           <a:lstStyle/>
           <a:p>
             <a:pPr algn="l">
-              <a:defRPr sz="1700" b="0" i="0">
+              <a:defRPr sz="1600" b="0" i="0">
                 <a:solidFill>
                   <a:srgbClr val="E8ECF4"/>
                 </a:solidFill>
@@ -8999,7 +8490,7 @@
               </a:defRPr>
             </a:pPr>
             <a:r>
-              <a:t>Add more examples to improve output over time</a:t>
+              <a:t>Add more examples to improve quality over time</a:t>
             </a:r>
           </a:p>
         </p:txBody>
@@ -9012,8 +8503,8 @@
         </p:nvSpPr>
         <p:spPr>
           <a:xfrm>
-            <a:off x="11430000" y="6400800"/>
-            <a:ext cx="457200" cy="274320"/>
+            <a:off x="457200" y="6263640"/>
+            <a:ext cx="11274552" cy="365760"/>
           </a:xfrm>
           <a:prstGeom prst="rect">
             <a:avLst/>
@@ -9026,8 +8517,44 @@
           </a:bodyPr>
           <a:lstStyle/>
           <a:p>
+            <a:pPr algn="ctr">
+              <a:defRPr sz="1400" b="0" i="1">
+                <a:solidFill>
+                  <a:srgbClr val="9CA3B4"/>
+                </a:solidFill>
+                <a:latin typeface="Arial"/>
+              </a:defRPr>
+            </a:pPr>
+            <a:r>
+              <a:t>A bad PRP executed perfectly still gives you bad code. Don't skip the review.</a:t>
+            </a:r>
+          </a:p>
+        </p:txBody>
+      </p:sp>
+      <p:sp>
+        <p:nvSpPr>
+          <p:cNvPr id="23" name="TextBox 22"/>
+          <p:cNvSpPr txBox="1"/>
+          <p:nvPr/>
+        </p:nvSpPr>
+        <p:spPr>
+          <a:xfrm>
+            <a:off x="11430000" y="6446520"/>
+            <a:ext cx="457200" cy="274320"/>
+          </a:xfrm>
+          <a:prstGeom prst="rect">
+            <a:avLst/>
+          </a:prstGeom>
+          <a:noFill/>
+        </p:spPr>
+        <p:txBody>
+          <a:bodyPr wrap="square">
+            <a:spAutoFit/>
+          </a:bodyPr>
+          <a:lstStyle/>
+          <a:p>
             <a:pPr algn="r">
-              <a:defRPr sz="1200" b="0" i="0">
+              <a:defRPr sz="1100" b="0" i="0">
                 <a:solidFill>
                   <a:srgbClr val="9CA3B4"/>
                 </a:solidFill>
@@ -9219,7 +8746,7 @@
               </a:defRPr>
             </a:pPr>
             <a:r>
-              <a:t>Build Time</a:t>
+              <a:t>Exercise</a:t>
             </a:r>
           </a:p>
         </p:txBody>
@@ -9268,7 +8795,7 @@
         </p:nvSpPr>
         <p:spPr>
           <a:xfrm>
-            <a:off x="11430000" y="6400800"/>
+            <a:off x="11430000" y="6446520"/>
             <a:ext cx="457200" cy="274320"/>
           </a:xfrm>
           <a:prstGeom prst="rect">
@@ -9283,7 +8810,7 @@
           <a:lstStyle/>
           <a:p>
             <a:pPr algn="r">
-              <a:defRPr sz="1200" b="0" i="0">
+              <a:defRPr sz="1100" b="0" i="0">
                 <a:solidFill>
                   <a:srgbClr val="9CA3B4"/>
                 </a:solidFill>
@@ -9373,8 +8900,8 @@
         </p:nvSpPr>
         <p:spPr>
           <a:xfrm>
-            <a:off x="548640" y="457200"/>
-            <a:ext cx="10972800" cy="914400"/>
+            <a:off x="548640" y="365760"/>
+            <a:ext cx="10972800" cy="822960"/>
           </a:xfrm>
           <a:prstGeom prst="rect">
             <a:avLst/>
@@ -9388,7 +8915,7 @@
           <a:lstStyle/>
           <a:p>
             <a:pPr algn="l">
-              <a:defRPr sz="3400" b="1" i="0">
+              <a:defRPr sz="3200" b="1" i="0">
                 <a:solidFill>
                   <a:srgbClr val="E8ECF4"/>
                 </a:solidFill>
@@ -9396,7 +8923,7 @@
               </a:defRPr>
             </a:pPr>
             <a:r>
-              <a:t>Where We Left Off</a:t>
+              <a:t>Recap — Where We Left Off</a:t>
             </a:r>
           </a:p>
         </p:txBody>
@@ -9409,7 +8936,7 @@
         </p:nvSpPr>
         <p:spPr>
           <a:xfrm>
-            <a:off x="548640" y="1325880"/>
+            <a:off x="548640" y="1207008"/>
             <a:ext cx="2286000" cy="54864"/>
           </a:xfrm>
           <a:prstGeom prst="rect">
@@ -9446,13 +8973,49 @@
       </p:sp>
       <p:sp>
         <p:nvSpPr>
-          <p:cNvPr id="5" name="Rectangle 4"/>
+          <p:cNvPr id="5" name="TextBox 4"/>
+          <p:cNvSpPr txBox="1"/>
+          <p:nvPr/>
+        </p:nvSpPr>
+        <p:spPr>
+          <a:xfrm>
+            <a:off x="548640" y="1508760"/>
+            <a:ext cx="10972800" cy="640080"/>
+          </a:xfrm>
+          <a:prstGeom prst="rect">
+            <a:avLst/>
+          </a:prstGeom>
+          <a:noFill/>
+        </p:spPr>
+        <p:txBody>
+          <a:bodyPr wrap="square">
+            <a:spAutoFit/>
+          </a:bodyPr>
+          <a:lstStyle/>
+          <a:p>
+            <a:pPr algn="l">
+              <a:defRPr sz="1900" b="0" i="1">
+                <a:solidFill>
+                  <a:srgbClr val="9CA3B4"/>
+                </a:solidFill>
+                <a:latin typeface="Arial"/>
+              </a:defRPr>
+            </a:pPr>
+            <a:r>
+              <a:t>You have:</a:t>
+            </a:r>
+          </a:p>
+        </p:txBody>
+      </p:sp>
+      <p:sp>
+        <p:nvSpPr>
+          <p:cNvPr id="6" name="Rectangle 5"/>
           <p:cNvSpPr/>
           <p:nvPr/>
         </p:nvSpPr>
         <p:spPr>
           <a:xfrm>
-            <a:off x="548640" y="1965960"/>
+            <a:off x="548640" y="2450592"/>
             <a:ext cx="109728" cy="109728"/>
           </a:xfrm>
           <a:prstGeom prst="rect">
@@ -9489,14 +9052,14 @@
       </p:sp>
       <p:sp>
         <p:nvSpPr>
-          <p:cNvPr id="6" name="TextBox 5"/>
+          <p:cNvPr id="7" name="TextBox 6"/>
           <p:cNvSpPr txBox="1"/>
           <p:nvPr/>
         </p:nvSpPr>
         <p:spPr>
           <a:xfrm>
-            <a:off x="914400" y="1828800"/>
-            <a:ext cx="10515600" cy="914400"/>
+            <a:off x="914400" y="2286000"/>
+            <a:ext cx="10515600" cy="868680"/>
           </a:xfrm>
           <a:prstGeom prst="rect">
             <a:avLst/>
@@ -9510,7 +9073,7 @@
           <a:lstStyle/>
           <a:p>
             <a:pPr algn="l">
-              <a:defRPr sz="2000" b="0" i="0">
+              <a:defRPr sz="1800" b="0" i="0">
                 <a:solidFill>
                   <a:srgbClr val="E8ECF4"/>
                 </a:solidFill>
@@ -9518,20 +9081,20 @@
               </a:defRPr>
             </a:pPr>
             <a:r>
-              <a:t>Git repo with CLAUDE.md defining personality and schemas</a:t>
-            </a:r>
-          </a:p>
-        </p:txBody>
-      </p:sp>
-      <p:sp>
-        <p:nvSpPr>
-          <p:cNvPr id="7" name="Rectangle 6"/>
+              <a:t>A git repo with CLAUDE.md defining your agent's personality and schemas</a:t>
+            </a:r>
+          </a:p>
+        </p:txBody>
+      </p:sp>
+      <p:sp>
+        <p:nvSpPr>
+          <p:cNvPr id="8" name="Rectangle 7"/>
           <p:cNvSpPr/>
           <p:nvPr/>
         </p:nvSpPr>
         <p:spPr>
           <a:xfrm>
-            <a:off x="548640" y="3017520"/>
+            <a:off x="548640" y="3364992"/>
             <a:ext cx="109728" cy="109728"/>
           </a:xfrm>
           <a:prstGeom prst="rect">
@@ -9568,14 +9131,14 @@
       </p:sp>
       <p:sp>
         <p:nvSpPr>
-          <p:cNvPr id="8" name="TextBox 7"/>
+          <p:cNvPr id="9" name="TextBox 8"/>
           <p:cNvSpPr txBox="1"/>
           <p:nvPr/>
         </p:nvSpPr>
         <p:spPr>
           <a:xfrm>
-            <a:off x="914400" y="2880360"/>
-            <a:ext cx="10515600" cy="914400"/>
+            <a:off x="914400" y="3200400"/>
+            <a:ext cx="10515600" cy="868680"/>
           </a:xfrm>
           <a:prstGeom prst="rect">
             <a:avLst/>
@@ -9589,7 +9152,7 @@
           <a:lstStyle/>
           <a:p>
             <a:pPr algn="l">
-              <a:defRPr sz="2000" b="0" i="0">
+              <a:defRPr sz="1800" b="0" i="0">
                 <a:solidFill>
                   <a:srgbClr val="E8ECF4"/>
                 </a:solidFill>
@@ -9597,20 +9160,20 @@
               </a:defRPr>
             </a:pPr>
             <a:r>
-              <a:t>/plan-event generates structured JSON event plans</a:t>
-            </a:r>
-          </a:p>
-        </p:txBody>
-      </p:sp>
-      <p:sp>
-        <p:nvSpPr>
-          <p:cNvPr id="9" name="Rectangle 8"/>
+              <a:t>/plan-event that generates structured JSON event plans</a:t>
+            </a:r>
+          </a:p>
+        </p:txBody>
+      </p:sp>
+      <p:sp>
+        <p:nvSpPr>
+          <p:cNvPr id="10" name="Rectangle 9"/>
           <p:cNvSpPr/>
           <p:nvPr/>
         </p:nvSpPr>
         <p:spPr>
           <a:xfrm>
-            <a:off x="548640" y="4069080"/>
+            <a:off x="548640" y="4279392"/>
             <a:ext cx="109728" cy="109728"/>
           </a:xfrm>
           <a:prstGeom prst="rect">
@@ -9647,14 +9210,14 @@
       </p:sp>
       <p:sp>
         <p:nvSpPr>
-          <p:cNvPr id="10" name="TextBox 9"/>
+          <p:cNvPr id="11" name="TextBox 10"/>
           <p:cNvSpPr txBox="1"/>
           <p:nvPr/>
         </p:nvSpPr>
         <p:spPr>
           <a:xfrm>
-            <a:off x="914400" y="3931920"/>
-            <a:ext cx="10515600" cy="914400"/>
+            <a:off x="914400" y="4114800"/>
+            <a:ext cx="10515600" cy="868680"/>
           </a:xfrm>
           <a:prstGeom prst="rect">
             <a:avLst/>
@@ -9668,7 +9231,7 @@
           <a:lstStyle/>
           <a:p>
             <a:pPr algn="l">
-              <a:defRPr sz="2000" b="0" i="0">
+              <a:defRPr sz="1800" b="0" i="0">
                 <a:solidFill>
                   <a:srgbClr val="E8ECF4"/>
                 </a:solidFill>
@@ -9676,20 +9239,20 @@
               </a:defRPr>
             </a:pPr>
             <a:r>
-              <a:t>An LLM provider connected — Claude Code Max, Anthropic API, or ngrok</a:t>
-            </a:r>
-          </a:p>
-        </p:txBody>
-      </p:sp>
-      <p:sp>
-        <p:nvSpPr>
-          <p:cNvPr id="11" name="Rectangle 10"/>
+              <a:t>An LLM provider connected — Claude Code Max (default), Anthropic API, or ngrok</a:t>
+            </a:r>
+          </a:p>
+        </p:txBody>
+      </p:sp>
+      <p:sp>
+        <p:nvSpPr>
+          <p:cNvPr id="12" name="Rectangle 11"/>
           <p:cNvSpPr/>
           <p:nvPr/>
         </p:nvSpPr>
         <p:spPr>
           <a:xfrm>
-            <a:off x="548640" y="5120640"/>
+            <a:off x="548640" y="5193792"/>
             <a:ext cx="109728" cy="109728"/>
           </a:xfrm>
           <a:prstGeom prst="rect">
@@ -9726,14 +9289,14 @@
       </p:sp>
       <p:sp>
         <p:nvSpPr>
-          <p:cNvPr id="12" name="TextBox 11"/>
+          <p:cNvPr id="13" name="TextBox 12"/>
           <p:cNvSpPr txBox="1"/>
           <p:nvPr/>
         </p:nvSpPr>
         <p:spPr>
           <a:xfrm>
-            <a:off x="914400" y="4983479"/>
-            <a:ext cx="10515600" cy="914400"/>
+            <a:off x="914400" y="5029200"/>
+            <a:ext cx="10515600" cy="868680"/>
           </a:xfrm>
           <a:prstGeom prst="rect">
             <a:avLst/>
@@ -9747,7 +9310,7 @@
           <a:lstStyle/>
           <a:p>
             <a:pPr algn="l">
-              <a:defRPr sz="2000" b="0" i="0">
+              <a:defRPr sz="1800" b="0" i="0">
                 <a:solidFill>
                   <a:srgbClr val="E8ECF4"/>
                 </a:solidFill>
@@ -9762,14 +9325,14 @@
       </p:sp>
       <p:sp>
         <p:nvSpPr>
-          <p:cNvPr id="13" name="TextBox 12"/>
+          <p:cNvPr id="14" name="TextBox 13"/>
           <p:cNvSpPr txBox="1"/>
           <p:nvPr/>
         </p:nvSpPr>
         <p:spPr>
           <a:xfrm>
-            <a:off x="11430000" y="6400800"/>
-            <a:ext cx="457200" cy="274320"/>
+            <a:off x="548640" y="6126480"/>
+            <a:ext cx="10972800" cy="365760"/>
           </a:xfrm>
           <a:prstGeom prst="rect">
             <a:avLst/>
@@ -9782,8 +9345,44 @@
           </a:bodyPr>
           <a:lstStyle/>
           <a:p>
+            <a:pPr algn="l">
+              <a:defRPr sz="1400" b="0" i="1">
+                <a:solidFill>
+                  <a:srgbClr val="9CA3B4"/>
+                </a:solidFill>
+                <a:latin typeface="Arial"/>
+              </a:defRPr>
+            </a:pPr>
+            <a:r>
+              <a:t>Today: build the comms and scheduling system using a different approach.</a:t>
+            </a:r>
+          </a:p>
+        </p:txBody>
+      </p:sp>
+      <p:sp>
+        <p:nvSpPr>
+          <p:cNvPr id="15" name="TextBox 14"/>
+          <p:cNvSpPr txBox="1"/>
+          <p:nvPr/>
+        </p:nvSpPr>
+        <p:spPr>
+          <a:xfrm>
+            <a:off x="11430000" y="6446520"/>
+            <a:ext cx="457200" cy="274320"/>
+          </a:xfrm>
+          <a:prstGeom prst="rect">
+            <a:avLst/>
+          </a:prstGeom>
+          <a:noFill/>
+        </p:spPr>
+        <p:txBody>
+          <a:bodyPr wrap="square">
+            <a:spAutoFit/>
+          </a:bodyPr>
+          <a:lstStyle/>
+          <a:p>
             <a:pPr algn="r">
-              <a:defRPr sz="1200" b="0" i="0">
+              <a:defRPr sz="1100" b="0" i="0">
                 <a:solidFill>
                   <a:srgbClr val="9CA3B4"/>
                 </a:solidFill>
@@ -9873,8 +9472,8 @@
         </p:nvSpPr>
         <p:spPr>
           <a:xfrm>
-            <a:off x="548640" y="457200"/>
-            <a:ext cx="10972800" cy="914400"/>
+            <a:off x="548640" y="365760"/>
+            <a:ext cx="10972800" cy="822960"/>
           </a:xfrm>
           <a:prstGeom prst="rect">
             <a:avLst/>
@@ -9888,7 +9487,7 @@
           <a:lstStyle/>
           <a:p>
             <a:pPr algn="l">
-              <a:defRPr sz="3400" b="1" i="0">
+              <a:defRPr sz="3200" b="1" i="0">
                 <a:solidFill>
                   <a:srgbClr val="E8ECF4"/>
                 </a:solidFill>
@@ -9909,7 +9508,7 @@
         </p:nvSpPr>
         <p:spPr>
           <a:xfrm>
-            <a:off x="548640" y="1325880"/>
+            <a:off x="548640" y="1207008"/>
             <a:ext cx="2286000" cy="54864"/>
           </a:xfrm>
           <a:prstGeom prst="rect">
@@ -9946,13 +9545,49 @@
       </p:sp>
       <p:sp>
         <p:nvSpPr>
-          <p:cNvPr id="5" name="Rectangle 4"/>
+          <p:cNvPr id="5" name="TextBox 4"/>
+          <p:cNvSpPr txBox="1"/>
+          <p:nvPr/>
+        </p:nvSpPr>
+        <p:spPr>
+          <a:xfrm>
+            <a:off x="548640" y="1508760"/>
+            <a:ext cx="10972800" cy="640080"/>
+          </a:xfrm>
+          <a:prstGeom prst="rect">
+            <a:avLst/>
+          </a:prstGeom>
+          <a:noFill/>
+        </p:spPr>
+        <p:txBody>
+          <a:bodyPr wrap="square">
+            <a:spAutoFit/>
+          </a:bodyPr>
+          <a:lstStyle/>
+          <a:p>
+            <a:pPr algn="l">
+              <a:defRPr sz="1900" b="0" i="1">
+                <a:solidFill>
+                  <a:srgbClr val="9CA3B4"/>
+                </a:solidFill>
+                <a:latin typeface="Arial"/>
+              </a:defRPr>
+            </a:pPr>
+            <a:r>
+              <a:t>You should have:</a:t>
+            </a:r>
+          </a:p>
+        </p:txBody>
+      </p:sp>
+      <p:sp>
+        <p:nvSpPr>
+          <p:cNvPr id="6" name="Rectangle 5"/>
           <p:cNvSpPr/>
           <p:nvPr/>
         </p:nvSpPr>
         <p:spPr>
           <a:xfrm>
-            <a:off x="548640" y="1965960"/>
+            <a:off x="548640" y="2450592"/>
             <a:ext cx="109728" cy="109728"/>
           </a:xfrm>
           <a:prstGeom prst="rect">
@@ -9989,14 +9624,14 @@
       </p:sp>
       <p:sp>
         <p:nvSpPr>
-          <p:cNvPr id="6" name="TextBox 5"/>
+          <p:cNvPr id="7" name="TextBox 6"/>
           <p:cNvSpPr txBox="1"/>
           <p:nvPr/>
         </p:nvSpPr>
         <p:spPr>
           <a:xfrm>
-            <a:off x="914400" y="1828800"/>
-            <a:ext cx="10515600" cy="877824"/>
+            <a:off x="914400" y="2286000"/>
+            <a:ext cx="10515600" cy="868680"/>
           </a:xfrm>
           <a:prstGeom prst="rect">
             <a:avLst/>
@@ -10010,7 +9645,7 @@
           <a:lstStyle/>
           <a:p>
             <a:pPr algn="l">
-              <a:defRPr sz="2000" b="0" i="0">
+              <a:defRPr sz="1800" b="0" i="0">
                 <a:solidFill>
                   <a:srgbClr val="E8ECF4"/>
                 </a:solidFill>
@@ -10025,13 +9660,13 @@
       </p:sp>
       <p:sp>
         <p:nvSpPr>
-          <p:cNvPr id="7" name="Rectangle 6"/>
+          <p:cNvPr id="8" name="Rectangle 7"/>
           <p:cNvSpPr/>
           <p:nvPr/>
         </p:nvSpPr>
         <p:spPr>
           <a:xfrm>
-            <a:off x="548640" y="2980944"/>
+            <a:off x="548640" y="3364992"/>
             <a:ext cx="109728" cy="109728"/>
           </a:xfrm>
           <a:prstGeom prst="rect">
@@ -10068,14 +9703,14 @@
       </p:sp>
       <p:sp>
         <p:nvSpPr>
-          <p:cNvPr id="8" name="TextBox 7"/>
+          <p:cNvPr id="9" name="TextBox 8"/>
           <p:cNvSpPr txBox="1"/>
           <p:nvPr/>
         </p:nvSpPr>
         <p:spPr>
           <a:xfrm>
-            <a:off x="914400" y="2843784"/>
-            <a:ext cx="10515600" cy="877824"/>
+            <a:off x="914400" y="3200400"/>
+            <a:ext cx="10515600" cy="868680"/>
           </a:xfrm>
           <a:prstGeom prst="rect">
             <a:avLst/>
@@ -10089,7 +9724,7 @@
           <a:lstStyle/>
           <a:p>
             <a:pPr algn="l">
-              <a:defRPr sz="2000" b="0" i="0">
+              <a:defRPr sz="1800" b="0" i="0">
                 <a:solidFill>
                   <a:srgbClr val="E8ECF4"/>
                 </a:solidFill>
@@ -10097,20 +9732,20 @@
               </a:defRPr>
             </a:pPr>
             <a:r>
-              <a:t>Generated PRP saved in PRPs/</a:t>
-            </a:r>
-          </a:p>
-        </p:txBody>
-      </p:sp>
-      <p:sp>
-        <p:nvSpPr>
-          <p:cNvPr id="9" name="Rectangle 8"/>
+              <a:t>Generated PRP in PRPs/</a:t>
+            </a:r>
+          </a:p>
+        </p:txBody>
+      </p:sp>
+      <p:sp>
+        <p:nvSpPr>
+          <p:cNvPr id="10" name="Rectangle 9"/>
           <p:cNvSpPr/>
           <p:nvPr/>
         </p:nvSpPr>
         <p:spPr>
           <a:xfrm>
-            <a:off x="548640" y="3995928"/>
+            <a:off x="548640" y="4279392"/>
             <a:ext cx="109728" cy="109728"/>
           </a:xfrm>
           <a:prstGeom prst="rect">
@@ -10147,14 +9782,14 @@
       </p:sp>
       <p:sp>
         <p:nvSpPr>
-          <p:cNvPr id="10" name="TextBox 9"/>
+          <p:cNvPr id="11" name="TextBox 10"/>
           <p:cNvSpPr txBox="1"/>
           <p:nvPr/>
         </p:nvSpPr>
         <p:spPr>
           <a:xfrm>
-            <a:off x="914400" y="3858768"/>
-            <a:ext cx="10515600" cy="877824"/>
+            <a:off x="914400" y="4114800"/>
+            <a:ext cx="10515600" cy="868680"/>
           </a:xfrm>
           <a:prstGeom prst="rect">
             <a:avLst/>
@@ -10168,7 +9803,7 @@
           <a:lstStyle/>
           <a:p>
             <a:pPr algn="l">
-              <a:defRPr sz="2000" b="0" i="0">
+              <a:defRPr sz="1800" b="0" i="0">
                 <a:solidFill>
                   <a:srgbClr val="E8ECF4"/>
                 </a:solidFill>
@@ -10183,13 +9818,13 @@
       </p:sp>
       <p:sp>
         <p:nvSpPr>
-          <p:cNvPr id="11" name="Rectangle 10"/>
+          <p:cNvPr id="12" name="Rectangle 11"/>
           <p:cNvSpPr/>
           <p:nvPr/>
         </p:nvSpPr>
         <p:spPr>
           <a:xfrm>
-            <a:off x="548640" y="5010912"/>
+            <a:off x="548640" y="5193792"/>
             <a:ext cx="109728" cy="109728"/>
           </a:xfrm>
           <a:prstGeom prst="rect">
@@ -10226,14 +9861,14 @@
       </p:sp>
       <p:sp>
         <p:nvSpPr>
-          <p:cNvPr id="12" name="TextBox 11"/>
+          <p:cNvPr id="13" name="TextBox 12"/>
           <p:cNvSpPr txBox="1"/>
           <p:nvPr/>
         </p:nvSpPr>
         <p:spPr>
           <a:xfrm>
-            <a:off x="914400" y="4873752"/>
-            <a:ext cx="10515600" cy="877824"/>
+            <a:off x="914400" y="5029200"/>
+            <a:ext cx="10515600" cy="868680"/>
           </a:xfrm>
           <a:prstGeom prst="rect">
             <a:avLst/>
@@ -10247,7 +9882,7 @@
           <a:lstStyle/>
           <a:p>
             <a:pPr algn="l">
-              <a:defRPr sz="2000" b="0" i="0">
+              <a:defRPr sz="1800" b="0" i="0">
                 <a:solidFill>
                   <a:srgbClr val="E8ECF4"/>
                 </a:solidFill>
@@ -10255,30 +9890,32 @@
               </a:defRPr>
             </a:pPr>
             <a:r>
-              <a:t>All commands consume JSON from the previous step</a:t>
-            </a:r>
-          </a:p>
-        </p:txBody>
-      </p:sp>
-      <p:sp>
-        <p:nvSpPr>
-          <p:cNvPr id="13" name="Rectangle 12"/>
+              <a:t>All commands consuming JSON from previous steps</a:t>
+            </a:r>
+          </a:p>
+        </p:txBody>
+      </p:sp>
+      <p:sp>
+        <p:nvSpPr>
+          <p:cNvPr id="14" name="Rounded Rectangle 13"/>
           <p:cNvSpPr/>
           <p:nvPr/>
         </p:nvSpPr>
         <p:spPr>
           <a:xfrm>
-            <a:off x="548640" y="6025896"/>
-            <a:ext cx="109728" cy="109728"/>
-          </a:xfrm>
-          <a:prstGeom prst="rect">
-            <a:avLst/>
-          </a:prstGeom>
-          <a:solidFill>
-            <a:srgbClr val="E8853D"/>
+            <a:off x="548640" y="6035040"/>
+            <a:ext cx="10972800" cy="640080"/>
+          </a:xfrm>
+          <a:prstGeom prst="roundRect">
+            <a:avLst/>
+          </a:prstGeom>
+          <a:solidFill>
+            <a:srgbClr val="0A0D12"/>
           </a:solidFill>
           <a:ln>
-            <a:noFill/>
+            <a:solidFill>
+              <a:srgbClr val="313244"/>
+            </a:solidFill>
           </a:ln>
         </p:spPr>
         <p:style>
@@ -10305,14 +9942,14 @@
       </p:sp>
       <p:sp>
         <p:nvSpPr>
-          <p:cNvPr id="14" name="TextBox 13"/>
+          <p:cNvPr id="15" name="TextBox 14"/>
           <p:cNvSpPr txBox="1"/>
           <p:nvPr/>
         </p:nvSpPr>
         <p:spPr>
           <a:xfrm>
-            <a:off x="914400" y="5888736"/>
-            <a:ext cx="10515600" cy="877824"/>
+            <a:off x="777240" y="6144768"/>
+            <a:ext cx="10515600" cy="457200"/>
           </a:xfrm>
           <a:prstGeom prst="rect">
             <a:avLst/>
@@ -10326,28 +9963,28 @@
           <a:lstStyle/>
           <a:p>
             <a:pPr algn="l">
-              <a:defRPr sz="2000" b="0" i="0">
+              <a:defRPr sz="1400" b="0" i="0">
                 <a:solidFill>
                   <a:srgbClr val="E8ECF4"/>
                 </a:solidFill>
-                <a:latin typeface="Arial"/>
+                <a:latin typeface="Courier New"/>
               </a:defRPr>
             </a:pPr>
             <a:r>
-              <a:t>Pipeline runs end-to-end on a fresh topic</a:t>
-            </a:r>
-          </a:p>
-        </p:txBody>
-      </p:sp>
-      <p:sp>
-        <p:nvSpPr>
-          <p:cNvPr id="15" name="TextBox 14"/>
+              <a:t>Quick test:   /plan-event "Topic"  --&gt;  /build-schedule  --&gt;  /draft-announcement</a:t>
+            </a:r>
+          </a:p>
+        </p:txBody>
+      </p:sp>
+      <p:sp>
+        <p:nvSpPr>
+          <p:cNvPr id="16" name="TextBox 15"/>
           <p:cNvSpPr txBox="1"/>
           <p:nvPr/>
         </p:nvSpPr>
         <p:spPr>
           <a:xfrm>
-            <a:off x="11430000" y="6400800"/>
+            <a:off x="11430000" y="6446520"/>
             <a:ext cx="457200" cy="274320"/>
           </a:xfrm>
           <a:prstGeom prst="rect">
@@ -10362,7 +9999,7 @@
           <a:lstStyle/>
           <a:p>
             <a:pPr algn="r">
-              <a:defRPr sz="1200" b="0" i="0">
+              <a:defRPr sz="1100" b="0" i="0">
                 <a:solidFill>
                   <a:srgbClr val="9CA3B4"/>
                 </a:solidFill>
@@ -10410,7 +10047,7 @@
         <p:spPr>
           <a:xfrm>
             <a:off x="0" y="0"/>
-            <a:ext cx="12191695" cy="137160"/>
+            <a:ext cx="73152" cy="6858000"/>
           </a:xfrm>
           <a:prstGeom prst="rect">
             <a:avLst/>
@@ -10452,8 +10089,8 @@
         </p:nvSpPr>
         <p:spPr>
           <a:xfrm>
-            <a:off x="685800" y="2377440"/>
-            <a:ext cx="10817352" cy="1463040"/>
+            <a:off x="548640" y="365760"/>
+            <a:ext cx="10972800" cy="822960"/>
           </a:xfrm>
           <a:prstGeom prst="rect">
             <a:avLst/>
@@ -10466,8 +10103,8 @@
           </a:bodyPr>
           <a:lstStyle/>
           <a:p>
-            <a:pPr algn="ctr">
-              <a:defRPr sz="4800" b="1" i="0">
+            <a:pPr algn="l">
+              <a:defRPr sz="3200" b="1" i="0">
                 <a:solidFill>
                   <a:srgbClr val="E8ECF4"/>
                 </a:solidFill>
@@ -10475,21 +10112,64 @@
               </a:defRPr>
             </a:pPr>
             <a:r>
-              <a:t>Session 3 — Subagents &amp; Hooks</a:t>
-            </a:r>
-          </a:p>
-        </p:txBody>
-      </p:sp>
-      <p:sp>
-        <p:nvSpPr>
-          <p:cNvPr id="4" name="TextBox 3"/>
+              <a:t>What's Next — Session 3</a:t>
+            </a:r>
+          </a:p>
+        </p:txBody>
+      </p:sp>
+      <p:sp>
+        <p:nvSpPr>
+          <p:cNvPr id="4" name="Rectangle 3"/>
+          <p:cNvSpPr/>
+          <p:nvPr/>
+        </p:nvSpPr>
+        <p:spPr>
+          <a:xfrm>
+            <a:off x="548640" y="1207008"/>
+            <a:ext cx="2286000" cy="54864"/>
+          </a:xfrm>
+          <a:prstGeom prst="rect">
+            <a:avLst/>
+          </a:prstGeom>
+          <a:solidFill>
+            <a:srgbClr val="5B9CF5"/>
+          </a:solidFill>
+          <a:ln>
+            <a:noFill/>
+          </a:ln>
+        </p:spPr>
+        <p:style>
+          <a:lnRef idx="1">
+            <a:schemeClr val="accent1"/>
+          </a:lnRef>
+          <a:fillRef idx="3">
+            <a:schemeClr val="accent1"/>
+          </a:fillRef>
+          <a:effectRef idx="2">
+            <a:schemeClr val="accent1"/>
+          </a:effectRef>
+          <a:fontRef idx="minor">
+            <a:schemeClr val="lt1"/>
+          </a:fontRef>
+        </p:style>
+        <p:txBody>
+          <a:bodyPr rtlCol="0" anchor="ctr"/>
+          <a:lstStyle/>
+          <a:p>
+            <a:pPr algn="ctr"/>
+          </a:p>
+        </p:txBody>
+      </p:sp>
+      <p:sp>
+        <p:nvSpPr>
+          <p:cNvPr id="5" name="TextBox 4"/>
           <p:cNvSpPr txBox="1"/>
           <p:nvPr/>
         </p:nvSpPr>
         <p:spPr>
           <a:xfrm>
-            <a:off x="1371600" y="3840480"/>
-            <a:ext cx="9445752" cy="822960"/>
+            <a:off x="548640" y="1508760"/>
+            <a:ext cx="10972800" cy="640080"/>
           </a:xfrm>
           <a:prstGeom prst="rect">
             <a:avLst/>
@@ -10502,8 +10182,8 @@
           </a:bodyPr>
           <a:lstStyle/>
           <a:p>
-            <a:pPr algn="ctr">
-              <a:defRPr sz="2200" b="0" i="0">
+            <a:pPr algn="l">
+              <a:defRPr sz="1900" b="0" i="1">
                 <a:solidFill>
                   <a:srgbClr val="9CA3B4"/>
                 </a:solidFill>
@@ -10511,7 +10191,237 @@
               </a:defRPr>
             </a:pPr>
             <a:r>
-              <a:t>Specialists beat generalists. From solo performer to coordinated team.</a:t>
+              <a:t>Subagents &amp; Hooks</a:t>
+            </a:r>
+          </a:p>
+        </p:txBody>
+      </p:sp>
+      <p:sp>
+        <p:nvSpPr>
+          <p:cNvPr id="6" name="Rectangle 5"/>
+          <p:cNvSpPr/>
+          <p:nvPr/>
+        </p:nvSpPr>
+        <p:spPr>
+          <a:xfrm>
+            <a:off x="548640" y="2450592"/>
+            <a:ext cx="109728" cy="109728"/>
+          </a:xfrm>
+          <a:prstGeom prst="rect">
+            <a:avLst/>
+          </a:prstGeom>
+          <a:solidFill>
+            <a:srgbClr val="E8853D"/>
+          </a:solidFill>
+          <a:ln>
+            <a:noFill/>
+          </a:ln>
+        </p:spPr>
+        <p:style>
+          <a:lnRef idx="1">
+            <a:schemeClr val="accent1"/>
+          </a:lnRef>
+          <a:fillRef idx="3">
+            <a:schemeClr val="accent1"/>
+          </a:fillRef>
+          <a:effectRef idx="2">
+            <a:schemeClr val="accent1"/>
+          </a:effectRef>
+          <a:fontRef idx="minor">
+            <a:schemeClr val="lt1"/>
+          </a:fontRef>
+        </p:style>
+        <p:txBody>
+          <a:bodyPr rtlCol="0" anchor="ctr"/>
+          <a:lstStyle/>
+          <a:p>
+            <a:pPr algn="ctr"/>
+          </a:p>
+        </p:txBody>
+      </p:sp>
+      <p:sp>
+        <p:nvSpPr>
+          <p:cNvPr id="7" name="TextBox 6"/>
+          <p:cNvSpPr txBox="1"/>
+          <p:nvPr/>
+        </p:nvSpPr>
+        <p:spPr>
+          <a:xfrm>
+            <a:off x="914400" y="2286000"/>
+            <a:ext cx="10515600" cy="868680"/>
+          </a:xfrm>
+          <a:prstGeom prst="rect">
+            <a:avLst/>
+          </a:prstGeom>
+          <a:noFill/>
+        </p:spPr>
+        <p:txBody>
+          <a:bodyPr wrap="square">
+            <a:spAutoFit/>
+          </a:bodyPr>
+          <a:lstStyle/>
+          <a:p>
+            <a:pPr algn="l">
+              <a:defRPr sz="1800" b="0" i="0">
+                <a:solidFill>
+                  <a:srgbClr val="E8ECF4"/>
+                </a:solidFill>
+                <a:latin typeface="Arial"/>
+              </a:defRPr>
+            </a:pPr>
+            <a:r>
+              <a:t>Subagents — split into specialists (schedule optimizer, comms reviewer, quality checker)</a:t>
+            </a:r>
+          </a:p>
+        </p:txBody>
+      </p:sp>
+      <p:sp>
+        <p:nvSpPr>
+          <p:cNvPr id="8" name="Rectangle 7"/>
+          <p:cNvSpPr/>
+          <p:nvPr/>
+        </p:nvSpPr>
+        <p:spPr>
+          <a:xfrm>
+            <a:off x="548640" y="3364992"/>
+            <a:ext cx="109728" cy="109728"/>
+          </a:xfrm>
+          <a:prstGeom prst="rect">
+            <a:avLst/>
+          </a:prstGeom>
+          <a:solidFill>
+            <a:srgbClr val="E8853D"/>
+          </a:solidFill>
+          <a:ln>
+            <a:noFill/>
+          </a:ln>
+        </p:spPr>
+        <p:style>
+          <a:lnRef idx="1">
+            <a:schemeClr val="accent1"/>
+          </a:lnRef>
+          <a:fillRef idx="3">
+            <a:schemeClr val="accent1"/>
+          </a:fillRef>
+          <a:effectRef idx="2">
+            <a:schemeClr val="accent1"/>
+          </a:effectRef>
+          <a:fontRef idx="minor">
+            <a:schemeClr val="lt1"/>
+          </a:fontRef>
+        </p:style>
+        <p:txBody>
+          <a:bodyPr rtlCol="0" anchor="ctr"/>
+          <a:lstStyle/>
+          <a:p>
+            <a:pPr algn="ctr"/>
+          </a:p>
+        </p:txBody>
+      </p:sp>
+      <p:sp>
+        <p:nvSpPr>
+          <p:cNvPr id="9" name="TextBox 8"/>
+          <p:cNvSpPr txBox="1"/>
+          <p:nvPr/>
+        </p:nvSpPr>
+        <p:spPr>
+          <a:xfrm>
+            <a:off x="914400" y="3200400"/>
+            <a:ext cx="10515600" cy="868680"/>
+          </a:xfrm>
+          <a:prstGeom prst="rect">
+            <a:avLst/>
+          </a:prstGeom>
+          <a:noFill/>
+        </p:spPr>
+        <p:txBody>
+          <a:bodyPr wrap="square">
+            <a:spAutoFit/>
+          </a:bodyPr>
+          <a:lstStyle/>
+          <a:p>
+            <a:pPr algn="l">
+              <a:defRPr sz="1800" b="0" i="0">
+                <a:solidFill>
+                  <a:srgbClr val="E8ECF4"/>
+                </a:solidFill>
+                <a:latin typeface="Arial"/>
+              </a:defRPr>
+            </a:pPr>
+            <a:r>
+              <a:t>Hooks — automate checks that run on every command</a:t>
+            </a:r>
+          </a:p>
+        </p:txBody>
+      </p:sp>
+      <p:sp>
+        <p:nvSpPr>
+          <p:cNvPr id="10" name="TextBox 9"/>
+          <p:cNvSpPr txBox="1"/>
+          <p:nvPr/>
+        </p:nvSpPr>
+        <p:spPr>
+          <a:xfrm>
+            <a:off x="548640" y="6126480"/>
+            <a:ext cx="10972800" cy="365760"/>
+          </a:xfrm>
+          <a:prstGeom prst="rect">
+            <a:avLst/>
+          </a:prstGeom>
+          <a:noFill/>
+        </p:spPr>
+        <p:txBody>
+          <a:bodyPr wrap="square">
+            <a:spAutoFit/>
+          </a:bodyPr>
+          <a:lstStyle/>
+          <a:p>
+            <a:pPr algn="l">
+              <a:defRPr sz="1400" b="0" i="1">
+                <a:solidFill>
+                  <a:srgbClr val="9CA3B4"/>
+                </a:solidFill>
+                <a:latin typeface="Arial"/>
+              </a:defRPr>
+            </a:pPr>
+            <a:r>
+              <a:t>Right now, one agent does everything. Next session: a coordinated team.</a:t>
+            </a:r>
+          </a:p>
+        </p:txBody>
+      </p:sp>
+      <p:sp>
+        <p:nvSpPr>
+          <p:cNvPr id="11" name="TextBox 10"/>
+          <p:cNvSpPr txBox="1"/>
+          <p:nvPr/>
+        </p:nvSpPr>
+        <p:spPr>
+          <a:xfrm>
+            <a:off x="11430000" y="6446520"/>
+            <a:ext cx="457200" cy="274320"/>
+          </a:xfrm>
+          <a:prstGeom prst="rect">
+            <a:avLst/>
+          </a:prstGeom>
+          <a:noFill/>
+        </p:spPr>
+        <p:txBody>
+          <a:bodyPr wrap="square">
+            <a:spAutoFit/>
+          </a:bodyPr>
+          <a:lstStyle/>
+          <a:p>
+            <a:pPr algn="r">
+              <a:defRPr sz="1100" b="0" i="0">
+                <a:solidFill>
+                  <a:srgbClr val="9CA3B4"/>
+                </a:solidFill>
+                <a:latin typeface="Arial"/>
+              </a:defRPr>
+            </a:pPr>
+            <a:r>
+              <a:t>21</a:t>
             </a:r>
           </a:p>
         </p:txBody>
@@ -10593,8 +10503,8 @@
         </p:nvSpPr>
         <p:spPr>
           <a:xfrm>
-            <a:off x="457200" y="365760"/>
-            <a:ext cx="10972800" cy="914400"/>
+            <a:off x="548640" y="365760"/>
+            <a:ext cx="10972800" cy="822960"/>
           </a:xfrm>
           <a:prstGeom prst="rect">
             <a:avLst/>
@@ -10608,7 +10518,7 @@
           <a:lstStyle/>
           <a:p>
             <a:pPr algn="l">
-              <a:defRPr sz="3400" b="1" i="0">
+              <a:defRPr sz="3200" b="1" i="0">
                 <a:solidFill>
                   <a:srgbClr val="E8ECF4"/>
                 </a:solidFill>
@@ -10616,7 +10526,7 @@
               </a:defRPr>
             </a:pPr>
             <a:r>
-              <a:t>Three Takeaways</a:t>
+              <a:t>Recap</a:t>
             </a:r>
           </a:p>
         </p:txBody>
@@ -10629,14 +10539,14 @@
         </p:nvSpPr>
         <p:spPr>
           <a:xfrm>
-            <a:off x="457200" y="1234440"/>
+            <a:off x="548640" y="1207008"/>
             <a:ext cx="2286000" cy="54864"/>
           </a:xfrm>
           <a:prstGeom prst="rect">
             <a:avLst/>
           </a:prstGeom>
           <a:solidFill>
-            <a:srgbClr val="E8853D"/>
+            <a:srgbClr val="5B9CF5"/>
           </a:solidFill>
           <a:ln>
             <a:noFill/>
@@ -10666,20 +10576,20 @@
       </p:sp>
       <p:sp>
         <p:nvSpPr>
-          <p:cNvPr id="5" name="Rounded Rectangle 4"/>
+          <p:cNvPr id="5" name="Rectangle 4"/>
           <p:cNvSpPr/>
           <p:nvPr/>
         </p:nvSpPr>
         <p:spPr>
           <a:xfrm>
-            <a:off x="457200" y="1645920"/>
-            <a:ext cx="3576218" cy="4206240"/>
-          </a:xfrm>
-          <a:prstGeom prst="roundRect">
-            <a:avLst/>
-          </a:prstGeom>
-          <a:solidFill>
-            <a:srgbClr val="1A2030"/>
+            <a:off x="548640" y="1673351"/>
+            <a:ext cx="109728" cy="109728"/>
+          </a:xfrm>
+          <a:prstGeom prst="rect">
+            <a:avLst/>
+          </a:prstGeom>
+          <a:solidFill>
+            <a:srgbClr val="E8853D"/>
           </a:solidFill>
           <a:ln>
             <a:noFill/>
@@ -10709,14 +10619,50 @@
       </p:sp>
       <p:sp>
         <p:nvSpPr>
-          <p:cNvPr id="6" name="Rectangle 5"/>
+          <p:cNvPr id="6" name="TextBox 5"/>
+          <p:cNvSpPr txBox="1"/>
+          <p:nvPr/>
+        </p:nvSpPr>
+        <p:spPr>
+          <a:xfrm>
+            <a:off x="914400" y="1508760"/>
+            <a:ext cx="10515600" cy="868680"/>
+          </a:xfrm>
+          <a:prstGeom prst="rect">
+            <a:avLst/>
+          </a:prstGeom>
+          <a:noFill/>
+        </p:spPr>
+        <p:txBody>
+          <a:bodyPr wrap="square">
+            <a:spAutoFit/>
+          </a:bodyPr>
+          <a:lstStyle/>
+          <a:p>
+            <a:pPr algn="l">
+              <a:defRPr sz="1800" b="0" i="0">
+                <a:solidFill>
+                  <a:srgbClr val="E8ECF4"/>
+                </a:solidFill>
+                <a:latin typeface="Arial"/>
+              </a:defRPr>
+            </a:pPr>
+            <a:r>
+              <a:t>Context engineering &gt; prompt engineering — give the AI everything it needs</a:t>
+            </a:r>
+          </a:p>
+        </p:txBody>
+      </p:sp>
+      <p:sp>
+        <p:nvSpPr>
+          <p:cNvPr id="7" name="Rectangle 6"/>
           <p:cNvSpPr/>
           <p:nvPr/>
         </p:nvSpPr>
         <p:spPr>
           <a:xfrm>
-            <a:off x="457200" y="1645920"/>
-            <a:ext cx="3576218" cy="91440"/>
+            <a:off x="548640" y="2587752"/>
+            <a:ext cx="109728" cy="109728"/>
           </a:xfrm>
           <a:prstGeom prst="rect">
             <a:avLst/>
@@ -10752,14 +10698,14 @@
       </p:sp>
       <p:sp>
         <p:nvSpPr>
-          <p:cNvPr id="7" name="TextBox 6"/>
+          <p:cNvPr id="8" name="TextBox 7"/>
           <p:cNvSpPr txBox="1"/>
           <p:nvPr/>
         </p:nvSpPr>
         <p:spPr>
           <a:xfrm>
-            <a:off x="640080" y="1920240"/>
-            <a:ext cx="731520" cy="548640"/>
+            <a:off x="914400" y="2423160"/>
+            <a:ext cx="10515600" cy="868680"/>
           </a:xfrm>
           <a:prstGeom prst="rect">
             <a:avLst/>
@@ -10773,107 +10719,35 @@
           <a:lstStyle/>
           <a:p>
             <a:pPr algn="l">
-              <a:defRPr sz="2200" b="1" i="0">
-                <a:solidFill>
-                  <a:srgbClr val="E8853D"/>
+              <a:defRPr sz="1800" b="0" i="0">
+                <a:solidFill>
+                  <a:srgbClr val="E8ECF4"/>
                 </a:solidFill>
                 <a:latin typeface="Arial"/>
               </a:defRPr>
             </a:pPr>
             <a:r>
-              <a:t>01</a:t>
-            </a:r>
-          </a:p>
-        </p:txBody>
-      </p:sp>
-      <p:sp>
-        <p:nvSpPr>
-          <p:cNvPr id="8" name="TextBox 7"/>
-          <p:cNvSpPr txBox="1"/>
-          <p:nvPr/>
-        </p:nvSpPr>
-        <p:spPr>
-          <a:xfrm>
-            <a:off x="640080" y="2560320"/>
-            <a:ext cx="3210458" cy="1097280"/>
-          </a:xfrm>
-          <a:prstGeom prst="rect">
-            <a:avLst/>
-          </a:prstGeom>
-          <a:noFill/>
-        </p:spPr>
-        <p:txBody>
-          <a:bodyPr wrap="square">
-            <a:spAutoFit/>
-          </a:bodyPr>
-          <a:lstStyle/>
-          <a:p>
-            <a:pPr algn="l">
-              <a:defRPr sz="1800" b="1" i="0">
-                <a:solidFill>
-                  <a:srgbClr val="E8ECF4"/>
-                </a:solidFill>
-                <a:latin typeface="Arial"/>
-              </a:defRPr>
-            </a:pPr>
-            <a:r>
-              <a:t>Context Wins</a:t>
-            </a:r>
-          </a:p>
-        </p:txBody>
-      </p:sp>
-      <p:sp>
-        <p:nvSpPr>
-          <p:cNvPr id="9" name="TextBox 8"/>
-          <p:cNvSpPr txBox="1"/>
-          <p:nvPr/>
-        </p:nvSpPr>
-        <p:spPr>
-          <a:xfrm>
-            <a:off x="640080" y="3749039"/>
-            <a:ext cx="3210458" cy="2011680"/>
-          </a:xfrm>
-          <a:prstGeom prst="rect">
-            <a:avLst/>
-          </a:prstGeom>
-          <a:noFill/>
-        </p:spPr>
-        <p:txBody>
-          <a:bodyPr wrap="square">
-            <a:spAutoFit/>
-          </a:bodyPr>
-          <a:lstStyle/>
-          <a:p>
-            <a:pPr algn="l">
-              <a:defRPr sz="1400" b="0" i="0">
-                <a:solidFill>
-                  <a:srgbClr val="9CA3B4"/>
-                </a:solidFill>
-                <a:latin typeface="Arial"/>
-              </a:defRPr>
-            </a:pPr>
-            <a:r>
-              <a:t>Complete blueprints beat clever wording. Give the AI everything it needs.</a:t>
-            </a:r>
-          </a:p>
-        </p:txBody>
-      </p:sp>
-      <p:sp>
-        <p:nvSpPr>
-          <p:cNvPr id="10" name="Rounded Rectangle 9"/>
+              <a:t>INITIAL.md → PRP → Execute — describe WHAT, generate HOW, execute</a:t>
+            </a:r>
+          </a:p>
+        </p:txBody>
+      </p:sp>
+      <p:sp>
+        <p:nvSpPr>
+          <p:cNvPr id="9" name="Rectangle 8"/>
           <p:cNvSpPr/>
           <p:nvPr/>
         </p:nvSpPr>
         <p:spPr>
           <a:xfrm>
-            <a:off x="4307738" y="1645920"/>
-            <a:ext cx="3576218" cy="4206240"/>
-          </a:xfrm>
-          <a:prstGeom prst="roundRect">
-            <a:avLst/>
-          </a:prstGeom>
-          <a:solidFill>
-            <a:srgbClr val="1A2030"/>
+            <a:off x="548640" y="3502152"/>
+            <a:ext cx="109728" cy="109728"/>
+          </a:xfrm>
+          <a:prstGeom prst="rect">
+            <a:avLst/>
+          </a:prstGeom>
+          <a:solidFill>
+            <a:srgbClr val="E8853D"/>
           </a:solidFill>
           <a:ln>
             <a:noFill/>
@@ -10903,57 +10777,14 @@
       </p:sp>
       <p:sp>
         <p:nvSpPr>
-          <p:cNvPr id="11" name="Rectangle 10"/>
-          <p:cNvSpPr/>
-          <p:nvPr/>
-        </p:nvSpPr>
-        <p:spPr>
-          <a:xfrm>
-            <a:off x="4307738" y="1645920"/>
-            <a:ext cx="3576218" cy="91440"/>
-          </a:xfrm>
-          <a:prstGeom prst="rect">
-            <a:avLst/>
-          </a:prstGeom>
-          <a:solidFill>
-            <a:srgbClr val="5B9CF5"/>
-          </a:solidFill>
-          <a:ln>
-            <a:noFill/>
-          </a:ln>
-        </p:spPr>
-        <p:style>
-          <a:lnRef idx="1">
-            <a:schemeClr val="accent1"/>
-          </a:lnRef>
-          <a:fillRef idx="3">
-            <a:schemeClr val="accent1"/>
-          </a:fillRef>
-          <a:effectRef idx="2">
-            <a:schemeClr val="accent1"/>
-          </a:effectRef>
-          <a:fontRef idx="minor">
-            <a:schemeClr val="lt1"/>
-          </a:fontRef>
-        </p:style>
-        <p:txBody>
-          <a:bodyPr rtlCol="0" anchor="ctr"/>
-          <a:lstStyle/>
-          <a:p>
-            <a:pPr algn="ctr"/>
-          </a:p>
-        </p:txBody>
-      </p:sp>
-      <p:sp>
-        <p:nvSpPr>
-          <p:cNvPr id="12" name="TextBox 11"/>
+          <p:cNvPr id="10" name="TextBox 9"/>
           <p:cNvSpPr txBox="1"/>
           <p:nvPr/>
         </p:nvSpPr>
         <p:spPr>
           <a:xfrm>
-            <a:off x="4490618" y="1920240"/>
-            <a:ext cx="731520" cy="548640"/>
+            <a:off x="914400" y="3337560"/>
+            <a:ext cx="10515600" cy="868680"/>
           </a:xfrm>
           <a:prstGeom prst="rect">
             <a:avLst/>
@@ -10967,29 +10798,29 @@
           <a:lstStyle/>
           <a:p>
             <a:pPr algn="l">
-              <a:defRPr sz="2200" b="1" i="0">
-                <a:solidFill>
-                  <a:srgbClr val="5B9CF5"/>
+              <a:defRPr sz="1800" b="0" i="0">
+                <a:solidFill>
+                  <a:srgbClr val="E8ECF4"/>
                 </a:solidFill>
                 <a:latin typeface="Arial"/>
               </a:defRPr>
             </a:pPr>
             <a:r>
-              <a:t>02</a:t>
-            </a:r>
-          </a:p>
-        </p:txBody>
-      </p:sp>
-      <p:sp>
-        <p:nvSpPr>
-          <p:cNvPr id="13" name="TextBox 12"/>
+              <a:t>Composable commands via structured JSON — schemas enable data flow between commands</a:t>
+            </a:r>
+          </a:p>
+        </p:txBody>
+      </p:sp>
+      <p:sp>
+        <p:nvSpPr>
+          <p:cNvPr id="11" name="TextBox 10"/>
           <p:cNvSpPr txBox="1"/>
           <p:nvPr/>
         </p:nvSpPr>
         <p:spPr>
           <a:xfrm>
-            <a:off x="4490618" y="2560320"/>
-            <a:ext cx="3210458" cy="1097280"/>
+            <a:off x="11430000" y="6446520"/>
+            <a:ext cx="457200" cy="274320"/>
           </a:xfrm>
           <a:prstGeom prst="rect">
             <a:avLst/>
@@ -11002,274 +10833,8 @@
           </a:bodyPr>
           <a:lstStyle/>
           <a:p>
-            <a:pPr algn="l">
-              <a:defRPr sz="1800" b="1" i="0">
-                <a:solidFill>
-                  <a:srgbClr val="E8ECF4"/>
-                </a:solidFill>
-                <a:latin typeface="Arial"/>
-              </a:defRPr>
-            </a:pPr>
-            <a:r>
-              <a:t>INITIAL → PRP</a:t>
-            </a:r>
-          </a:p>
-        </p:txBody>
-      </p:sp>
-      <p:sp>
-        <p:nvSpPr>
-          <p:cNvPr id="14" name="TextBox 13"/>
-          <p:cNvSpPr txBox="1"/>
-          <p:nvPr/>
-        </p:nvSpPr>
-        <p:spPr>
-          <a:xfrm>
-            <a:off x="4490618" y="3749039"/>
-            <a:ext cx="3210458" cy="2011680"/>
-          </a:xfrm>
-          <a:prstGeom prst="rect">
-            <a:avLst/>
-          </a:prstGeom>
-          <a:noFill/>
-        </p:spPr>
-        <p:txBody>
-          <a:bodyPr wrap="square">
-            <a:spAutoFit/>
-          </a:bodyPr>
-          <a:lstStyle/>
-          <a:p>
-            <a:pPr algn="l">
-              <a:defRPr sz="1400" b="0" i="0">
-                <a:solidFill>
-                  <a:srgbClr val="9CA3B4"/>
-                </a:solidFill>
-                <a:latin typeface="Arial"/>
-              </a:defRPr>
-            </a:pPr>
-            <a:r>
-              <a:t>Describe WHAT you want. Generate HOW to build it. Execute the plan.</a:t>
-            </a:r>
-          </a:p>
-        </p:txBody>
-      </p:sp>
-      <p:sp>
-        <p:nvSpPr>
-          <p:cNvPr id="15" name="Rounded Rectangle 14"/>
-          <p:cNvSpPr/>
-          <p:nvPr/>
-        </p:nvSpPr>
-        <p:spPr>
-          <a:xfrm>
-            <a:off x="8158276" y="1645920"/>
-            <a:ext cx="3576218" cy="4206240"/>
-          </a:xfrm>
-          <a:prstGeom prst="roundRect">
-            <a:avLst/>
-          </a:prstGeom>
-          <a:solidFill>
-            <a:srgbClr val="1A2030"/>
-          </a:solidFill>
-          <a:ln>
-            <a:noFill/>
-          </a:ln>
-        </p:spPr>
-        <p:style>
-          <a:lnRef idx="1">
-            <a:schemeClr val="accent1"/>
-          </a:lnRef>
-          <a:fillRef idx="3">
-            <a:schemeClr val="accent1"/>
-          </a:fillRef>
-          <a:effectRef idx="2">
-            <a:schemeClr val="accent1"/>
-          </a:effectRef>
-          <a:fontRef idx="minor">
-            <a:schemeClr val="lt1"/>
-          </a:fontRef>
-        </p:style>
-        <p:txBody>
-          <a:bodyPr rtlCol="0" anchor="ctr"/>
-          <a:lstStyle/>
-          <a:p>
-            <a:pPr algn="ctr"/>
-          </a:p>
-        </p:txBody>
-      </p:sp>
-      <p:sp>
-        <p:nvSpPr>
-          <p:cNvPr id="16" name="Rectangle 15"/>
-          <p:cNvSpPr/>
-          <p:nvPr/>
-        </p:nvSpPr>
-        <p:spPr>
-          <a:xfrm>
-            <a:off x="8158276" y="1645920"/>
-            <a:ext cx="3576218" cy="91440"/>
-          </a:xfrm>
-          <a:prstGeom prst="rect">
-            <a:avLst/>
-          </a:prstGeom>
-          <a:solidFill>
-            <a:srgbClr val="56C495"/>
-          </a:solidFill>
-          <a:ln>
-            <a:noFill/>
-          </a:ln>
-        </p:spPr>
-        <p:style>
-          <a:lnRef idx="1">
-            <a:schemeClr val="accent1"/>
-          </a:lnRef>
-          <a:fillRef idx="3">
-            <a:schemeClr val="accent1"/>
-          </a:fillRef>
-          <a:effectRef idx="2">
-            <a:schemeClr val="accent1"/>
-          </a:effectRef>
-          <a:fontRef idx="minor">
-            <a:schemeClr val="lt1"/>
-          </a:fontRef>
-        </p:style>
-        <p:txBody>
-          <a:bodyPr rtlCol="0" anchor="ctr"/>
-          <a:lstStyle/>
-          <a:p>
-            <a:pPr algn="ctr"/>
-          </a:p>
-        </p:txBody>
-      </p:sp>
-      <p:sp>
-        <p:nvSpPr>
-          <p:cNvPr id="17" name="TextBox 16"/>
-          <p:cNvSpPr txBox="1"/>
-          <p:nvPr/>
-        </p:nvSpPr>
-        <p:spPr>
-          <a:xfrm>
-            <a:off x="8341156" y="1920240"/>
-            <a:ext cx="731520" cy="548640"/>
-          </a:xfrm>
-          <a:prstGeom prst="rect">
-            <a:avLst/>
-          </a:prstGeom>
-          <a:noFill/>
-        </p:spPr>
-        <p:txBody>
-          <a:bodyPr wrap="square">
-            <a:spAutoFit/>
-          </a:bodyPr>
-          <a:lstStyle/>
-          <a:p>
-            <a:pPr algn="l">
-              <a:defRPr sz="2200" b="1" i="0">
-                <a:solidFill>
-                  <a:srgbClr val="56C495"/>
-                </a:solidFill>
-                <a:latin typeface="Arial"/>
-              </a:defRPr>
-            </a:pPr>
-            <a:r>
-              <a:t>03</a:t>
-            </a:r>
-          </a:p>
-        </p:txBody>
-      </p:sp>
-      <p:sp>
-        <p:nvSpPr>
-          <p:cNvPr id="18" name="TextBox 17"/>
-          <p:cNvSpPr txBox="1"/>
-          <p:nvPr/>
-        </p:nvSpPr>
-        <p:spPr>
-          <a:xfrm>
-            <a:off x="8341156" y="2560320"/>
-            <a:ext cx="3210458" cy="1097280"/>
-          </a:xfrm>
-          <a:prstGeom prst="rect">
-            <a:avLst/>
-          </a:prstGeom>
-          <a:noFill/>
-        </p:spPr>
-        <p:txBody>
-          <a:bodyPr wrap="square">
-            <a:spAutoFit/>
-          </a:bodyPr>
-          <a:lstStyle/>
-          <a:p>
-            <a:pPr algn="l">
-              <a:defRPr sz="1800" b="1" i="0">
-                <a:solidFill>
-                  <a:srgbClr val="E8ECF4"/>
-                </a:solidFill>
-                <a:latin typeface="Arial"/>
-              </a:defRPr>
-            </a:pPr>
-            <a:r>
-              <a:t>Compose</a:t>
-            </a:r>
-          </a:p>
-        </p:txBody>
-      </p:sp>
-      <p:sp>
-        <p:nvSpPr>
-          <p:cNvPr id="19" name="TextBox 18"/>
-          <p:cNvSpPr txBox="1"/>
-          <p:nvPr/>
-        </p:nvSpPr>
-        <p:spPr>
-          <a:xfrm>
-            <a:off x="8341156" y="3749039"/>
-            <a:ext cx="3210458" cy="2011680"/>
-          </a:xfrm>
-          <a:prstGeom prst="rect">
-            <a:avLst/>
-          </a:prstGeom>
-          <a:noFill/>
-        </p:spPr>
-        <p:txBody>
-          <a:bodyPr wrap="square">
-            <a:spAutoFit/>
-          </a:bodyPr>
-          <a:lstStyle/>
-          <a:p>
-            <a:pPr algn="l">
-              <a:defRPr sz="1400" b="0" i="0">
-                <a:solidFill>
-                  <a:srgbClr val="9CA3B4"/>
-                </a:solidFill>
-                <a:latin typeface="Arial"/>
-              </a:defRPr>
-            </a:pPr>
-            <a:r>
-              <a:t>Structured JSON enables real workflows — not just one-off prompts.</a:t>
-            </a:r>
-          </a:p>
-        </p:txBody>
-      </p:sp>
-      <p:sp>
-        <p:nvSpPr>
-          <p:cNvPr id="20" name="TextBox 19"/>
-          <p:cNvSpPr txBox="1"/>
-          <p:nvPr/>
-        </p:nvSpPr>
-        <p:spPr>
-          <a:xfrm>
-            <a:off x="11430000" y="6400800"/>
-            <a:ext cx="457200" cy="274320"/>
-          </a:xfrm>
-          <a:prstGeom prst="rect">
-            <a:avLst/>
-          </a:prstGeom>
-          <a:noFill/>
-        </p:spPr>
-        <p:txBody>
-          <a:bodyPr wrap="square">
-            <a:spAutoFit/>
-          </a:bodyPr>
-          <a:lstStyle/>
-          <a:p>
             <a:pPr algn="r">
-              <a:defRPr sz="1200" b="0" i="0">
+              <a:defRPr sz="1100" b="0" i="0">
                 <a:solidFill>
                   <a:srgbClr val="9CA3B4"/>
                 </a:solidFill>
@@ -11359,8 +10924,8 @@
         </p:nvSpPr>
         <p:spPr>
           <a:xfrm>
-            <a:off x="548640" y="457200"/>
-            <a:ext cx="10972800" cy="914400"/>
+            <a:off x="548640" y="365760"/>
+            <a:ext cx="10972800" cy="822960"/>
           </a:xfrm>
           <a:prstGeom prst="rect">
             <a:avLst/>
@@ -11374,7 +10939,7 @@
           <a:lstStyle/>
           <a:p>
             <a:pPr algn="l">
-              <a:defRPr sz="3400" b="1" i="0">
+              <a:defRPr sz="3200" b="1" i="0">
                 <a:solidFill>
                   <a:srgbClr val="E8ECF4"/>
                 </a:solidFill>
@@ -11395,7 +10960,7 @@
         </p:nvSpPr>
         <p:spPr>
           <a:xfrm>
-            <a:off x="548640" y="1325880"/>
+            <a:off x="548640" y="1207008"/>
             <a:ext cx="2286000" cy="54864"/>
           </a:xfrm>
           <a:prstGeom prst="rect">
@@ -11432,13 +10997,49 @@
       </p:sp>
       <p:sp>
         <p:nvSpPr>
-          <p:cNvPr id="5" name="Rectangle 4"/>
+          <p:cNvPr id="5" name="TextBox 4"/>
+          <p:cNvSpPr txBox="1"/>
+          <p:nvPr/>
+        </p:nvSpPr>
+        <p:spPr>
+          <a:xfrm>
+            <a:off x="548640" y="1508760"/>
+            <a:ext cx="10972800" cy="640080"/>
+          </a:xfrm>
+          <a:prstGeom prst="rect">
+            <a:avLst/>
+          </a:prstGeom>
+          <a:noFill/>
+        </p:spPr>
+        <p:txBody>
+          <a:bodyPr wrap="square">
+            <a:spAutoFit/>
+          </a:bodyPr>
+          <a:lstStyle/>
+          <a:p>
+            <a:pPr algn="l">
+              <a:defRPr sz="1900" b="0" i="1">
+                <a:solidFill>
+                  <a:srgbClr val="9CA3B4"/>
+                </a:solidFill>
+                <a:latin typeface="Arial"/>
+              </a:defRPr>
+            </a:pPr>
+            <a:r>
+              <a:t>A pipeline where /plan-event feeds /build-schedule and /draft-announcement.</a:t>
+            </a:r>
+          </a:p>
+        </p:txBody>
+      </p:sp>
+      <p:sp>
+        <p:nvSpPr>
+          <p:cNvPr id="6" name="Rectangle 5"/>
           <p:cNvSpPr/>
           <p:nvPr/>
         </p:nvSpPr>
         <p:spPr>
           <a:xfrm>
-            <a:off x="548640" y="1965960"/>
+            <a:off x="548640" y="2450592"/>
             <a:ext cx="109728" cy="109728"/>
           </a:xfrm>
           <a:prstGeom prst="rect">
@@ -11475,14 +11076,14 @@
       </p:sp>
       <p:sp>
         <p:nvSpPr>
-          <p:cNvPr id="6" name="TextBox 5"/>
+          <p:cNvPr id="7" name="TextBox 6"/>
           <p:cNvSpPr txBox="1"/>
           <p:nvPr/>
         </p:nvSpPr>
         <p:spPr>
           <a:xfrm>
-            <a:off x="914400" y="1828800"/>
-            <a:ext cx="10515600" cy="877824"/>
+            <a:off x="914400" y="2286000"/>
+            <a:ext cx="10515600" cy="777240"/>
           </a:xfrm>
           <a:prstGeom prst="rect">
             <a:avLst/>
@@ -11496,7 +11097,7 @@
           <a:lstStyle/>
           <a:p>
             <a:pPr algn="l">
-              <a:defRPr sz="2000" b="0" i="0">
+              <a:defRPr sz="1800" b="0" i="0">
                 <a:solidFill>
                   <a:srgbClr val="E8ECF4"/>
                 </a:solidFill>
@@ -11504,20 +11105,20 @@
               </a:defRPr>
             </a:pPr>
             <a:r>
-              <a:t>A pipeline: /plan-event → /build-schedule → /draft-announcement</a:t>
-            </a:r>
-          </a:p>
-        </p:txBody>
-      </p:sp>
-      <p:sp>
-        <p:nvSpPr>
-          <p:cNvPr id="7" name="Rectangle 6"/>
+              <a:t>Context engineering vs. prompt engineering</a:t>
+            </a:r>
+          </a:p>
+        </p:txBody>
+      </p:sp>
+      <p:sp>
+        <p:nvSpPr>
+          <p:cNvPr id="8" name="Rectangle 7"/>
           <p:cNvSpPr/>
           <p:nvPr/>
         </p:nvSpPr>
         <p:spPr>
           <a:xfrm>
-            <a:off x="548640" y="2980944"/>
+            <a:off x="548640" y="3273552"/>
             <a:ext cx="109728" cy="109728"/>
           </a:xfrm>
           <a:prstGeom prst="rect">
@@ -11554,14 +11155,14 @@
       </p:sp>
       <p:sp>
         <p:nvSpPr>
-          <p:cNvPr id="8" name="TextBox 7"/>
+          <p:cNvPr id="9" name="TextBox 8"/>
           <p:cNvSpPr txBox="1"/>
           <p:nvPr/>
         </p:nvSpPr>
         <p:spPr>
           <a:xfrm>
-            <a:off x="914400" y="2843784"/>
-            <a:ext cx="10515600" cy="877824"/>
+            <a:off x="914400" y="3108960"/>
+            <a:ext cx="10515600" cy="777240"/>
           </a:xfrm>
           <a:prstGeom prst="rect">
             <a:avLst/>
@@ -11575,7 +11176,7 @@
           <a:lstStyle/>
           <a:p>
             <a:pPr algn="l">
-              <a:defRPr sz="2000" b="0" i="0">
+              <a:defRPr sz="1800" b="0" i="0">
                 <a:solidFill>
                   <a:srgbClr val="E8ECF4"/>
                 </a:solidFill>
@@ -11583,20 +11184,20 @@
               </a:defRPr>
             </a:pPr>
             <a:r>
-              <a:t>Context engineering vs. prompt engineering</a:t>
-            </a:r>
-          </a:p>
-        </p:txBody>
-      </p:sp>
-      <p:sp>
-        <p:nvSpPr>
-          <p:cNvPr id="9" name="Rectangle 8"/>
+              <a:t>INITIAL.md — feature requests that actually work</a:t>
+            </a:r>
+          </a:p>
+        </p:txBody>
+      </p:sp>
+      <p:sp>
+        <p:nvSpPr>
+          <p:cNvPr id="10" name="Rectangle 9"/>
           <p:cNvSpPr/>
           <p:nvPr/>
         </p:nvSpPr>
         <p:spPr>
           <a:xfrm>
-            <a:off x="548640" y="3995928"/>
+            <a:off x="548640" y="4096511"/>
             <a:ext cx="109728" cy="109728"/>
           </a:xfrm>
           <a:prstGeom prst="rect">
@@ -11633,14 +11234,14 @@
       </p:sp>
       <p:sp>
         <p:nvSpPr>
-          <p:cNvPr id="10" name="TextBox 9"/>
+          <p:cNvPr id="11" name="TextBox 10"/>
           <p:cNvSpPr txBox="1"/>
           <p:nvPr/>
         </p:nvSpPr>
         <p:spPr>
           <a:xfrm>
-            <a:off x="914400" y="3858768"/>
-            <a:ext cx="10515600" cy="877824"/>
+            <a:off x="914400" y="3931920"/>
+            <a:ext cx="10515600" cy="777240"/>
           </a:xfrm>
           <a:prstGeom prst="rect">
             <a:avLst/>
@@ -11654,7 +11255,7 @@
           <a:lstStyle/>
           <a:p>
             <a:pPr algn="l">
-              <a:defRPr sz="2000" b="0" i="0">
+              <a:defRPr sz="1800" b="0" i="0">
                 <a:solidFill>
                   <a:srgbClr val="E8ECF4"/>
                 </a:solidFill>
@@ -11662,20 +11263,20 @@
               </a:defRPr>
             </a:pPr>
             <a:r>
-              <a:t>INITIAL.md — feature requests that actually work</a:t>
-            </a:r>
-          </a:p>
-        </p:txBody>
-      </p:sp>
-      <p:sp>
-        <p:nvSpPr>
-          <p:cNvPr id="11" name="Rectangle 10"/>
+              <a:t>PRPs — implementation blueprints with validation gates</a:t>
+            </a:r>
+          </a:p>
+        </p:txBody>
+      </p:sp>
+      <p:sp>
+        <p:nvSpPr>
+          <p:cNvPr id="12" name="Rectangle 11"/>
           <p:cNvSpPr/>
           <p:nvPr/>
         </p:nvSpPr>
         <p:spPr>
           <a:xfrm>
-            <a:off x="548640" y="5010912"/>
+            <a:off x="548640" y="4919472"/>
             <a:ext cx="109728" cy="109728"/>
           </a:xfrm>
           <a:prstGeom prst="rect">
@@ -11712,14 +11313,14 @@
       </p:sp>
       <p:sp>
         <p:nvSpPr>
-          <p:cNvPr id="12" name="TextBox 11"/>
+          <p:cNvPr id="13" name="TextBox 12"/>
           <p:cNvSpPr txBox="1"/>
           <p:nvPr/>
         </p:nvSpPr>
         <p:spPr>
           <a:xfrm>
-            <a:off x="914400" y="4873752"/>
-            <a:ext cx="10515600" cy="877824"/>
+            <a:off x="914400" y="4754880"/>
+            <a:ext cx="10515600" cy="777240"/>
           </a:xfrm>
           <a:prstGeom prst="rect">
             <a:avLst/>
@@ -11733,7 +11334,7 @@
           <a:lstStyle/>
           <a:p>
             <a:pPr algn="l">
-              <a:defRPr sz="2000" b="0" i="0">
+              <a:defRPr sz="1800" b="0" i="0">
                 <a:solidFill>
                   <a:srgbClr val="E8ECF4"/>
                 </a:solidFill>
@@ -11741,20 +11342,20 @@
               </a:defRPr>
             </a:pPr>
             <a:r>
-              <a:t>PRPs — implementation blueprints with validation gates</a:t>
-            </a:r>
-          </a:p>
-        </p:txBody>
-      </p:sp>
-      <p:sp>
-        <p:nvSpPr>
-          <p:cNvPr id="13" name="Rectangle 12"/>
+              <a:t>Composable slash commands that feed into each other</a:t>
+            </a:r>
+          </a:p>
+        </p:txBody>
+      </p:sp>
+      <p:sp>
+        <p:nvSpPr>
+          <p:cNvPr id="14" name="Rectangle 13"/>
           <p:cNvSpPr/>
           <p:nvPr/>
         </p:nvSpPr>
         <p:spPr>
           <a:xfrm>
-            <a:off x="548640" y="6025896"/>
+            <a:off x="548640" y="5742432"/>
             <a:ext cx="109728" cy="109728"/>
           </a:xfrm>
           <a:prstGeom prst="rect">
@@ -11791,14 +11392,14 @@
       </p:sp>
       <p:sp>
         <p:nvSpPr>
-          <p:cNvPr id="14" name="TextBox 13"/>
+          <p:cNvPr id="15" name="TextBox 14"/>
           <p:cNvSpPr txBox="1"/>
           <p:nvPr/>
         </p:nvSpPr>
         <p:spPr>
           <a:xfrm>
-            <a:off x="914400" y="5888736"/>
-            <a:ext cx="10515600" cy="877824"/>
+            <a:off x="914400" y="5577840"/>
+            <a:ext cx="10515600" cy="777240"/>
           </a:xfrm>
           <a:prstGeom prst="rect">
             <a:avLst/>
@@ -11812,7 +11413,7 @@
           <a:lstStyle/>
           <a:p>
             <a:pPr algn="l">
-              <a:defRPr sz="2000" b="0" i="0">
+              <a:defRPr sz="1800" b="0" i="0">
                 <a:solidFill>
                   <a:srgbClr val="E8ECF4"/>
                 </a:solidFill>
@@ -11820,20 +11421,20 @@
               </a:defRPr>
             </a:pPr>
             <a:r>
-              <a:t>Composable slash commands and the examples/ folder trick</a:t>
-            </a:r>
-          </a:p>
-        </p:txBody>
-      </p:sp>
-      <p:sp>
-        <p:nvSpPr>
-          <p:cNvPr id="15" name="TextBox 14"/>
+              <a:t>The examples/ folder trick — show, don't describe</a:t>
+            </a:r>
+          </a:p>
+        </p:txBody>
+      </p:sp>
+      <p:sp>
+        <p:nvSpPr>
+          <p:cNvPr id="16" name="TextBox 15"/>
           <p:cNvSpPr txBox="1"/>
           <p:nvPr/>
         </p:nvSpPr>
         <p:spPr>
           <a:xfrm>
-            <a:off x="11430000" y="6400800"/>
+            <a:off x="11430000" y="6446520"/>
             <a:ext cx="457200" cy="274320"/>
           </a:xfrm>
           <a:prstGeom prst="rect">
@@ -11848,7 +11449,7 @@
           <a:lstStyle/>
           <a:p>
             <a:pPr algn="r">
-              <a:defRPr sz="1200" b="0" i="0">
+              <a:defRPr sz="1100" b="0" i="0">
                 <a:solidFill>
                   <a:srgbClr val="9CA3B4"/>
                 </a:solidFill>
@@ -11889,16 +11490,16 @@
       <p:grpSpPr/>
       <p:sp>
         <p:nvSpPr>
-          <p:cNvPr id="2" name="Parallelogram 1"/>
+          <p:cNvPr id="2" name="Rectangle 1"/>
           <p:cNvSpPr/>
           <p:nvPr/>
         </p:nvSpPr>
         <p:spPr>
           <a:xfrm>
-            <a:off x="-914400" y="2743200"/>
-            <a:ext cx="7315200" cy="4572000"/>
-          </a:xfrm>
-          <a:prstGeom prst="parallelogram">
+            <a:off x="0" y="0"/>
+            <a:ext cx="73152" cy="6858000"/>
+          </a:xfrm>
+          <a:prstGeom prst="rect">
             <a:avLst/>
           </a:prstGeom>
           <a:solidFill>
@@ -11932,16 +11533,52 @@
       </p:sp>
       <p:sp>
         <p:nvSpPr>
-          <p:cNvPr id="3" name="Parallelogram 2"/>
+          <p:cNvPr id="3" name="TextBox 2"/>
+          <p:cNvSpPr txBox="1"/>
+          <p:nvPr/>
+        </p:nvSpPr>
+        <p:spPr>
+          <a:xfrm>
+            <a:off x="548640" y="365760"/>
+            <a:ext cx="10972800" cy="822960"/>
+          </a:xfrm>
+          <a:prstGeom prst="rect">
+            <a:avLst/>
+          </a:prstGeom>
+          <a:noFill/>
+        </p:spPr>
+        <p:txBody>
+          <a:bodyPr wrap="square">
+            <a:spAutoFit/>
+          </a:bodyPr>
+          <a:lstStyle/>
+          <a:p>
+            <a:pPr algn="l">
+              <a:defRPr sz="3200" b="1" i="0">
+                <a:solidFill>
+                  <a:srgbClr val="E8ECF4"/>
+                </a:solidFill>
+                <a:latin typeface="Arial"/>
+              </a:defRPr>
+            </a:pPr>
+            <a:r>
+              <a:t>Why agents fail</a:t>
+            </a:r>
+          </a:p>
+        </p:txBody>
+      </p:sp>
+      <p:sp>
+        <p:nvSpPr>
+          <p:cNvPr id="4" name="Rectangle 3"/>
           <p:cNvSpPr/>
           <p:nvPr/>
         </p:nvSpPr>
         <p:spPr>
           <a:xfrm>
-            <a:off x="-1828800" y="4114800"/>
-            <a:ext cx="6400800" cy="3657600"/>
-          </a:xfrm>
-          <a:prstGeom prst="parallelogram">
+            <a:off x="548640" y="1207008"/>
+            <a:ext cx="2286000" cy="54864"/>
+          </a:xfrm>
+          <a:prstGeom prst="rect">
             <a:avLst/>
           </a:prstGeom>
           <a:solidFill>
@@ -11975,14 +11612,14 @@
       </p:sp>
       <p:sp>
         <p:nvSpPr>
-          <p:cNvPr id="4" name="TextBox 3"/>
+          <p:cNvPr id="5" name="TextBox 4"/>
           <p:cNvSpPr txBox="1"/>
           <p:nvPr/>
         </p:nvSpPr>
         <p:spPr>
           <a:xfrm>
-            <a:off x="5029200" y="1645920"/>
-            <a:ext cx="6675120" cy="2286000"/>
+            <a:off x="548640" y="1508760"/>
+            <a:ext cx="10972800" cy="640080"/>
           </a:xfrm>
           <a:prstGeom prst="rect">
             <a:avLst/>
@@ -11995,68 +11632,32 @@
           </a:bodyPr>
           <a:lstStyle/>
           <a:p>
-            <a:pPr algn="r">
-              <a:defRPr sz="5400" b="1" i="0">
-                <a:solidFill>
-                  <a:srgbClr val="E8ECF4"/>
+            <a:pPr algn="l">
+              <a:defRPr sz="1900" b="0" i="1">
+                <a:solidFill>
+                  <a:srgbClr val="9CA3B4"/>
                 </a:solidFill>
                 <a:latin typeface="Arial"/>
               </a:defRPr>
             </a:pPr>
             <a:r>
-              <a:t>Most AI failures are context failures</a:t>
-            </a:r>
-          </a:p>
-        </p:txBody>
-      </p:sp>
-      <p:sp>
-        <p:nvSpPr>
-          <p:cNvPr id="5" name="TextBox 4"/>
-          <p:cNvSpPr txBox="1"/>
-          <p:nvPr/>
-        </p:nvSpPr>
-        <p:spPr>
-          <a:xfrm>
-            <a:off x="5029200" y="4206240"/>
-            <a:ext cx="6675120" cy="914400"/>
-          </a:xfrm>
-          <a:prstGeom prst="rect">
-            <a:avLst/>
-          </a:prstGeom>
-          <a:noFill/>
-        </p:spPr>
-        <p:txBody>
-          <a:bodyPr wrap="square">
-            <a:spAutoFit/>
-          </a:bodyPr>
-          <a:lstStyle/>
-          <a:p>
-            <a:pPr algn="r">
-              <a:defRPr sz="2200" b="0" i="0">
-                <a:solidFill>
-                  <a:srgbClr val="9CA3B4"/>
-                </a:solidFill>
-                <a:latin typeface="Arial"/>
-              </a:defRPr>
-            </a:pPr>
-            <a:r>
-              <a:t>The model isn't the bottleneck. Your context is.</a:t>
-            </a:r>
-          </a:p>
-        </p:txBody>
-      </p:sp>
-      <p:sp>
-        <p:nvSpPr>
-          <p:cNvPr id="6" name="Right Triangle 5"/>
+              <a:t>Most failures aren't model failures. They're context failures.</a:t>
+            </a:r>
+          </a:p>
+        </p:txBody>
+      </p:sp>
+      <p:sp>
+        <p:nvSpPr>
+          <p:cNvPr id="6" name="Rectangle 5"/>
           <p:cNvSpPr/>
           <p:nvPr/>
         </p:nvSpPr>
         <p:spPr>
           <a:xfrm>
-            <a:off x="11277295" y="0"/>
-            <a:ext cx="914400" cy="914400"/>
-          </a:xfrm>
-          <a:prstGeom prst="rtTriangle">
+            <a:off x="548640" y="2450592"/>
+            <a:ext cx="109728" cy="109728"/>
+          </a:xfrm>
+          <a:prstGeom prst="rect">
             <a:avLst/>
           </a:prstGeom>
           <a:solidFill>
@@ -12096,8 +11697,8 @@
         </p:nvSpPr>
         <p:spPr>
           <a:xfrm>
-            <a:off x="11430000" y="6400800"/>
-            <a:ext cx="457200" cy="274320"/>
+            <a:off x="914400" y="2286000"/>
+            <a:ext cx="10515600" cy="868680"/>
           </a:xfrm>
           <a:prstGeom prst="rect">
             <a:avLst/>
@@ -12110,8 +11711,202 @@
           </a:bodyPr>
           <a:lstStyle/>
           <a:p>
+            <a:pPr algn="l">
+              <a:defRPr sz="1800" b="0" i="0">
+                <a:solidFill>
+                  <a:srgbClr val="E8ECF4"/>
+                </a:solidFill>
+                <a:latin typeface="Arial"/>
+              </a:defRPr>
+            </a:pPr>
+            <a:r>
+              <a:t>Wrong output format → no schema provided</a:t>
+            </a:r>
+          </a:p>
+        </p:txBody>
+      </p:sp>
+      <p:sp>
+        <p:nvSpPr>
+          <p:cNvPr id="8" name="Rectangle 7"/>
+          <p:cNvSpPr/>
+          <p:nvPr/>
+        </p:nvSpPr>
+        <p:spPr>
+          <a:xfrm>
+            <a:off x="548640" y="3364992"/>
+            <a:ext cx="109728" cy="109728"/>
+          </a:xfrm>
+          <a:prstGeom prst="rect">
+            <a:avLst/>
+          </a:prstGeom>
+          <a:solidFill>
+            <a:srgbClr val="E8853D"/>
+          </a:solidFill>
+          <a:ln>
+            <a:noFill/>
+          </a:ln>
+        </p:spPr>
+        <p:style>
+          <a:lnRef idx="1">
+            <a:schemeClr val="accent1"/>
+          </a:lnRef>
+          <a:fillRef idx="3">
+            <a:schemeClr val="accent1"/>
+          </a:fillRef>
+          <a:effectRef idx="2">
+            <a:schemeClr val="accent1"/>
+          </a:effectRef>
+          <a:fontRef idx="minor">
+            <a:schemeClr val="lt1"/>
+          </a:fontRef>
+        </p:style>
+        <p:txBody>
+          <a:bodyPr rtlCol="0" anchor="ctr"/>
+          <a:lstStyle/>
+          <a:p>
+            <a:pPr algn="ctr"/>
+          </a:p>
+        </p:txBody>
+      </p:sp>
+      <p:sp>
+        <p:nvSpPr>
+          <p:cNvPr id="9" name="TextBox 8"/>
+          <p:cNvSpPr txBox="1"/>
+          <p:nvPr/>
+        </p:nvSpPr>
+        <p:spPr>
+          <a:xfrm>
+            <a:off x="914400" y="3200400"/>
+            <a:ext cx="10515600" cy="868680"/>
+          </a:xfrm>
+          <a:prstGeom prst="rect">
+            <a:avLst/>
+          </a:prstGeom>
+          <a:noFill/>
+        </p:spPr>
+        <p:txBody>
+          <a:bodyPr wrap="square">
+            <a:spAutoFit/>
+          </a:bodyPr>
+          <a:lstStyle/>
+          <a:p>
+            <a:pPr algn="l">
+              <a:defRPr sz="1800" b="0" i="0">
+                <a:solidFill>
+                  <a:srgbClr val="E8ECF4"/>
+                </a:solidFill>
+                <a:latin typeface="Arial"/>
+              </a:defRPr>
+            </a:pPr>
+            <a:r>
+              <a:t>Missed constraint → never specified</a:t>
+            </a:r>
+          </a:p>
+        </p:txBody>
+      </p:sp>
+      <p:sp>
+        <p:nvSpPr>
+          <p:cNvPr id="10" name="Rectangle 9"/>
+          <p:cNvSpPr/>
+          <p:nvPr/>
+        </p:nvSpPr>
+        <p:spPr>
+          <a:xfrm>
+            <a:off x="548640" y="4279392"/>
+            <a:ext cx="109728" cy="109728"/>
+          </a:xfrm>
+          <a:prstGeom prst="rect">
+            <a:avLst/>
+          </a:prstGeom>
+          <a:solidFill>
+            <a:srgbClr val="E8853D"/>
+          </a:solidFill>
+          <a:ln>
+            <a:noFill/>
+          </a:ln>
+        </p:spPr>
+        <p:style>
+          <a:lnRef idx="1">
+            <a:schemeClr val="accent1"/>
+          </a:lnRef>
+          <a:fillRef idx="3">
+            <a:schemeClr val="accent1"/>
+          </a:fillRef>
+          <a:effectRef idx="2">
+            <a:schemeClr val="accent1"/>
+          </a:effectRef>
+          <a:fontRef idx="minor">
+            <a:schemeClr val="lt1"/>
+          </a:fontRef>
+        </p:style>
+        <p:txBody>
+          <a:bodyPr rtlCol="0" anchor="ctr"/>
+          <a:lstStyle/>
+          <a:p>
+            <a:pPr algn="ctr"/>
+          </a:p>
+        </p:txBody>
+      </p:sp>
+      <p:sp>
+        <p:nvSpPr>
+          <p:cNvPr id="11" name="TextBox 10"/>
+          <p:cNvSpPr txBox="1"/>
+          <p:nvPr/>
+        </p:nvSpPr>
+        <p:spPr>
+          <a:xfrm>
+            <a:off x="914400" y="4114800"/>
+            <a:ext cx="10515600" cy="868680"/>
+          </a:xfrm>
+          <a:prstGeom prst="rect">
+            <a:avLst/>
+          </a:prstGeom>
+          <a:noFill/>
+        </p:spPr>
+        <p:txBody>
+          <a:bodyPr wrap="square">
+            <a:spAutoFit/>
+          </a:bodyPr>
+          <a:lstStyle/>
+          <a:p>
+            <a:pPr algn="l">
+              <a:defRPr sz="1800" b="0" i="0">
+                <a:solidFill>
+                  <a:srgbClr val="E8ECF4"/>
+                </a:solidFill>
+                <a:latin typeface="Arial"/>
+              </a:defRPr>
+            </a:pPr>
+            <a:r>
+              <a:t>Generic tone → no examples to match</a:t>
+            </a:r>
+          </a:p>
+        </p:txBody>
+      </p:sp>
+      <p:sp>
+        <p:nvSpPr>
+          <p:cNvPr id="12" name="TextBox 11"/>
+          <p:cNvSpPr txBox="1"/>
+          <p:nvPr/>
+        </p:nvSpPr>
+        <p:spPr>
+          <a:xfrm>
+            <a:off x="11430000" y="6446520"/>
+            <a:ext cx="457200" cy="274320"/>
+          </a:xfrm>
+          <a:prstGeom prst="rect">
+            <a:avLst/>
+          </a:prstGeom>
+          <a:noFill/>
+        </p:spPr>
+        <p:txBody>
+          <a:bodyPr wrap="square">
+            <a:spAutoFit/>
+          </a:bodyPr>
+          <a:lstStyle/>
+          <a:p>
             <a:pPr algn="r">
-              <a:defRPr sz="1200" b="0" i="0">
+              <a:defRPr sz="1100" b="0" i="0">
                 <a:solidFill>
                   <a:srgbClr val="9CA3B4"/>
                 </a:solidFill>
@@ -12152,16 +11947,52 @@
       <p:grpSpPr/>
       <p:sp>
         <p:nvSpPr>
-          <p:cNvPr id="2" name="Rectangle 1"/>
+          <p:cNvPr id="2" name="TextBox 1"/>
+          <p:cNvSpPr txBox="1"/>
+          <p:nvPr/>
+        </p:nvSpPr>
+        <p:spPr>
+          <a:xfrm>
+            <a:off x="457200" y="320040"/>
+            <a:ext cx="9144000" cy="731520"/>
+          </a:xfrm>
+          <a:prstGeom prst="rect">
+            <a:avLst/>
+          </a:prstGeom>
+          <a:noFill/>
+        </p:spPr>
+        <p:txBody>
+          <a:bodyPr wrap="square">
+            <a:spAutoFit/>
+          </a:bodyPr>
+          <a:lstStyle/>
+          <a:p>
+            <a:pPr algn="l">
+              <a:defRPr sz="2800" b="1" i="0">
+                <a:solidFill>
+                  <a:srgbClr val="E8ECF4"/>
+                </a:solidFill>
+                <a:latin typeface="Arial"/>
+              </a:defRPr>
+            </a:pPr>
+            <a:r>
+              <a:t>Design Slop — AI output without context</a:t>
+            </a:r>
+          </a:p>
+        </p:txBody>
+      </p:sp>
+      <p:sp>
+        <p:nvSpPr>
+          <p:cNvPr id="3" name="Rounded Rectangle 2"/>
           <p:cNvSpPr/>
           <p:nvPr/>
         </p:nvSpPr>
         <p:spPr>
           <a:xfrm>
-            <a:off x="0" y="0"/>
-            <a:ext cx="73152" cy="6858000"/>
-          </a:xfrm>
-          <a:prstGeom prst="rect">
+            <a:off x="10515600" y="960120"/>
+            <a:ext cx="1188720" cy="365760"/>
+          </a:xfrm>
+          <a:prstGeom prst="roundRect">
             <a:avLst/>
           </a:prstGeom>
           <a:solidFill>
@@ -12195,14 +12026,14 @@
       </p:sp>
       <p:sp>
         <p:nvSpPr>
-          <p:cNvPr id="3" name="TextBox 2"/>
+          <p:cNvPr id="4" name="TextBox 3"/>
           <p:cNvSpPr txBox="1"/>
           <p:nvPr/>
         </p:nvSpPr>
         <p:spPr>
           <a:xfrm>
-            <a:off x="457200" y="365760"/>
-            <a:ext cx="10972800" cy="914400"/>
+            <a:off x="10515600" y="987552"/>
+            <a:ext cx="1188720" cy="365760"/>
           </a:xfrm>
           <a:prstGeom prst="rect">
             <a:avLst/>
@@ -12215,39 +12046,41 @@
           </a:bodyPr>
           <a:lstStyle/>
           <a:p>
-            <a:pPr algn="l">
-              <a:defRPr sz="3400" b="1" i="0">
-                <a:solidFill>
-                  <a:srgbClr val="E8ECF4"/>
-                </a:solidFill>
-                <a:latin typeface="Arial"/>
+            <a:pPr algn="ctr">
+              <a:defRPr sz="1200" b="1" i="0">
+                <a:solidFill>
+                  <a:srgbClr val="0A0D12"/>
+                </a:solidFill>
+                <a:latin typeface="Courier New"/>
               </a:defRPr>
             </a:pPr>
             <a:r>
-              <a:t>67% of AI Sites Look Identical</a:t>
-            </a:r>
-          </a:p>
-        </p:txBody>
-      </p:sp>
-      <p:sp>
-        <p:nvSpPr>
-          <p:cNvPr id="4" name="Rectangle 3"/>
+              <a:t>67%</a:t>
+            </a:r>
+          </a:p>
+        </p:txBody>
+      </p:sp>
+      <p:sp>
+        <p:nvSpPr>
+          <p:cNvPr id="5" name="Rounded Rectangle 4"/>
           <p:cNvSpPr/>
           <p:nvPr/>
         </p:nvSpPr>
         <p:spPr>
           <a:xfrm>
-            <a:off x="457200" y="1234440"/>
-            <a:ext cx="2286000" cy="54864"/>
-          </a:xfrm>
-          <a:prstGeom prst="rect">
-            <a:avLst/>
-          </a:prstGeom>
-          <a:solidFill>
-            <a:srgbClr val="E8853D"/>
+            <a:off x="457200" y="1188720"/>
+            <a:ext cx="11274552" cy="4023360"/>
+          </a:xfrm>
+          <a:prstGeom prst="roundRect">
+            <a:avLst/>
+          </a:prstGeom>
+          <a:solidFill>
+            <a:srgbClr val="0A0D12"/>
           </a:solidFill>
           <a:ln>
-            <a:noFill/>
+            <a:solidFill>
+              <a:srgbClr val="313244"/>
+            </a:solidFill>
           </a:ln>
         </p:spPr>
         <p:style>
@@ -12274,20 +12107,20 @@
       </p:sp>
       <p:sp>
         <p:nvSpPr>
-          <p:cNvPr id="5" name="Rounded Rectangle 4"/>
+          <p:cNvPr id="6" name="Oval 5"/>
           <p:cNvSpPr/>
           <p:nvPr/>
         </p:nvSpPr>
         <p:spPr>
           <a:xfrm>
-            <a:off x="457200" y="1645920"/>
-            <a:ext cx="2613583" cy="4206240"/>
-          </a:xfrm>
-          <a:prstGeom prst="roundRect">
-            <a:avLst/>
-          </a:prstGeom>
-          <a:solidFill>
-            <a:srgbClr val="1A2030"/>
+            <a:off x="731520" y="1417320"/>
+            <a:ext cx="164592" cy="164592"/>
+          </a:xfrm>
+          <a:prstGeom prst="ellipse">
+            <a:avLst/>
+          </a:prstGeom>
+          <a:solidFill>
+            <a:srgbClr val="F38BA8"/>
           </a:solidFill>
           <a:ln>
             <a:noFill/>
@@ -12317,20 +12150,20 @@
       </p:sp>
       <p:sp>
         <p:nvSpPr>
-          <p:cNvPr id="6" name="Rectangle 5"/>
+          <p:cNvPr id="7" name="Oval 6"/>
           <p:cNvSpPr/>
           <p:nvPr/>
         </p:nvSpPr>
         <p:spPr>
           <a:xfrm>
-            <a:off x="457200" y="1645920"/>
-            <a:ext cx="2613583" cy="91440"/>
-          </a:xfrm>
-          <a:prstGeom prst="rect">
-            <a:avLst/>
-          </a:prstGeom>
-          <a:solidFill>
-            <a:srgbClr val="E8853D"/>
+            <a:off x="1051560" y="1417320"/>
+            <a:ext cx="164592" cy="164592"/>
+          </a:xfrm>
+          <a:prstGeom prst="ellipse">
+            <a:avLst/>
+          </a:prstGeom>
+          <a:solidFill>
+            <a:srgbClr val="F9E2AF"/>
           </a:solidFill>
           <a:ln>
             <a:noFill/>
@@ -12360,128 +12193,20 @@
       </p:sp>
       <p:sp>
         <p:nvSpPr>
-          <p:cNvPr id="7" name="TextBox 6"/>
-          <p:cNvSpPr txBox="1"/>
-          <p:nvPr/>
-        </p:nvSpPr>
-        <p:spPr>
-          <a:xfrm>
-            <a:off x="640080" y="1920240"/>
-            <a:ext cx="731520" cy="548640"/>
-          </a:xfrm>
-          <a:prstGeom prst="rect">
-            <a:avLst/>
-          </a:prstGeom>
-          <a:noFill/>
-        </p:spPr>
-        <p:txBody>
-          <a:bodyPr wrap="square">
-            <a:spAutoFit/>
-          </a:bodyPr>
-          <a:lstStyle/>
-          <a:p>
-            <a:pPr algn="l">
-              <a:defRPr sz="2200" b="1" i="0">
-                <a:solidFill>
-                  <a:srgbClr val="E8853D"/>
-                </a:solidFill>
-                <a:latin typeface="Arial"/>
-              </a:defRPr>
-            </a:pPr>
-            <a:r>
-              <a:t>01</a:t>
-            </a:r>
-          </a:p>
-        </p:txBody>
-      </p:sp>
-      <p:sp>
-        <p:nvSpPr>
-          <p:cNvPr id="8" name="TextBox 7"/>
-          <p:cNvSpPr txBox="1"/>
-          <p:nvPr/>
-        </p:nvSpPr>
-        <p:spPr>
-          <a:xfrm>
-            <a:off x="640080" y="2560320"/>
-            <a:ext cx="2247823" cy="1097280"/>
-          </a:xfrm>
-          <a:prstGeom prst="rect">
-            <a:avLst/>
-          </a:prstGeom>
-          <a:noFill/>
-        </p:spPr>
-        <p:txBody>
-          <a:bodyPr wrap="square">
-            <a:spAutoFit/>
-          </a:bodyPr>
-          <a:lstStyle/>
-          <a:p>
-            <a:pPr algn="l">
-              <a:defRPr sz="1800" b="1" i="0">
-                <a:solidFill>
-                  <a:srgbClr val="E8ECF4"/>
-                </a:solidFill>
-                <a:latin typeface="Arial"/>
-              </a:defRPr>
-            </a:pPr>
-            <a:r>
-              <a:t>Inter Hero</a:t>
-            </a:r>
-          </a:p>
-        </p:txBody>
-      </p:sp>
-      <p:sp>
-        <p:nvSpPr>
-          <p:cNvPr id="9" name="TextBox 8"/>
-          <p:cNvSpPr txBox="1"/>
-          <p:nvPr/>
-        </p:nvSpPr>
-        <p:spPr>
-          <a:xfrm>
-            <a:off x="640080" y="3749039"/>
-            <a:ext cx="2247823" cy="2011680"/>
-          </a:xfrm>
-          <a:prstGeom prst="rect">
-            <a:avLst/>
-          </a:prstGeom>
-          <a:noFill/>
-        </p:spPr>
-        <p:txBody>
-          <a:bodyPr wrap="square">
-            <a:spAutoFit/>
-          </a:bodyPr>
-          <a:lstStyle/>
-          <a:p>
-            <a:pPr algn="l">
-              <a:defRPr sz="1400" b="0" i="0">
-                <a:solidFill>
-                  <a:srgbClr val="9CA3B4"/>
-                </a:solidFill>
-                <a:latin typeface="Arial"/>
-              </a:defRPr>
-            </a:pPr>
-            <a:r>
-              <a:t>Same centered headline layout across hundreds of Show HN sites</a:t>
-            </a:r>
-          </a:p>
-        </p:txBody>
-      </p:sp>
-      <p:sp>
-        <p:nvSpPr>
-          <p:cNvPr id="10" name="Rounded Rectangle 9"/>
+          <p:cNvPr id="8" name="Oval 7"/>
           <p:cNvSpPr/>
           <p:nvPr/>
         </p:nvSpPr>
         <p:spPr>
           <a:xfrm>
-            <a:off x="3345103" y="1645920"/>
-            <a:ext cx="2613583" cy="4206240"/>
-          </a:xfrm>
-          <a:prstGeom prst="roundRect">
-            <a:avLst/>
-          </a:prstGeom>
-          <a:solidFill>
-            <a:srgbClr val="1A2030"/>
+            <a:off x="1371600" y="1417320"/>
+            <a:ext cx="164592" cy="164592"/>
+          </a:xfrm>
+          <a:prstGeom prst="ellipse">
+            <a:avLst/>
+          </a:prstGeom>
+          <a:solidFill>
+            <a:srgbClr val="A6E3A1"/>
           </a:solidFill>
           <a:ln>
             <a:noFill/>
@@ -12511,14 +12236,146 @@
       </p:sp>
       <p:sp>
         <p:nvSpPr>
-          <p:cNvPr id="11" name="Rectangle 10"/>
+          <p:cNvPr id="9" name="TextBox 8"/>
+          <p:cNvSpPr txBox="1"/>
+          <p:nvPr/>
+        </p:nvSpPr>
+        <p:spPr>
+          <a:xfrm>
+            <a:off x="731520" y="1920240"/>
+            <a:ext cx="10698480" cy="3246120"/>
+          </a:xfrm>
+          <a:prstGeom prst="rect">
+            <a:avLst/>
+          </a:prstGeom>
+          <a:noFill/>
+        </p:spPr>
+        <p:txBody>
+          <a:bodyPr wrap="none">
+            <a:spAutoFit/>
+          </a:bodyPr>
+          <a:lstStyle/>
+          <a:p>
+            <a:pPr algn="l">
+              <a:defRPr sz="1300" b="0" i="0">
+                <a:solidFill>
+                  <a:srgbClr val="E8ECF4"/>
+                </a:solidFill>
+                <a:latin typeface="Courier New"/>
+              </a:defRPr>
+            </a:pPr>
+            <a:r>
+              <a:t> Pattern                          What it looks like</a:t>
+            </a:r>
+            <a:br/>
+            <a:r>
+              <a:t> ────────────────────────────────  ─────────────────────────────────────</a:t>
+            </a:r>
+            <a:br/>
+            <a:r>
+              <a:t> Inter font, centered hero         Same headline layout</a:t>
+            </a:r>
+            <a:br/>
+            <a:r>
+              <a:t> "VibeCode Purple" palette         Same gradient, dark mode, grey text</a:t>
+            </a:r>
+            <a:br/>
+            <a:r>
+              <a:t> shadcn/ui cards with icon tops    Identical feature grids, numbered steps</a:t>
+            </a:r>
+            <a:br/>
+            <a:r>
+              <a:t> UPPERCASE badges above headings   ✨ INTRODUCING on every landing page</a:t>
+            </a:r>
+            <a:br/>
+            <a:r>
+              <a:t> Glassmorphism + gradient shadows  Same blurry card effect everywhere</a:t>
+            </a:r>
+          </a:p>
+        </p:txBody>
+      </p:sp>
+      <p:sp>
+        <p:nvSpPr>
+          <p:cNvPr id="10" name="TextBox 9"/>
+          <p:cNvSpPr txBox="1"/>
+          <p:nvPr/>
+        </p:nvSpPr>
+        <p:spPr>
+          <a:xfrm>
+            <a:off x="457200" y="5394960"/>
+            <a:ext cx="11274552" cy="457200"/>
+          </a:xfrm>
+          <a:prstGeom prst="rect">
+            <a:avLst/>
+          </a:prstGeom>
+          <a:noFill/>
+        </p:spPr>
+        <p:txBody>
+          <a:bodyPr wrap="square">
+            <a:spAutoFit/>
+          </a:bodyPr>
+          <a:lstStyle/>
+          <a:p>
+            <a:pPr algn="ctr">
+              <a:defRPr sz="1600" b="1" i="0">
+                <a:solidFill>
+                  <a:srgbClr val="E8ECF4"/>
+                </a:solidFill>
+                <a:latin typeface="Arial"/>
+              </a:defRPr>
+            </a:pPr>
+            <a:r>
+              <a:t>Same thing happens to agent output: generic plans, generic emails, generic schedules.</a:t>
+            </a:r>
+          </a:p>
+        </p:txBody>
+      </p:sp>
+      <p:sp>
+        <p:nvSpPr>
+          <p:cNvPr id="11" name="TextBox 10"/>
+          <p:cNvSpPr txBox="1"/>
+          <p:nvPr/>
+        </p:nvSpPr>
+        <p:spPr>
+          <a:xfrm>
+            <a:off x="457200" y="5806440"/>
+            <a:ext cx="11274552" cy="548640"/>
+          </a:xfrm>
+          <a:prstGeom prst="rect">
+            <a:avLst/>
+          </a:prstGeom>
+          <a:noFill/>
+        </p:spPr>
+        <p:txBody>
+          <a:bodyPr wrap="square">
+            <a:spAutoFit/>
+          </a:bodyPr>
+          <a:lstStyle/>
+          <a:p>
+            <a:pPr algn="ctr">
+              <a:defRPr sz="1300" b="0" i="1">
+                <a:solidFill>
+                  <a:srgbClr val="9CA3B4"/>
+                </a:solidFill>
+                <a:latin typeface="Arial"/>
+              </a:defRPr>
+            </a:pPr>
+            <a:r>
+              <a:t>500 Show HN sites: 67% used 2+ identical AI design patterns. Source: Adrian Krebs, "Design Slop".</a:t>
+            </a:r>
+          </a:p>
+        </p:txBody>
+      </p:sp>
+      <p:sp>
+        <p:nvSpPr>
+          <p:cNvPr id="12" name="Rectangle 11"/>
           <p:cNvSpPr/>
           <p:nvPr/>
         </p:nvSpPr>
         <p:spPr>
           <a:xfrm>
-            <a:off x="3345103" y="1645920"/>
-            <a:ext cx="2613583" cy="91440"/>
+            <a:off x="0" y="6720840"/>
+            <a:ext cx="12191695" cy="137160"/>
           </a:xfrm>
           <a:prstGeom prst="rect">
             <a:avLst/>
@@ -12554,14 +12411,14 @@
       </p:sp>
       <p:sp>
         <p:nvSpPr>
-          <p:cNvPr id="12" name="TextBox 11"/>
+          <p:cNvPr id="13" name="TextBox 12"/>
           <p:cNvSpPr txBox="1"/>
           <p:nvPr/>
         </p:nvSpPr>
         <p:spPr>
           <a:xfrm>
-            <a:off x="3527983" y="1920240"/>
-            <a:ext cx="731520" cy="548640"/>
+            <a:off x="11430000" y="6446520"/>
+            <a:ext cx="457200" cy="274320"/>
           </a:xfrm>
           <a:prstGeom prst="rect">
             <a:avLst/>
@@ -12574,504 +12431,8 @@
           </a:bodyPr>
           <a:lstStyle/>
           <a:p>
-            <a:pPr algn="l">
-              <a:defRPr sz="2200" b="1" i="0">
-                <a:solidFill>
-                  <a:srgbClr val="5B9CF5"/>
-                </a:solidFill>
-                <a:latin typeface="Arial"/>
-              </a:defRPr>
-            </a:pPr>
-            <a:r>
-              <a:t>02</a:t>
-            </a:r>
-          </a:p>
-        </p:txBody>
-      </p:sp>
-      <p:sp>
-        <p:nvSpPr>
-          <p:cNvPr id="13" name="TextBox 12"/>
-          <p:cNvSpPr txBox="1"/>
-          <p:nvPr/>
-        </p:nvSpPr>
-        <p:spPr>
-          <a:xfrm>
-            <a:off x="3527983" y="2560320"/>
-            <a:ext cx="2247823" cy="1097280"/>
-          </a:xfrm>
-          <a:prstGeom prst="rect">
-            <a:avLst/>
-          </a:prstGeom>
-          <a:noFill/>
-        </p:spPr>
-        <p:txBody>
-          <a:bodyPr wrap="square">
-            <a:spAutoFit/>
-          </a:bodyPr>
-          <a:lstStyle/>
-          <a:p>
-            <a:pPr algn="l">
-              <a:defRPr sz="1800" b="1" i="0">
-                <a:solidFill>
-                  <a:srgbClr val="E8ECF4"/>
-                </a:solidFill>
-                <a:latin typeface="Arial"/>
-              </a:defRPr>
-            </a:pPr>
-            <a:r>
-              <a:t>Purple</a:t>
-            </a:r>
-          </a:p>
-        </p:txBody>
-      </p:sp>
-      <p:sp>
-        <p:nvSpPr>
-          <p:cNvPr id="14" name="TextBox 13"/>
-          <p:cNvSpPr txBox="1"/>
-          <p:nvPr/>
-        </p:nvSpPr>
-        <p:spPr>
-          <a:xfrm>
-            <a:off x="3527983" y="3749039"/>
-            <a:ext cx="2247823" cy="2011680"/>
-          </a:xfrm>
-          <a:prstGeom prst="rect">
-            <a:avLst/>
-          </a:prstGeom>
-          <a:noFill/>
-        </p:spPr>
-        <p:txBody>
-          <a:bodyPr wrap="square">
-            <a:spAutoFit/>
-          </a:bodyPr>
-          <a:lstStyle/>
-          <a:p>
-            <a:pPr algn="l">
-              <a:defRPr sz="1400" b="0" i="0">
-                <a:solidFill>
-                  <a:srgbClr val="9CA3B4"/>
-                </a:solidFill>
-                <a:latin typeface="Arial"/>
-              </a:defRPr>
-            </a:pPr>
-            <a:r>
-              <a:t>The 'VibeCode' gradient + dark mode + grey body text</a:t>
-            </a:r>
-          </a:p>
-        </p:txBody>
-      </p:sp>
-      <p:sp>
-        <p:nvSpPr>
-          <p:cNvPr id="15" name="Rounded Rectangle 14"/>
-          <p:cNvSpPr/>
-          <p:nvPr/>
-        </p:nvSpPr>
-        <p:spPr>
-          <a:xfrm>
-            <a:off x="6233007" y="1645920"/>
-            <a:ext cx="2613583" cy="4206240"/>
-          </a:xfrm>
-          <a:prstGeom prst="roundRect">
-            <a:avLst/>
-          </a:prstGeom>
-          <a:solidFill>
-            <a:srgbClr val="1A2030"/>
-          </a:solidFill>
-          <a:ln>
-            <a:noFill/>
-          </a:ln>
-        </p:spPr>
-        <p:style>
-          <a:lnRef idx="1">
-            <a:schemeClr val="accent1"/>
-          </a:lnRef>
-          <a:fillRef idx="3">
-            <a:schemeClr val="accent1"/>
-          </a:fillRef>
-          <a:effectRef idx="2">
-            <a:schemeClr val="accent1"/>
-          </a:effectRef>
-          <a:fontRef idx="minor">
-            <a:schemeClr val="lt1"/>
-          </a:fontRef>
-        </p:style>
-        <p:txBody>
-          <a:bodyPr rtlCol="0" anchor="ctr"/>
-          <a:lstStyle/>
-          <a:p>
-            <a:pPr algn="ctr"/>
-          </a:p>
-        </p:txBody>
-      </p:sp>
-      <p:sp>
-        <p:nvSpPr>
-          <p:cNvPr id="16" name="Rectangle 15"/>
-          <p:cNvSpPr/>
-          <p:nvPr/>
-        </p:nvSpPr>
-        <p:spPr>
-          <a:xfrm>
-            <a:off x="6233007" y="1645920"/>
-            <a:ext cx="2613583" cy="91440"/>
-          </a:xfrm>
-          <a:prstGeom prst="rect">
-            <a:avLst/>
-          </a:prstGeom>
-          <a:solidFill>
-            <a:srgbClr val="56C495"/>
-          </a:solidFill>
-          <a:ln>
-            <a:noFill/>
-          </a:ln>
-        </p:spPr>
-        <p:style>
-          <a:lnRef idx="1">
-            <a:schemeClr val="accent1"/>
-          </a:lnRef>
-          <a:fillRef idx="3">
-            <a:schemeClr val="accent1"/>
-          </a:fillRef>
-          <a:effectRef idx="2">
-            <a:schemeClr val="accent1"/>
-          </a:effectRef>
-          <a:fontRef idx="minor">
-            <a:schemeClr val="lt1"/>
-          </a:fontRef>
-        </p:style>
-        <p:txBody>
-          <a:bodyPr rtlCol="0" anchor="ctr"/>
-          <a:lstStyle/>
-          <a:p>
-            <a:pPr algn="ctr"/>
-          </a:p>
-        </p:txBody>
-      </p:sp>
-      <p:sp>
-        <p:nvSpPr>
-          <p:cNvPr id="17" name="TextBox 16"/>
-          <p:cNvSpPr txBox="1"/>
-          <p:nvPr/>
-        </p:nvSpPr>
-        <p:spPr>
-          <a:xfrm>
-            <a:off x="6415887" y="1920240"/>
-            <a:ext cx="731520" cy="548640"/>
-          </a:xfrm>
-          <a:prstGeom prst="rect">
-            <a:avLst/>
-          </a:prstGeom>
-          <a:noFill/>
-        </p:spPr>
-        <p:txBody>
-          <a:bodyPr wrap="square">
-            <a:spAutoFit/>
-          </a:bodyPr>
-          <a:lstStyle/>
-          <a:p>
-            <a:pPr algn="l">
-              <a:defRPr sz="2200" b="1" i="0">
-                <a:solidFill>
-                  <a:srgbClr val="56C495"/>
-                </a:solidFill>
-                <a:latin typeface="Arial"/>
-              </a:defRPr>
-            </a:pPr>
-            <a:r>
-              <a:t>03</a:t>
-            </a:r>
-          </a:p>
-        </p:txBody>
-      </p:sp>
-      <p:sp>
-        <p:nvSpPr>
-          <p:cNvPr id="18" name="TextBox 17"/>
-          <p:cNvSpPr txBox="1"/>
-          <p:nvPr/>
-        </p:nvSpPr>
-        <p:spPr>
-          <a:xfrm>
-            <a:off x="6415887" y="2560320"/>
-            <a:ext cx="2247823" cy="1097280"/>
-          </a:xfrm>
-          <a:prstGeom prst="rect">
-            <a:avLst/>
-          </a:prstGeom>
-          <a:noFill/>
-        </p:spPr>
-        <p:txBody>
-          <a:bodyPr wrap="square">
-            <a:spAutoFit/>
-          </a:bodyPr>
-          <a:lstStyle/>
-          <a:p>
-            <a:pPr algn="l">
-              <a:defRPr sz="1800" b="1" i="0">
-                <a:solidFill>
-                  <a:srgbClr val="E8ECF4"/>
-                </a:solidFill>
-                <a:latin typeface="Arial"/>
-              </a:defRPr>
-            </a:pPr>
-            <a:r>
-              <a:t>Icon Cards</a:t>
-            </a:r>
-          </a:p>
-        </p:txBody>
-      </p:sp>
-      <p:sp>
-        <p:nvSpPr>
-          <p:cNvPr id="19" name="TextBox 18"/>
-          <p:cNvSpPr txBox="1"/>
-          <p:nvPr/>
-        </p:nvSpPr>
-        <p:spPr>
-          <a:xfrm>
-            <a:off x="6415887" y="3749039"/>
-            <a:ext cx="2247823" cy="2011680"/>
-          </a:xfrm>
-          <a:prstGeom prst="rect">
-            <a:avLst/>
-          </a:prstGeom>
-          <a:noFill/>
-        </p:spPr>
-        <p:txBody>
-          <a:bodyPr wrap="square">
-            <a:spAutoFit/>
-          </a:bodyPr>
-          <a:lstStyle/>
-          <a:p>
-            <a:pPr algn="l">
-              <a:defRPr sz="1400" b="0" i="0">
-                <a:solidFill>
-                  <a:srgbClr val="9CA3B4"/>
-                </a:solidFill>
-                <a:latin typeface="Arial"/>
-              </a:defRPr>
-            </a:pPr>
-            <a:r>
-              <a:t>shadcn feature grids with icons on top — all identical</a:t>
-            </a:r>
-          </a:p>
-        </p:txBody>
-      </p:sp>
-      <p:sp>
-        <p:nvSpPr>
-          <p:cNvPr id="20" name="Rounded Rectangle 19"/>
-          <p:cNvSpPr/>
-          <p:nvPr/>
-        </p:nvSpPr>
-        <p:spPr>
-          <a:xfrm>
-            <a:off x="9120911" y="1645920"/>
-            <a:ext cx="2613583" cy="4206240"/>
-          </a:xfrm>
-          <a:prstGeom prst="roundRect">
-            <a:avLst/>
-          </a:prstGeom>
-          <a:solidFill>
-            <a:srgbClr val="1A2030"/>
-          </a:solidFill>
-          <a:ln>
-            <a:noFill/>
-          </a:ln>
-        </p:spPr>
-        <p:style>
-          <a:lnRef idx="1">
-            <a:schemeClr val="accent1"/>
-          </a:lnRef>
-          <a:fillRef idx="3">
-            <a:schemeClr val="accent1"/>
-          </a:fillRef>
-          <a:effectRef idx="2">
-            <a:schemeClr val="accent1"/>
-          </a:effectRef>
-          <a:fontRef idx="minor">
-            <a:schemeClr val="lt1"/>
-          </a:fontRef>
-        </p:style>
-        <p:txBody>
-          <a:bodyPr rtlCol="0" anchor="ctr"/>
-          <a:lstStyle/>
-          <a:p>
-            <a:pPr algn="ctr"/>
-          </a:p>
-        </p:txBody>
-      </p:sp>
-      <p:sp>
-        <p:nvSpPr>
-          <p:cNvPr id="21" name="Rectangle 20"/>
-          <p:cNvSpPr/>
-          <p:nvPr/>
-        </p:nvSpPr>
-        <p:spPr>
-          <a:xfrm>
-            <a:off x="9120911" y="1645920"/>
-            <a:ext cx="2613583" cy="91440"/>
-          </a:xfrm>
-          <a:prstGeom prst="rect">
-            <a:avLst/>
-          </a:prstGeom>
-          <a:solidFill>
-            <a:srgbClr val="E8853D"/>
-          </a:solidFill>
-          <a:ln>
-            <a:noFill/>
-          </a:ln>
-        </p:spPr>
-        <p:style>
-          <a:lnRef idx="1">
-            <a:schemeClr val="accent1"/>
-          </a:lnRef>
-          <a:fillRef idx="3">
-            <a:schemeClr val="accent1"/>
-          </a:fillRef>
-          <a:effectRef idx="2">
-            <a:schemeClr val="accent1"/>
-          </a:effectRef>
-          <a:fontRef idx="minor">
-            <a:schemeClr val="lt1"/>
-          </a:fontRef>
-        </p:style>
-        <p:txBody>
-          <a:bodyPr rtlCol="0" anchor="ctr"/>
-          <a:lstStyle/>
-          <a:p>
-            <a:pPr algn="ctr"/>
-          </a:p>
-        </p:txBody>
-      </p:sp>
-      <p:sp>
-        <p:nvSpPr>
-          <p:cNvPr id="22" name="TextBox 21"/>
-          <p:cNvSpPr txBox="1"/>
-          <p:nvPr/>
-        </p:nvSpPr>
-        <p:spPr>
-          <a:xfrm>
-            <a:off x="9303791" y="1920240"/>
-            <a:ext cx="731520" cy="548640"/>
-          </a:xfrm>
-          <a:prstGeom prst="rect">
-            <a:avLst/>
-          </a:prstGeom>
-          <a:noFill/>
-        </p:spPr>
-        <p:txBody>
-          <a:bodyPr wrap="square">
-            <a:spAutoFit/>
-          </a:bodyPr>
-          <a:lstStyle/>
-          <a:p>
-            <a:pPr algn="l">
-              <a:defRPr sz="2200" b="1" i="0">
-                <a:solidFill>
-                  <a:srgbClr val="E8853D"/>
-                </a:solidFill>
-                <a:latin typeface="Arial"/>
-              </a:defRPr>
-            </a:pPr>
-            <a:r>
-              <a:t>04</a:t>
-            </a:r>
-          </a:p>
-        </p:txBody>
-      </p:sp>
-      <p:sp>
-        <p:nvSpPr>
-          <p:cNvPr id="23" name="TextBox 22"/>
-          <p:cNvSpPr txBox="1"/>
-          <p:nvPr/>
-        </p:nvSpPr>
-        <p:spPr>
-          <a:xfrm>
-            <a:off x="9303791" y="2560320"/>
-            <a:ext cx="2247823" cy="1097280"/>
-          </a:xfrm>
-          <a:prstGeom prst="rect">
-            <a:avLst/>
-          </a:prstGeom>
-          <a:noFill/>
-        </p:spPr>
-        <p:txBody>
-          <a:bodyPr wrap="square">
-            <a:spAutoFit/>
-          </a:bodyPr>
-          <a:lstStyle/>
-          <a:p>
-            <a:pPr algn="l">
-              <a:defRPr sz="1800" b="1" i="0">
-                <a:solidFill>
-                  <a:srgbClr val="E8ECF4"/>
-                </a:solidFill>
-                <a:latin typeface="Arial"/>
-              </a:defRPr>
-            </a:pPr>
-            <a:r>
-              <a:t>Glass FX</a:t>
-            </a:r>
-          </a:p>
-        </p:txBody>
-      </p:sp>
-      <p:sp>
-        <p:nvSpPr>
-          <p:cNvPr id="24" name="TextBox 23"/>
-          <p:cNvSpPr txBox="1"/>
-          <p:nvPr/>
-        </p:nvSpPr>
-        <p:spPr>
-          <a:xfrm>
-            <a:off x="9303791" y="3749039"/>
-            <a:ext cx="2247823" cy="2011680"/>
-          </a:xfrm>
-          <a:prstGeom prst="rect">
-            <a:avLst/>
-          </a:prstGeom>
-          <a:noFill/>
-        </p:spPr>
-        <p:txBody>
-          <a:bodyPr wrap="square">
-            <a:spAutoFit/>
-          </a:bodyPr>
-          <a:lstStyle/>
-          <a:p>
-            <a:pPr algn="l">
-              <a:defRPr sz="1400" b="0" i="0">
-                <a:solidFill>
-                  <a:srgbClr val="9CA3B4"/>
-                </a:solidFill>
-                <a:latin typeface="Arial"/>
-              </a:defRPr>
-            </a:pPr>
-            <a:r>
-              <a:t>Blurry cards, same gradient shadows, same rounded corners</a:t>
-            </a:r>
-          </a:p>
-        </p:txBody>
-      </p:sp>
-      <p:sp>
-        <p:nvSpPr>
-          <p:cNvPr id="25" name="TextBox 24"/>
-          <p:cNvSpPr txBox="1"/>
-          <p:nvPr/>
-        </p:nvSpPr>
-        <p:spPr>
-          <a:xfrm>
-            <a:off x="11430000" y="6400800"/>
-            <a:ext cx="457200" cy="274320"/>
-          </a:xfrm>
-          <a:prstGeom prst="rect">
-            <a:avLst/>
-          </a:prstGeom>
-          <a:noFill/>
-        </p:spPr>
-        <p:txBody>
-          <a:bodyPr wrap="square">
-            <a:spAutoFit/>
-          </a:bodyPr>
-          <a:lstStyle/>
-          <a:p>
             <a:pPr algn="r">
-              <a:defRPr sz="1200" b="0" i="0">
+              <a:defRPr sz="1100" b="0" i="0">
                 <a:solidFill>
                   <a:srgbClr val="9CA3B4"/>
                 </a:solidFill>
@@ -13112,16 +12473,52 @@
       <p:grpSpPr/>
       <p:sp>
         <p:nvSpPr>
-          <p:cNvPr id="2" name="Rectangle 1"/>
+          <p:cNvPr id="2" name="TextBox 1"/>
+          <p:cNvSpPr txBox="1"/>
+          <p:nvPr/>
+        </p:nvSpPr>
+        <p:spPr>
+          <a:xfrm>
+            <a:off x="457200" y="320040"/>
+            <a:ext cx="9144000" cy="731520"/>
+          </a:xfrm>
+          <a:prstGeom prst="rect">
+            <a:avLst/>
+          </a:prstGeom>
+          <a:noFill/>
+        </p:spPr>
+        <p:txBody>
+          <a:bodyPr wrap="square">
+            <a:spAutoFit/>
+          </a:bodyPr>
+          <a:lstStyle/>
+          <a:p>
+            <a:pPr algn="l">
+              <a:defRPr sz="2800" b="1" i="0">
+                <a:solidFill>
+                  <a:srgbClr val="E8ECF4"/>
+                </a:solidFill>
+                <a:latin typeface="Arial"/>
+              </a:defRPr>
+            </a:pPr>
+            <a:r>
+              <a:t>Prompt Engineering vs. Context Engineering</a:t>
+            </a:r>
+          </a:p>
+        </p:txBody>
+      </p:sp>
+      <p:sp>
+        <p:nvSpPr>
+          <p:cNvPr id="3" name="Rounded Rectangle 2"/>
           <p:cNvSpPr/>
           <p:nvPr/>
         </p:nvSpPr>
         <p:spPr>
           <a:xfrm>
-            <a:off x="0" y="0"/>
-            <a:ext cx="12191695" cy="109728"/>
-          </a:xfrm>
-          <a:prstGeom prst="rect">
+            <a:off x="10515600" y="960120"/>
+            <a:ext cx="1188720" cy="365760"/>
+          </a:xfrm>
+          <a:prstGeom prst="roundRect">
             <a:avLst/>
           </a:prstGeom>
           <a:solidFill>
@@ -13155,14 +12552,14 @@
       </p:sp>
       <p:sp>
         <p:nvSpPr>
-          <p:cNvPr id="3" name="TextBox 2"/>
+          <p:cNvPr id="4" name="TextBox 3"/>
           <p:cNvSpPr txBox="1"/>
           <p:nvPr/>
         </p:nvSpPr>
         <p:spPr>
           <a:xfrm>
-            <a:off x="457200" y="365760"/>
-            <a:ext cx="10972800" cy="822960"/>
+            <a:off x="10515600" y="987552"/>
+            <a:ext cx="1188720" cy="365760"/>
           </a:xfrm>
           <a:prstGeom prst="rect">
             <a:avLst/>
@@ -13175,39 +12572,41 @@
           </a:bodyPr>
           <a:lstStyle/>
           <a:p>
-            <a:pPr algn="l">
-              <a:defRPr sz="3000" b="1" i="0">
-                <a:solidFill>
-                  <a:srgbClr val="E8ECF4"/>
-                </a:solidFill>
-                <a:latin typeface="Arial"/>
+            <a:pPr algn="ctr">
+              <a:defRPr sz="1200" b="1" i="0">
+                <a:solidFill>
+                  <a:srgbClr val="0A0D12"/>
+                </a:solidFill>
+                <a:latin typeface="Courier New"/>
               </a:defRPr>
             </a:pPr>
             <a:r>
-              <a:t>Prompt Engineering vs. Context Engineering</a:t>
-            </a:r>
-          </a:p>
-        </p:txBody>
-      </p:sp>
-      <p:sp>
-        <p:nvSpPr>
-          <p:cNvPr id="4" name="Rectangle 3"/>
+              <a:t>VS</a:t>
+            </a:r>
+          </a:p>
+        </p:txBody>
+      </p:sp>
+      <p:sp>
+        <p:nvSpPr>
+          <p:cNvPr id="5" name="Rounded Rectangle 4"/>
           <p:cNvSpPr/>
           <p:nvPr/>
         </p:nvSpPr>
         <p:spPr>
           <a:xfrm>
-            <a:off x="5989320" y="1371600"/>
-            <a:ext cx="210312" cy="5029200"/>
-          </a:xfrm>
-          <a:prstGeom prst="rect">
-            <a:avLst/>
-          </a:prstGeom>
-          <a:solidFill>
-            <a:srgbClr val="313244"/>
+            <a:off x="457200" y="1188720"/>
+            <a:ext cx="11274552" cy="4206240"/>
+          </a:xfrm>
+          <a:prstGeom prst="roundRect">
+            <a:avLst/>
+          </a:prstGeom>
+          <a:solidFill>
+            <a:srgbClr val="0A0D12"/>
           </a:solidFill>
           <a:ln>
-            <a:noFill/>
+            <a:solidFill>
+              <a:srgbClr val="313244"/>
+            </a:solidFill>
           </a:ln>
         </p:spPr>
         <p:style>
@@ -13234,20 +12633,20 @@
       </p:sp>
       <p:sp>
         <p:nvSpPr>
-          <p:cNvPr id="5" name="Rectangle 4"/>
+          <p:cNvPr id="6" name="Oval 5"/>
           <p:cNvSpPr/>
           <p:nvPr/>
         </p:nvSpPr>
         <p:spPr>
           <a:xfrm>
-            <a:off x="6062472" y="1371600"/>
-            <a:ext cx="64008" cy="5029200"/>
-          </a:xfrm>
-          <a:prstGeom prst="rect">
-            <a:avLst/>
-          </a:prstGeom>
-          <a:solidFill>
-            <a:srgbClr val="E8853D"/>
+            <a:off x="731520" y="1417320"/>
+            <a:ext cx="164592" cy="164592"/>
+          </a:xfrm>
+          <a:prstGeom prst="ellipse">
+            <a:avLst/>
+          </a:prstGeom>
+          <a:solidFill>
+            <a:srgbClr val="F38BA8"/>
           </a:solidFill>
           <a:ln>
             <a:noFill/>
@@ -13277,20 +12676,20 @@
       </p:sp>
       <p:sp>
         <p:nvSpPr>
-          <p:cNvPr id="6" name="Rectangle 5"/>
+          <p:cNvPr id="7" name="Oval 6"/>
           <p:cNvSpPr/>
           <p:nvPr/>
         </p:nvSpPr>
         <p:spPr>
           <a:xfrm>
-            <a:off x="457200" y="1554480"/>
-            <a:ext cx="137160" cy="457200"/>
-          </a:xfrm>
-          <a:prstGeom prst="rect">
-            <a:avLst/>
-          </a:prstGeom>
-          <a:solidFill>
-            <a:srgbClr val="F38BA8"/>
+            <a:off x="1051560" y="1417320"/>
+            <a:ext cx="164592" cy="164592"/>
+          </a:xfrm>
+          <a:prstGeom prst="ellipse">
+            <a:avLst/>
+          </a:prstGeom>
+          <a:solidFill>
+            <a:srgbClr val="F9E2AF"/>
           </a:solidFill>
           <a:ln>
             <a:noFill/>
@@ -13320,56 +12719,20 @@
       </p:sp>
       <p:sp>
         <p:nvSpPr>
-          <p:cNvPr id="7" name="TextBox 6"/>
-          <p:cNvSpPr txBox="1"/>
-          <p:nvPr/>
-        </p:nvSpPr>
-        <p:spPr>
-          <a:xfrm>
-            <a:off x="777240" y="1508760"/>
-            <a:ext cx="5029200" cy="548640"/>
-          </a:xfrm>
-          <a:prstGeom prst="rect">
-            <a:avLst/>
-          </a:prstGeom>
-          <a:noFill/>
-        </p:spPr>
-        <p:txBody>
-          <a:bodyPr wrap="square">
-            <a:spAutoFit/>
-          </a:bodyPr>
-          <a:lstStyle/>
-          <a:p>
-            <a:pPr algn="l">
-              <a:defRPr sz="2200" b="1" i="0">
-                <a:solidFill>
-                  <a:srgbClr val="F38BA8"/>
-                </a:solidFill>
-                <a:latin typeface="Arial"/>
-              </a:defRPr>
-            </a:pPr>
-            <a:r>
-              <a:t>Prompt Engineering</a:t>
-            </a:r>
-          </a:p>
-        </p:txBody>
-      </p:sp>
-      <p:sp>
-        <p:nvSpPr>
           <p:cNvPr id="8" name="Oval 7"/>
           <p:cNvSpPr/>
           <p:nvPr/>
         </p:nvSpPr>
         <p:spPr>
           <a:xfrm>
-            <a:off x="457200" y="2423160"/>
-            <a:ext cx="91440" cy="91440"/>
+            <a:off x="1371600" y="1417320"/>
+            <a:ext cx="164592" cy="164592"/>
           </a:xfrm>
           <a:prstGeom prst="ellipse">
             <a:avLst/>
           </a:prstGeom>
           <a:solidFill>
-            <a:srgbClr val="F38BA8"/>
+            <a:srgbClr val="A6E3A1"/>
           </a:solidFill>
           <a:ln>
             <a:noFill/>
@@ -13405,8 +12768,68 @@
         </p:nvSpPr>
         <p:spPr>
           <a:xfrm>
-            <a:off x="777240" y="2286000"/>
-            <a:ext cx="5029200" cy="822960"/>
+            <a:off x="731520" y="1920240"/>
+            <a:ext cx="10698480" cy="3428999"/>
+          </a:xfrm>
+          <a:prstGeom prst="rect">
+            <a:avLst/>
+          </a:prstGeom>
+          <a:noFill/>
+        </p:spPr>
+        <p:txBody>
+          <a:bodyPr wrap="none">
+            <a:spAutoFit/>
+          </a:bodyPr>
+          <a:lstStyle/>
+          <a:p>
+            <a:pPr algn="l">
+              <a:defRPr sz="1200" b="0" i="0">
+                <a:solidFill>
+                  <a:srgbClr val="E8ECF4"/>
+                </a:solidFill>
+                <a:latin typeface="Courier New"/>
+              </a:defRPr>
+            </a:pPr>
+            <a:r>
+              <a:t>                       Prompt Engineering          Context Engineering</a:t>
+            </a:r>
+            <a:br/>
+            <a:r>
+              <a:t> ─────────────────     ──────────────────────     ───────────────────────────</a:t>
+            </a:r>
+            <a:br/>
+            <a:r>
+              <a:t> Approach              Wording                    System</a:t>
+            </a:r>
+            <a:br/>
+            <a:r>
+              <a:t> What you give         "Write a good email"       Schema + examples + rules + data</a:t>
+            </a:r>
+            <a:br/>
+            <a:r>
+              <a:t> Strategy              AI guesses                 AI is told</a:t>
+            </a:r>
+            <a:br/>
+            <a:r>
+              <a:t> Failure mode          "Why didn't it know X?"    "I forgot to include X"</a:t>
+            </a:r>
+            <a:br/>
+            <a:r>
+              <a:t> Scalability           Breaks at complexity       Scales with structure</a:t>
+            </a:r>
+          </a:p>
+        </p:txBody>
+      </p:sp>
+      <p:sp>
+        <p:nvSpPr>
+          <p:cNvPr id="10" name="TextBox 9"/>
+          <p:cNvSpPr txBox="1"/>
+          <p:nvPr/>
+        </p:nvSpPr>
+        <p:spPr>
+          <a:xfrm>
+            <a:off x="457200" y="5577840"/>
+            <a:ext cx="11274552" cy="457200"/>
           </a:xfrm>
           <a:prstGeom prst="rect">
             <a:avLst/>
@@ -13419,8 +12842,8 @@
           </a:bodyPr>
           <a:lstStyle/>
           <a:p>
-            <a:pPr algn="l">
-              <a:defRPr sz="1700" b="0" i="0">
+            <a:pPr algn="ctr">
+              <a:defRPr sz="1600" b="1" i="0">
                 <a:solidFill>
                   <a:srgbClr val="E8ECF4"/>
                 </a:solidFill>
@@ -13428,27 +12851,27 @@
               </a:defRPr>
             </a:pPr>
             <a:r>
-              <a:t>Clever wording, sticky-note approach</a:t>
-            </a:r>
-          </a:p>
-        </p:txBody>
-      </p:sp>
-      <p:sp>
-        <p:nvSpPr>
-          <p:cNvPr id="10" name="Oval 9"/>
+              <a:t>The problem becomes yours, not the model's.</a:t>
+            </a:r>
+          </a:p>
+        </p:txBody>
+      </p:sp>
+      <p:sp>
+        <p:nvSpPr>
+          <p:cNvPr id="11" name="Rectangle 10"/>
           <p:cNvSpPr/>
           <p:nvPr/>
         </p:nvSpPr>
         <p:spPr>
           <a:xfrm>
-            <a:off x="457200" y="3291840"/>
-            <a:ext cx="91440" cy="91440"/>
-          </a:xfrm>
-          <a:prstGeom prst="ellipse">
-            <a:avLst/>
-          </a:prstGeom>
-          <a:solidFill>
-            <a:srgbClr val="F38BA8"/>
+            <a:off x="0" y="6720840"/>
+            <a:ext cx="12191695" cy="137160"/>
+          </a:xfrm>
+          <a:prstGeom prst="rect">
+            <a:avLst/>
+          </a:prstGeom>
+          <a:solidFill>
+            <a:srgbClr val="5B9CF5"/>
           </a:solidFill>
           <a:ln>
             <a:noFill/>
@@ -13478,14 +12901,14 @@
       </p:sp>
       <p:sp>
         <p:nvSpPr>
-          <p:cNvPr id="11" name="TextBox 10"/>
+          <p:cNvPr id="12" name="TextBox 11"/>
           <p:cNvSpPr txBox="1"/>
           <p:nvPr/>
         </p:nvSpPr>
         <p:spPr>
           <a:xfrm>
-            <a:off x="777240" y="3154680"/>
-            <a:ext cx="5029200" cy="822960"/>
+            <a:off x="11430000" y="6446520"/>
+            <a:ext cx="457200" cy="274320"/>
           </a:xfrm>
           <a:prstGeom prst="rect">
             <a:avLst/>
@@ -13498,597 +12921,8 @@
           </a:bodyPr>
           <a:lstStyle/>
           <a:p>
-            <a:pPr algn="l">
-              <a:defRPr sz="1700" b="0" i="0">
-                <a:solidFill>
-                  <a:srgbClr val="E8ECF4"/>
-                </a:solidFill>
-                <a:latin typeface="Arial"/>
-              </a:defRPr>
-            </a:pPr>
-            <a:r>
-              <a:t>Hopes the AI guesses right</a:t>
-            </a:r>
-          </a:p>
-        </p:txBody>
-      </p:sp>
-      <p:sp>
-        <p:nvSpPr>
-          <p:cNvPr id="12" name="Oval 11"/>
-          <p:cNvSpPr/>
-          <p:nvPr/>
-        </p:nvSpPr>
-        <p:spPr>
-          <a:xfrm>
-            <a:off x="457200" y="4160520"/>
-            <a:ext cx="91440" cy="91440"/>
-          </a:xfrm>
-          <a:prstGeom prst="ellipse">
-            <a:avLst/>
-          </a:prstGeom>
-          <a:solidFill>
-            <a:srgbClr val="F38BA8"/>
-          </a:solidFill>
-          <a:ln>
-            <a:noFill/>
-          </a:ln>
-        </p:spPr>
-        <p:style>
-          <a:lnRef idx="1">
-            <a:schemeClr val="accent1"/>
-          </a:lnRef>
-          <a:fillRef idx="3">
-            <a:schemeClr val="accent1"/>
-          </a:fillRef>
-          <a:effectRef idx="2">
-            <a:schemeClr val="accent1"/>
-          </a:effectRef>
-          <a:fontRef idx="minor">
-            <a:schemeClr val="lt1"/>
-          </a:fontRef>
-        </p:style>
-        <p:txBody>
-          <a:bodyPr rtlCol="0" anchor="ctr"/>
-          <a:lstStyle/>
-          <a:p>
-            <a:pPr algn="ctr"/>
-          </a:p>
-        </p:txBody>
-      </p:sp>
-      <p:sp>
-        <p:nvSpPr>
-          <p:cNvPr id="13" name="TextBox 12"/>
-          <p:cNvSpPr txBox="1"/>
-          <p:nvPr/>
-        </p:nvSpPr>
-        <p:spPr>
-          <a:xfrm>
-            <a:off x="777240" y="4023360"/>
-            <a:ext cx="5029200" cy="822960"/>
-          </a:xfrm>
-          <a:prstGeom prst="rect">
-            <a:avLst/>
-          </a:prstGeom>
-          <a:noFill/>
-        </p:spPr>
-        <p:txBody>
-          <a:bodyPr wrap="square">
-            <a:spAutoFit/>
-          </a:bodyPr>
-          <a:lstStyle/>
-          <a:p>
-            <a:pPr algn="l">
-              <a:defRPr sz="1700" b="0" i="0">
-                <a:solidFill>
-                  <a:srgbClr val="E8ECF4"/>
-                </a:solidFill>
-                <a:latin typeface="Arial"/>
-              </a:defRPr>
-            </a:pPr>
-            <a:r>
-              <a:t>Breaks at complexity</a:t>
-            </a:r>
-          </a:p>
-        </p:txBody>
-      </p:sp>
-      <p:sp>
-        <p:nvSpPr>
-          <p:cNvPr id="14" name="Oval 13"/>
-          <p:cNvSpPr/>
-          <p:nvPr/>
-        </p:nvSpPr>
-        <p:spPr>
-          <a:xfrm>
-            <a:off x="457200" y="5029200"/>
-            <a:ext cx="91440" cy="91440"/>
-          </a:xfrm>
-          <a:prstGeom prst="ellipse">
-            <a:avLst/>
-          </a:prstGeom>
-          <a:solidFill>
-            <a:srgbClr val="F38BA8"/>
-          </a:solidFill>
-          <a:ln>
-            <a:noFill/>
-          </a:ln>
-        </p:spPr>
-        <p:style>
-          <a:lnRef idx="1">
-            <a:schemeClr val="accent1"/>
-          </a:lnRef>
-          <a:fillRef idx="3">
-            <a:schemeClr val="accent1"/>
-          </a:fillRef>
-          <a:effectRef idx="2">
-            <a:schemeClr val="accent1"/>
-          </a:effectRef>
-          <a:fontRef idx="minor">
-            <a:schemeClr val="lt1"/>
-          </a:fontRef>
-        </p:style>
-        <p:txBody>
-          <a:bodyPr rtlCol="0" anchor="ctr"/>
-          <a:lstStyle/>
-          <a:p>
-            <a:pPr algn="ctr"/>
-          </a:p>
-        </p:txBody>
-      </p:sp>
-      <p:sp>
-        <p:nvSpPr>
-          <p:cNvPr id="15" name="TextBox 14"/>
-          <p:cNvSpPr txBox="1"/>
-          <p:nvPr/>
-        </p:nvSpPr>
-        <p:spPr>
-          <a:xfrm>
-            <a:off x="777240" y="4892040"/>
-            <a:ext cx="5029200" cy="822960"/>
-          </a:xfrm>
-          <a:prstGeom prst="rect">
-            <a:avLst/>
-          </a:prstGeom>
-          <a:noFill/>
-        </p:spPr>
-        <p:txBody>
-          <a:bodyPr wrap="square">
-            <a:spAutoFit/>
-          </a:bodyPr>
-          <a:lstStyle/>
-          <a:p>
-            <a:pPr algn="l">
-              <a:defRPr sz="1700" b="0" i="0">
-                <a:solidFill>
-                  <a:srgbClr val="E8ECF4"/>
-                </a:solidFill>
-                <a:latin typeface="Arial"/>
-              </a:defRPr>
-            </a:pPr>
-            <a:r>
-              <a:t>Failure: 'Why didn't it know X?'</a:t>
-            </a:r>
-          </a:p>
-        </p:txBody>
-      </p:sp>
-      <p:sp>
-        <p:nvSpPr>
-          <p:cNvPr id="16" name="Rectangle 15"/>
-          <p:cNvSpPr/>
-          <p:nvPr/>
-        </p:nvSpPr>
-        <p:spPr>
-          <a:xfrm>
-            <a:off x="6336792" y="1554480"/>
-            <a:ext cx="137160" cy="457200"/>
-          </a:xfrm>
-          <a:prstGeom prst="rect">
-            <a:avLst/>
-          </a:prstGeom>
-          <a:solidFill>
-            <a:srgbClr val="56C495"/>
-          </a:solidFill>
-          <a:ln>
-            <a:noFill/>
-          </a:ln>
-        </p:spPr>
-        <p:style>
-          <a:lnRef idx="1">
-            <a:schemeClr val="accent1"/>
-          </a:lnRef>
-          <a:fillRef idx="3">
-            <a:schemeClr val="accent1"/>
-          </a:fillRef>
-          <a:effectRef idx="2">
-            <a:schemeClr val="accent1"/>
-          </a:effectRef>
-          <a:fontRef idx="minor">
-            <a:schemeClr val="lt1"/>
-          </a:fontRef>
-        </p:style>
-        <p:txBody>
-          <a:bodyPr rtlCol="0" anchor="ctr"/>
-          <a:lstStyle/>
-          <a:p>
-            <a:pPr algn="ctr"/>
-          </a:p>
-        </p:txBody>
-      </p:sp>
-      <p:sp>
-        <p:nvSpPr>
-          <p:cNvPr id="17" name="TextBox 16"/>
-          <p:cNvSpPr txBox="1"/>
-          <p:nvPr/>
-        </p:nvSpPr>
-        <p:spPr>
-          <a:xfrm>
-            <a:off x="6656832" y="1508760"/>
-            <a:ext cx="5029200" cy="548640"/>
-          </a:xfrm>
-          <a:prstGeom prst="rect">
-            <a:avLst/>
-          </a:prstGeom>
-          <a:noFill/>
-        </p:spPr>
-        <p:txBody>
-          <a:bodyPr wrap="square">
-            <a:spAutoFit/>
-          </a:bodyPr>
-          <a:lstStyle/>
-          <a:p>
-            <a:pPr algn="l">
-              <a:defRPr sz="2200" b="1" i="0">
-                <a:solidFill>
-                  <a:srgbClr val="56C495"/>
-                </a:solidFill>
-                <a:latin typeface="Arial"/>
-              </a:defRPr>
-            </a:pPr>
-            <a:r>
-              <a:t>Context Engineering</a:t>
-            </a:r>
-          </a:p>
-        </p:txBody>
-      </p:sp>
-      <p:sp>
-        <p:nvSpPr>
-          <p:cNvPr id="18" name="Oval 17"/>
-          <p:cNvSpPr/>
-          <p:nvPr/>
-        </p:nvSpPr>
-        <p:spPr>
-          <a:xfrm>
-            <a:off x="6336792" y="2423160"/>
-            <a:ext cx="91440" cy="91440"/>
-          </a:xfrm>
-          <a:prstGeom prst="ellipse">
-            <a:avLst/>
-          </a:prstGeom>
-          <a:solidFill>
-            <a:srgbClr val="56C495"/>
-          </a:solidFill>
-          <a:ln>
-            <a:noFill/>
-          </a:ln>
-        </p:spPr>
-        <p:style>
-          <a:lnRef idx="1">
-            <a:schemeClr val="accent1"/>
-          </a:lnRef>
-          <a:fillRef idx="3">
-            <a:schemeClr val="accent1"/>
-          </a:fillRef>
-          <a:effectRef idx="2">
-            <a:schemeClr val="accent1"/>
-          </a:effectRef>
-          <a:fontRef idx="minor">
-            <a:schemeClr val="lt1"/>
-          </a:fontRef>
-        </p:style>
-        <p:txBody>
-          <a:bodyPr rtlCol="0" anchor="ctr"/>
-          <a:lstStyle/>
-          <a:p>
-            <a:pPr algn="ctr"/>
-          </a:p>
-        </p:txBody>
-      </p:sp>
-      <p:sp>
-        <p:nvSpPr>
-          <p:cNvPr id="19" name="TextBox 18"/>
-          <p:cNvSpPr txBox="1"/>
-          <p:nvPr/>
-        </p:nvSpPr>
-        <p:spPr>
-          <a:xfrm>
-            <a:off x="6656832" y="2286000"/>
-            <a:ext cx="5029200" cy="822960"/>
-          </a:xfrm>
-          <a:prstGeom prst="rect">
-            <a:avLst/>
-          </a:prstGeom>
-          <a:noFill/>
-        </p:spPr>
-        <p:txBody>
-          <a:bodyPr wrap="square">
-            <a:spAutoFit/>
-          </a:bodyPr>
-          <a:lstStyle/>
-          <a:p>
-            <a:pPr algn="l">
-              <a:defRPr sz="1700" b="0" i="0">
-                <a:solidFill>
-                  <a:srgbClr val="E8ECF4"/>
-                </a:solidFill>
-                <a:latin typeface="Arial"/>
-              </a:defRPr>
-            </a:pPr>
-            <a:r>
-              <a:t>Complete system, full screenplay</a:t>
-            </a:r>
-          </a:p>
-        </p:txBody>
-      </p:sp>
-      <p:sp>
-        <p:nvSpPr>
-          <p:cNvPr id="20" name="Oval 19"/>
-          <p:cNvSpPr/>
-          <p:nvPr/>
-        </p:nvSpPr>
-        <p:spPr>
-          <a:xfrm>
-            <a:off x="6336792" y="3291840"/>
-            <a:ext cx="91440" cy="91440"/>
-          </a:xfrm>
-          <a:prstGeom prst="ellipse">
-            <a:avLst/>
-          </a:prstGeom>
-          <a:solidFill>
-            <a:srgbClr val="56C495"/>
-          </a:solidFill>
-          <a:ln>
-            <a:noFill/>
-          </a:ln>
-        </p:spPr>
-        <p:style>
-          <a:lnRef idx="1">
-            <a:schemeClr val="accent1"/>
-          </a:lnRef>
-          <a:fillRef idx="3">
-            <a:schemeClr val="accent1"/>
-          </a:fillRef>
-          <a:effectRef idx="2">
-            <a:schemeClr val="accent1"/>
-          </a:effectRef>
-          <a:fontRef idx="minor">
-            <a:schemeClr val="lt1"/>
-          </a:fontRef>
-        </p:style>
-        <p:txBody>
-          <a:bodyPr rtlCol="0" anchor="ctr"/>
-          <a:lstStyle/>
-          <a:p>
-            <a:pPr algn="ctr"/>
-          </a:p>
-        </p:txBody>
-      </p:sp>
-      <p:sp>
-        <p:nvSpPr>
-          <p:cNvPr id="21" name="TextBox 20"/>
-          <p:cNvSpPr txBox="1"/>
-          <p:nvPr/>
-        </p:nvSpPr>
-        <p:spPr>
-          <a:xfrm>
-            <a:off x="6656832" y="3154680"/>
-            <a:ext cx="5029200" cy="822960"/>
-          </a:xfrm>
-          <a:prstGeom prst="rect">
-            <a:avLst/>
-          </a:prstGeom>
-          <a:noFill/>
-        </p:spPr>
-        <p:txBody>
-          <a:bodyPr wrap="square">
-            <a:spAutoFit/>
-          </a:bodyPr>
-          <a:lstStyle/>
-          <a:p>
-            <a:pPr algn="l">
-              <a:defRPr sz="1700" b="0" i="0">
-                <a:solidFill>
-                  <a:srgbClr val="E8ECF4"/>
-                </a:solidFill>
-                <a:latin typeface="Arial"/>
-              </a:defRPr>
-            </a:pPr>
-            <a:r>
-              <a:t>Gives the AI everything it needs</a:t>
-            </a:r>
-          </a:p>
-        </p:txBody>
-      </p:sp>
-      <p:sp>
-        <p:nvSpPr>
-          <p:cNvPr id="22" name="Oval 21"/>
-          <p:cNvSpPr/>
-          <p:nvPr/>
-        </p:nvSpPr>
-        <p:spPr>
-          <a:xfrm>
-            <a:off x="6336792" y="4160520"/>
-            <a:ext cx="91440" cy="91440"/>
-          </a:xfrm>
-          <a:prstGeom prst="ellipse">
-            <a:avLst/>
-          </a:prstGeom>
-          <a:solidFill>
-            <a:srgbClr val="56C495"/>
-          </a:solidFill>
-          <a:ln>
-            <a:noFill/>
-          </a:ln>
-        </p:spPr>
-        <p:style>
-          <a:lnRef idx="1">
-            <a:schemeClr val="accent1"/>
-          </a:lnRef>
-          <a:fillRef idx="3">
-            <a:schemeClr val="accent1"/>
-          </a:fillRef>
-          <a:effectRef idx="2">
-            <a:schemeClr val="accent1"/>
-          </a:effectRef>
-          <a:fontRef idx="minor">
-            <a:schemeClr val="lt1"/>
-          </a:fontRef>
-        </p:style>
-        <p:txBody>
-          <a:bodyPr rtlCol="0" anchor="ctr"/>
-          <a:lstStyle/>
-          <a:p>
-            <a:pPr algn="ctr"/>
-          </a:p>
-        </p:txBody>
-      </p:sp>
-      <p:sp>
-        <p:nvSpPr>
-          <p:cNvPr id="23" name="TextBox 22"/>
-          <p:cNvSpPr txBox="1"/>
-          <p:nvPr/>
-        </p:nvSpPr>
-        <p:spPr>
-          <a:xfrm>
-            <a:off x="6656832" y="4023360"/>
-            <a:ext cx="5029200" cy="822960"/>
-          </a:xfrm>
-          <a:prstGeom prst="rect">
-            <a:avLst/>
-          </a:prstGeom>
-          <a:noFill/>
-        </p:spPr>
-        <p:txBody>
-          <a:bodyPr wrap="square">
-            <a:spAutoFit/>
-          </a:bodyPr>
-          <a:lstStyle/>
-          <a:p>
-            <a:pPr algn="l">
-              <a:defRPr sz="1700" b="0" i="0">
-                <a:solidFill>
-                  <a:srgbClr val="E8ECF4"/>
-                </a:solidFill>
-                <a:latin typeface="Arial"/>
-              </a:defRPr>
-            </a:pPr>
-            <a:r>
-              <a:t>Scales with structure</a:t>
-            </a:r>
-          </a:p>
-        </p:txBody>
-      </p:sp>
-      <p:sp>
-        <p:nvSpPr>
-          <p:cNvPr id="24" name="Oval 23"/>
-          <p:cNvSpPr/>
-          <p:nvPr/>
-        </p:nvSpPr>
-        <p:spPr>
-          <a:xfrm>
-            <a:off x="6336792" y="5029200"/>
-            <a:ext cx="91440" cy="91440"/>
-          </a:xfrm>
-          <a:prstGeom prst="ellipse">
-            <a:avLst/>
-          </a:prstGeom>
-          <a:solidFill>
-            <a:srgbClr val="56C495"/>
-          </a:solidFill>
-          <a:ln>
-            <a:noFill/>
-          </a:ln>
-        </p:spPr>
-        <p:style>
-          <a:lnRef idx="1">
-            <a:schemeClr val="accent1"/>
-          </a:lnRef>
-          <a:fillRef idx="3">
-            <a:schemeClr val="accent1"/>
-          </a:fillRef>
-          <a:effectRef idx="2">
-            <a:schemeClr val="accent1"/>
-          </a:effectRef>
-          <a:fontRef idx="minor">
-            <a:schemeClr val="lt1"/>
-          </a:fontRef>
-        </p:style>
-        <p:txBody>
-          <a:bodyPr rtlCol="0" anchor="ctr"/>
-          <a:lstStyle/>
-          <a:p>
-            <a:pPr algn="ctr"/>
-          </a:p>
-        </p:txBody>
-      </p:sp>
-      <p:sp>
-        <p:nvSpPr>
-          <p:cNvPr id="25" name="TextBox 24"/>
-          <p:cNvSpPr txBox="1"/>
-          <p:nvPr/>
-        </p:nvSpPr>
-        <p:spPr>
-          <a:xfrm>
-            <a:off x="6656832" y="4892040"/>
-            <a:ext cx="5029200" cy="822960"/>
-          </a:xfrm>
-          <a:prstGeom prst="rect">
-            <a:avLst/>
-          </a:prstGeom>
-          <a:noFill/>
-        </p:spPr>
-        <p:txBody>
-          <a:bodyPr wrap="square">
-            <a:spAutoFit/>
-          </a:bodyPr>
-          <a:lstStyle/>
-          <a:p>
-            <a:pPr algn="l">
-              <a:defRPr sz="1700" b="0" i="0">
-                <a:solidFill>
-                  <a:srgbClr val="E8ECF4"/>
-                </a:solidFill>
-                <a:latin typeface="Arial"/>
-              </a:defRPr>
-            </a:pPr>
-            <a:r>
-              <a:t>Failure: 'I forgot to include X'</a:t>
-            </a:r>
-          </a:p>
-        </p:txBody>
-      </p:sp>
-      <p:sp>
-        <p:nvSpPr>
-          <p:cNvPr id="26" name="TextBox 25"/>
-          <p:cNvSpPr txBox="1"/>
-          <p:nvPr/>
-        </p:nvSpPr>
-        <p:spPr>
-          <a:xfrm>
-            <a:off x="11430000" y="6400800"/>
-            <a:ext cx="457200" cy="274320"/>
-          </a:xfrm>
-          <a:prstGeom prst="rect">
-            <a:avLst/>
-          </a:prstGeom>
-          <a:noFill/>
-        </p:spPr>
-        <p:txBody>
-          <a:bodyPr wrap="square">
-            <a:spAutoFit/>
-          </a:bodyPr>
-          <a:lstStyle/>
-          <a:p>
             <a:pPr algn="r">
-              <a:defRPr sz="1200" b="0" i="0">
+              <a:defRPr sz="1100" b="0" i="0">
                 <a:solidFill>
                   <a:srgbClr val="9CA3B4"/>
                 </a:solidFill>
@@ -14129,16 +12963,52 @@
       <p:grpSpPr/>
       <p:sp>
         <p:nvSpPr>
-          <p:cNvPr id="2" name="Rectangle 1"/>
+          <p:cNvPr id="2" name="TextBox 1"/>
+          <p:cNvSpPr txBox="1"/>
+          <p:nvPr/>
+        </p:nvSpPr>
+        <p:spPr>
+          <a:xfrm>
+            <a:off x="457200" y="320040"/>
+            <a:ext cx="9144000" cy="731520"/>
+          </a:xfrm>
+          <a:prstGeom prst="rect">
+            <a:avLst/>
+          </a:prstGeom>
+          <a:noFill/>
+        </p:spPr>
+        <p:txBody>
+          <a:bodyPr wrap="square">
+            <a:spAutoFit/>
+          </a:bodyPr>
+          <a:lstStyle/>
+          <a:p>
+            <a:pPr algn="l">
+              <a:defRPr sz="2800" b="1" i="0">
+                <a:solidFill>
+                  <a:srgbClr val="E8ECF4"/>
+                </a:solidFill>
+                <a:latin typeface="Arial"/>
+              </a:defRPr>
+            </a:pPr>
+            <a:r>
+              <a:t>Live Demo — The Difference</a:t>
+            </a:r>
+          </a:p>
+        </p:txBody>
+      </p:sp>
+      <p:sp>
+        <p:nvSpPr>
+          <p:cNvPr id="3" name="Rounded Rectangle 2"/>
           <p:cNvSpPr/>
           <p:nvPr/>
         </p:nvSpPr>
         <p:spPr>
           <a:xfrm>
-            <a:off x="0" y="0"/>
-            <a:ext cx="12191695" cy="109728"/>
-          </a:xfrm>
-          <a:prstGeom prst="rect">
+            <a:off x="10515600" y="960120"/>
+            <a:ext cx="1188720" cy="365760"/>
+          </a:xfrm>
+          <a:prstGeom prst="roundRect">
             <a:avLst/>
           </a:prstGeom>
           <a:solidFill>
@@ -14172,14 +13042,14 @@
       </p:sp>
       <p:sp>
         <p:nvSpPr>
-          <p:cNvPr id="3" name="TextBox 2"/>
+          <p:cNvPr id="4" name="TextBox 3"/>
           <p:cNvSpPr txBox="1"/>
           <p:nvPr/>
         </p:nvSpPr>
         <p:spPr>
           <a:xfrm>
-            <a:off x="457200" y="365760"/>
-            <a:ext cx="10972800" cy="822960"/>
+            <a:off x="10515600" y="987552"/>
+            <a:ext cx="1188720" cy="365760"/>
           </a:xfrm>
           <a:prstGeom prst="rect">
             <a:avLst/>
@@ -14192,39 +13062,41 @@
           </a:bodyPr>
           <a:lstStyle/>
           <a:p>
-            <a:pPr algn="l">
-              <a:defRPr sz="3000" b="1" i="0">
-                <a:solidFill>
-                  <a:srgbClr val="E8ECF4"/>
-                </a:solidFill>
-                <a:latin typeface="Arial"/>
+            <a:pPr algn="ctr">
+              <a:defRPr sz="1200" b="1" i="0">
+                <a:solidFill>
+                  <a:srgbClr val="0A0D12"/>
+                </a:solidFill>
+                <a:latin typeface="Courier New"/>
               </a:defRPr>
             </a:pPr>
             <a:r>
-              <a:t>Live Demo — Same Task, Two Approaches</a:t>
-            </a:r>
-          </a:p>
-        </p:txBody>
-      </p:sp>
-      <p:sp>
-        <p:nvSpPr>
-          <p:cNvPr id="4" name="Rectangle 3"/>
+              <a:t>DEMO</a:t>
+            </a:r>
+          </a:p>
+        </p:txBody>
+      </p:sp>
+      <p:sp>
+        <p:nvSpPr>
+          <p:cNvPr id="5" name="Rounded Rectangle 4"/>
           <p:cNvSpPr/>
           <p:nvPr/>
         </p:nvSpPr>
         <p:spPr>
           <a:xfrm>
-            <a:off x="5989320" y="1371600"/>
-            <a:ext cx="210312" cy="5029200"/>
-          </a:xfrm>
-          <a:prstGeom prst="rect">
-            <a:avLst/>
-          </a:prstGeom>
-          <a:solidFill>
-            <a:srgbClr val="313244"/>
+            <a:off x="457200" y="1188720"/>
+            <a:ext cx="11274552" cy="4937760"/>
+          </a:xfrm>
+          <a:prstGeom prst="roundRect">
+            <a:avLst/>
+          </a:prstGeom>
+          <a:solidFill>
+            <a:srgbClr val="0A0D12"/>
           </a:solidFill>
           <a:ln>
-            <a:noFill/>
+            <a:solidFill>
+              <a:srgbClr val="313244"/>
+            </a:solidFill>
           </a:ln>
         </p:spPr>
         <p:style>
@@ -14251,20 +13123,20 @@
       </p:sp>
       <p:sp>
         <p:nvSpPr>
-          <p:cNvPr id="5" name="Rectangle 4"/>
+          <p:cNvPr id="6" name="Oval 5"/>
           <p:cNvSpPr/>
           <p:nvPr/>
         </p:nvSpPr>
         <p:spPr>
           <a:xfrm>
-            <a:off x="6062472" y="1371600"/>
-            <a:ext cx="64008" cy="5029200"/>
-          </a:xfrm>
-          <a:prstGeom prst="rect">
-            <a:avLst/>
-          </a:prstGeom>
-          <a:solidFill>
-            <a:srgbClr val="E8853D"/>
+            <a:off x="731520" y="1417320"/>
+            <a:ext cx="164592" cy="164592"/>
+          </a:xfrm>
+          <a:prstGeom prst="ellipse">
+            <a:avLst/>
+          </a:prstGeom>
+          <a:solidFill>
+            <a:srgbClr val="F38BA8"/>
           </a:solidFill>
           <a:ln>
             <a:noFill/>
@@ -14294,20 +13166,20 @@
       </p:sp>
       <p:sp>
         <p:nvSpPr>
-          <p:cNvPr id="6" name="Rectangle 5"/>
+          <p:cNvPr id="7" name="Oval 6"/>
           <p:cNvSpPr/>
           <p:nvPr/>
         </p:nvSpPr>
         <p:spPr>
           <a:xfrm>
-            <a:off x="457200" y="1554480"/>
-            <a:ext cx="137160" cy="457200"/>
-          </a:xfrm>
-          <a:prstGeom prst="rect">
-            <a:avLst/>
-          </a:prstGeom>
-          <a:solidFill>
-            <a:srgbClr val="F38BA8"/>
+            <a:off x="1051560" y="1417320"/>
+            <a:ext cx="164592" cy="164592"/>
+          </a:xfrm>
+          <a:prstGeom prst="ellipse">
+            <a:avLst/>
+          </a:prstGeom>
+          <a:solidFill>
+            <a:srgbClr val="F9E2AF"/>
           </a:solidFill>
           <a:ln>
             <a:noFill/>
@@ -14337,56 +13209,20 @@
       </p:sp>
       <p:sp>
         <p:nvSpPr>
-          <p:cNvPr id="7" name="TextBox 6"/>
-          <p:cNvSpPr txBox="1"/>
-          <p:nvPr/>
-        </p:nvSpPr>
-        <p:spPr>
-          <a:xfrm>
-            <a:off x="777240" y="1508760"/>
-            <a:ext cx="5029200" cy="548640"/>
-          </a:xfrm>
-          <a:prstGeom prst="rect">
-            <a:avLst/>
-          </a:prstGeom>
-          <a:noFill/>
-        </p:spPr>
-        <p:txBody>
-          <a:bodyPr wrap="square">
-            <a:spAutoFit/>
-          </a:bodyPr>
-          <a:lstStyle/>
-          <a:p>
-            <a:pPr algn="l">
-              <a:defRPr sz="2200" b="1" i="0">
-                <a:solidFill>
-                  <a:srgbClr val="F38BA8"/>
-                </a:solidFill>
-                <a:latin typeface="Arial"/>
-              </a:defRPr>
-            </a:pPr>
-            <a:r>
-              <a:t>Prompt Only</a:t>
-            </a:r>
-          </a:p>
-        </p:txBody>
-      </p:sp>
-      <p:sp>
-        <p:nvSpPr>
           <p:cNvPr id="8" name="Oval 7"/>
           <p:cNvSpPr/>
           <p:nvPr/>
         </p:nvSpPr>
         <p:spPr>
           <a:xfrm>
-            <a:off x="457200" y="2423160"/>
-            <a:ext cx="91440" cy="91440"/>
+            <a:off x="1371600" y="1417320"/>
+            <a:ext cx="164592" cy="164592"/>
           </a:xfrm>
           <a:prstGeom prst="ellipse">
             <a:avLst/>
           </a:prstGeom>
           <a:solidFill>
-            <a:srgbClr val="F38BA8"/>
+            <a:srgbClr val="A6E3A1"/>
           </a:solidFill>
           <a:ln>
             <a:noFill/>
@@ -14422,8 +13258,79 @@
         </p:nvSpPr>
         <p:spPr>
           <a:xfrm>
-            <a:off x="777240" y="2286000"/>
-            <a:ext cx="5029200" cy="822960"/>
+            <a:off x="731520" y="1920240"/>
+            <a:ext cx="10698480" cy="4160520"/>
+          </a:xfrm>
+          <a:prstGeom prst="rect">
+            <a:avLst/>
+          </a:prstGeom>
+          <a:noFill/>
+        </p:spPr>
+        <p:txBody>
+          <a:bodyPr wrap="none">
+            <a:spAutoFit/>
+          </a:bodyPr>
+          <a:lstStyle/>
+          <a:p>
+            <a:pPr algn="l">
+              <a:defRPr sz="1400" b="0" i="0">
+                <a:solidFill>
+                  <a:srgbClr val="E8ECF4"/>
+                </a:solidFill>
+                <a:latin typeface="Courier New"/>
+              </a:defRPr>
+            </a:pPr>
+            <a:r>
+              <a:t># Prompt engineering</a:t>
+            </a:r>
+            <a:br/>
+            <a:r>
+              <a:t>Write an announcement email for a RAG meetup</a:t>
+            </a:r>
+            <a:br/>
+            <a:br/>
+            <a:br/>
+            <a:r>
+              <a:t># Context engineering</a:t>
+            </a:r>
+            <a:br/>
+            <a:r>
+              <a:t>Read the event plan at events/building-rag-pipelines.json,</a:t>
+            </a:r>
+            <a:br/>
+            <a:r>
+              <a:t>read data/speakers.json for speaker bios, and read</a:t>
+            </a:r>
+            <a:br/>
+            <a:r>
+              <a:t>examples/sample-event-plan.json for the expected format.</a:t>
+            </a:r>
+            <a:br/>
+            <a:br/>
+            <a:r>
+              <a:t>Write an announcement email targeting intermediate Python</a:t>
+            </a:r>
+            <a:br/>
+            <a:r>
+              <a:t>developers. Keep it under 200 words, include the date,</a:t>
+            </a:r>
+            <a:br/>
+            <a:r>
+              <a:t>venue, and speaker highlights.</a:t>
+            </a:r>
+          </a:p>
+        </p:txBody>
+      </p:sp>
+      <p:sp>
+        <p:nvSpPr>
+          <p:cNvPr id="10" name="TextBox 9"/>
+          <p:cNvSpPr txBox="1"/>
+          <p:nvPr/>
+        </p:nvSpPr>
+        <p:spPr>
+          <a:xfrm>
+            <a:off x="457200" y="6309360"/>
+            <a:ext cx="11274552" cy="457200"/>
           </a:xfrm>
           <a:prstGeom prst="rect">
             <a:avLst/>
@@ -14436,8 +13343,8 @@
           </a:bodyPr>
           <a:lstStyle/>
           <a:p>
-            <a:pPr algn="l">
-              <a:defRPr sz="1700" b="0" i="0">
+            <a:pPr algn="ctr">
+              <a:defRPr sz="1600" b="1" i="0">
                 <a:solidFill>
                   <a:srgbClr val="E8ECF4"/>
                 </a:solidFill>
@@ -14445,27 +13352,27 @@
               </a:defRPr>
             </a:pPr>
             <a:r>
-              <a:t>'Write an announcement for a RAG meetup'</a:t>
-            </a:r>
-          </a:p>
-        </p:txBody>
-      </p:sp>
-      <p:sp>
-        <p:nvSpPr>
-          <p:cNvPr id="10" name="Oval 9"/>
+              <a:t>Same task. Two approaches. Watch the quality difference.</a:t>
+            </a:r>
+          </a:p>
+        </p:txBody>
+      </p:sp>
+      <p:sp>
+        <p:nvSpPr>
+          <p:cNvPr id="11" name="Rectangle 10"/>
           <p:cNvSpPr/>
           <p:nvPr/>
         </p:nvSpPr>
         <p:spPr>
           <a:xfrm>
-            <a:off x="457200" y="3291840"/>
-            <a:ext cx="91440" cy="91440"/>
-          </a:xfrm>
-          <a:prstGeom prst="ellipse">
-            <a:avLst/>
-          </a:prstGeom>
-          <a:solidFill>
-            <a:srgbClr val="F38BA8"/>
+            <a:off x="0" y="6720840"/>
+            <a:ext cx="12191695" cy="137160"/>
+          </a:xfrm>
+          <a:prstGeom prst="rect">
+            <a:avLst/>
+          </a:prstGeom>
+          <a:solidFill>
+            <a:srgbClr val="5B9CF5"/>
           </a:solidFill>
           <a:ln>
             <a:noFill/>
@@ -14495,14 +13402,14 @@
       </p:sp>
       <p:sp>
         <p:nvSpPr>
-          <p:cNvPr id="11" name="TextBox 10"/>
+          <p:cNvPr id="12" name="TextBox 11"/>
           <p:cNvSpPr txBox="1"/>
           <p:nvPr/>
         </p:nvSpPr>
         <p:spPr>
           <a:xfrm>
-            <a:off x="777240" y="3154680"/>
-            <a:ext cx="5029200" cy="822960"/>
+            <a:off x="11430000" y="6446520"/>
+            <a:ext cx="457200" cy="274320"/>
           </a:xfrm>
           <a:prstGeom prst="rect">
             <a:avLst/>
@@ -14515,518 +13422,8 @@
           </a:bodyPr>
           <a:lstStyle/>
           <a:p>
-            <a:pPr algn="l">
-              <a:defRPr sz="1700" b="0" i="0">
-                <a:solidFill>
-                  <a:srgbClr val="E8ECF4"/>
-                </a:solidFill>
-                <a:latin typeface="Arial"/>
-              </a:defRPr>
-            </a:pPr>
-            <a:r>
-              <a:t>Generic. Made-up details.</a:t>
-            </a:r>
-          </a:p>
-        </p:txBody>
-      </p:sp>
-      <p:sp>
-        <p:nvSpPr>
-          <p:cNvPr id="12" name="Oval 11"/>
-          <p:cNvSpPr/>
-          <p:nvPr/>
-        </p:nvSpPr>
-        <p:spPr>
-          <a:xfrm>
-            <a:off x="457200" y="4160520"/>
-            <a:ext cx="91440" cy="91440"/>
-          </a:xfrm>
-          <a:prstGeom prst="ellipse">
-            <a:avLst/>
-          </a:prstGeom>
-          <a:solidFill>
-            <a:srgbClr val="F38BA8"/>
-          </a:solidFill>
-          <a:ln>
-            <a:noFill/>
-          </a:ln>
-        </p:spPr>
-        <p:style>
-          <a:lnRef idx="1">
-            <a:schemeClr val="accent1"/>
-          </a:lnRef>
-          <a:fillRef idx="3">
-            <a:schemeClr val="accent1"/>
-          </a:fillRef>
-          <a:effectRef idx="2">
-            <a:schemeClr val="accent1"/>
-          </a:effectRef>
-          <a:fontRef idx="minor">
-            <a:schemeClr val="lt1"/>
-          </a:fontRef>
-        </p:style>
-        <p:txBody>
-          <a:bodyPr rtlCol="0" anchor="ctr"/>
-          <a:lstStyle/>
-          <a:p>
-            <a:pPr algn="ctr"/>
-          </a:p>
-        </p:txBody>
-      </p:sp>
-      <p:sp>
-        <p:nvSpPr>
-          <p:cNvPr id="13" name="TextBox 12"/>
-          <p:cNvSpPr txBox="1"/>
-          <p:nvPr/>
-        </p:nvSpPr>
-        <p:spPr>
-          <a:xfrm>
-            <a:off x="777240" y="4023360"/>
-            <a:ext cx="5029200" cy="822960"/>
-          </a:xfrm>
-          <a:prstGeom prst="rect">
-            <a:avLst/>
-          </a:prstGeom>
-          <a:noFill/>
-        </p:spPr>
-        <p:txBody>
-          <a:bodyPr wrap="square">
-            <a:spAutoFit/>
-          </a:bodyPr>
-          <a:lstStyle/>
-          <a:p>
-            <a:pPr algn="l">
-              <a:defRPr sz="1700" b="0" i="0">
-                <a:solidFill>
-                  <a:srgbClr val="E8ECF4"/>
-                </a:solidFill>
-                <a:latin typeface="Arial"/>
-              </a:defRPr>
-            </a:pPr>
-            <a:r>
-              <a:t>Bland tone, no specifics.</a:t>
-            </a:r>
-          </a:p>
-        </p:txBody>
-      </p:sp>
-      <p:sp>
-        <p:nvSpPr>
-          <p:cNvPr id="14" name="Rectangle 13"/>
-          <p:cNvSpPr/>
-          <p:nvPr/>
-        </p:nvSpPr>
-        <p:spPr>
-          <a:xfrm>
-            <a:off x="6336792" y="1554480"/>
-            <a:ext cx="137160" cy="457200"/>
-          </a:xfrm>
-          <a:prstGeom prst="rect">
-            <a:avLst/>
-          </a:prstGeom>
-          <a:solidFill>
-            <a:srgbClr val="56C495"/>
-          </a:solidFill>
-          <a:ln>
-            <a:noFill/>
-          </a:ln>
-        </p:spPr>
-        <p:style>
-          <a:lnRef idx="1">
-            <a:schemeClr val="accent1"/>
-          </a:lnRef>
-          <a:fillRef idx="3">
-            <a:schemeClr val="accent1"/>
-          </a:fillRef>
-          <a:effectRef idx="2">
-            <a:schemeClr val="accent1"/>
-          </a:effectRef>
-          <a:fontRef idx="minor">
-            <a:schemeClr val="lt1"/>
-          </a:fontRef>
-        </p:style>
-        <p:txBody>
-          <a:bodyPr rtlCol="0" anchor="ctr"/>
-          <a:lstStyle/>
-          <a:p>
-            <a:pPr algn="ctr"/>
-          </a:p>
-        </p:txBody>
-      </p:sp>
-      <p:sp>
-        <p:nvSpPr>
-          <p:cNvPr id="15" name="TextBox 14"/>
-          <p:cNvSpPr txBox="1"/>
-          <p:nvPr/>
-        </p:nvSpPr>
-        <p:spPr>
-          <a:xfrm>
-            <a:off x="6656832" y="1508760"/>
-            <a:ext cx="5029200" cy="548640"/>
-          </a:xfrm>
-          <a:prstGeom prst="rect">
-            <a:avLst/>
-          </a:prstGeom>
-          <a:noFill/>
-        </p:spPr>
-        <p:txBody>
-          <a:bodyPr wrap="square">
-            <a:spAutoFit/>
-          </a:bodyPr>
-          <a:lstStyle/>
-          <a:p>
-            <a:pPr algn="l">
-              <a:defRPr sz="2200" b="1" i="0">
-                <a:solidFill>
-                  <a:srgbClr val="56C495"/>
-                </a:solidFill>
-                <a:latin typeface="Arial"/>
-              </a:defRPr>
-            </a:pPr>
-            <a:r>
-              <a:t>With Context</a:t>
-            </a:r>
-          </a:p>
-        </p:txBody>
-      </p:sp>
-      <p:sp>
-        <p:nvSpPr>
-          <p:cNvPr id="16" name="Oval 15"/>
-          <p:cNvSpPr/>
-          <p:nvPr/>
-        </p:nvSpPr>
-        <p:spPr>
-          <a:xfrm>
-            <a:off x="6336792" y="2423160"/>
-            <a:ext cx="91440" cy="91440"/>
-          </a:xfrm>
-          <a:prstGeom prst="ellipse">
-            <a:avLst/>
-          </a:prstGeom>
-          <a:solidFill>
-            <a:srgbClr val="56C495"/>
-          </a:solidFill>
-          <a:ln>
-            <a:noFill/>
-          </a:ln>
-        </p:spPr>
-        <p:style>
-          <a:lnRef idx="1">
-            <a:schemeClr val="accent1"/>
-          </a:lnRef>
-          <a:fillRef idx="3">
-            <a:schemeClr val="accent1"/>
-          </a:fillRef>
-          <a:effectRef idx="2">
-            <a:schemeClr val="accent1"/>
-          </a:effectRef>
-          <a:fontRef idx="minor">
-            <a:schemeClr val="lt1"/>
-          </a:fontRef>
-        </p:style>
-        <p:txBody>
-          <a:bodyPr rtlCol="0" anchor="ctr"/>
-          <a:lstStyle/>
-          <a:p>
-            <a:pPr algn="ctr"/>
-          </a:p>
-        </p:txBody>
-      </p:sp>
-      <p:sp>
-        <p:nvSpPr>
-          <p:cNvPr id="17" name="TextBox 16"/>
-          <p:cNvSpPr txBox="1"/>
-          <p:nvPr/>
-        </p:nvSpPr>
-        <p:spPr>
-          <a:xfrm>
-            <a:off x="6656832" y="2286000"/>
-            <a:ext cx="5029200" cy="822960"/>
-          </a:xfrm>
-          <a:prstGeom prst="rect">
-            <a:avLst/>
-          </a:prstGeom>
-          <a:noFill/>
-        </p:spPr>
-        <p:txBody>
-          <a:bodyPr wrap="square">
-            <a:spAutoFit/>
-          </a:bodyPr>
-          <a:lstStyle/>
-          <a:p>
-            <a:pPr algn="l">
-              <a:defRPr sz="1700" b="0" i="0">
-                <a:solidFill>
-                  <a:srgbClr val="E8ECF4"/>
-                </a:solidFill>
-                <a:latin typeface="Arial"/>
-              </a:defRPr>
-            </a:pPr>
-            <a:r>
-              <a:t>Read events/building-rag-pipelines.json</a:t>
-            </a:r>
-          </a:p>
-        </p:txBody>
-      </p:sp>
-      <p:sp>
-        <p:nvSpPr>
-          <p:cNvPr id="18" name="Oval 17"/>
-          <p:cNvSpPr/>
-          <p:nvPr/>
-        </p:nvSpPr>
-        <p:spPr>
-          <a:xfrm>
-            <a:off x="6336792" y="3291840"/>
-            <a:ext cx="91440" cy="91440"/>
-          </a:xfrm>
-          <a:prstGeom prst="ellipse">
-            <a:avLst/>
-          </a:prstGeom>
-          <a:solidFill>
-            <a:srgbClr val="56C495"/>
-          </a:solidFill>
-          <a:ln>
-            <a:noFill/>
-          </a:ln>
-        </p:spPr>
-        <p:style>
-          <a:lnRef idx="1">
-            <a:schemeClr val="accent1"/>
-          </a:lnRef>
-          <a:fillRef idx="3">
-            <a:schemeClr val="accent1"/>
-          </a:fillRef>
-          <a:effectRef idx="2">
-            <a:schemeClr val="accent1"/>
-          </a:effectRef>
-          <a:fontRef idx="minor">
-            <a:schemeClr val="lt1"/>
-          </a:fontRef>
-        </p:style>
-        <p:txBody>
-          <a:bodyPr rtlCol="0" anchor="ctr"/>
-          <a:lstStyle/>
-          <a:p>
-            <a:pPr algn="ctr"/>
-          </a:p>
-        </p:txBody>
-      </p:sp>
-      <p:sp>
-        <p:nvSpPr>
-          <p:cNvPr id="19" name="TextBox 18"/>
-          <p:cNvSpPr txBox="1"/>
-          <p:nvPr/>
-        </p:nvSpPr>
-        <p:spPr>
-          <a:xfrm>
-            <a:off x="6656832" y="3154680"/>
-            <a:ext cx="5029200" cy="822960"/>
-          </a:xfrm>
-          <a:prstGeom prst="rect">
-            <a:avLst/>
-          </a:prstGeom>
-          <a:noFill/>
-        </p:spPr>
-        <p:txBody>
-          <a:bodyPr wrap="square">
-            <a:spAutoFit/>
-          </a:bodyPr>
-          <a:lstStyle/>
-          <a:p>
-            <a:pPr algn="l">
-              <a:defRPr sz="1700" b="0" i="0">
-                <a:solidFill>
-                  <a:srgbClr val="E8ECF4"/>
-                </a:solidFill>
-                <a:latin typeface="Arial"/>
-              </a:defRPr>
-            </a:pPr>
-            <a:r>
-              <a:t>Read data/speakers.json for bios</a:t>
-            </a:r>
-          </a:p>
-        </p:txBody>
-      </p:sp>
-      <p:sp>
-        <p:nvSpPr>
-          <p:cNvPr id="20" name="Oval 19"/>
-          <p:cNvSpPr/>
-          <p:nvPr/>
-        </p:nvSpPr>
-        <p:spPr>
-          <a:xfrm>
-            <a:off x="6336792" y="4160520"/>
-            <a:ext cx="91440" cy="91440"/>
-          </a:xfrm>
-          <a:prstGeom prst="ellipse">
-            <a:avLst/>
-          </a:prstGeom>
-          <a:solidFill>
-            <a:srgbClr val="56C495"/>
-          </a:solidFill>
-          <a:ln>
-            <a:noFill/>
-          </a:ln>
-        </p:spPr>
-        <p:style>
-          <a:lnRef idx="1">
-            <a:schemeClr val="accent1"/>
-          </a:lnRef>
-          <a:fillRef idx="3">
-            <a:schemeClr val="accent1"/>
-          </a:fillRef>
-          <a:effectRef idx="2">
-            <a:schemeClr val="accent1"/>
-          </a:effectRef>
-          <a:fontRef idx="minor">
-            <a:schemeClr val="lt1"/>
-          </a:fontRef>
-        </p:style>
-        <p:txBody>
-          <a:bodyPr rtlCol="0" anchor="ctr"/>
-          <a:lstStyle/>
-          <a:p>
-            <a:pPr algn="ctr"/>
-          </a:p>
-        </p:txBody>
-      </p:sp>
-      <p:sp>
-        <p:nvSpPr>
-          <p:cNvPr id="21" name="TextBox 20"/>
-          <p:cNvSpPr txBox="1"/>
-          <p:nvPr/>
-        </p:nvSpPr>
-        <p:spPr>
-          <a:xfrm>
-            <a:off x="6656832" y="4023360"/>
-            <a:ext cx="5029200" cy="822960"/>
-          </a:xfrm>
-          <a:prstGeom prst="rect">
-            <a:avLst/>
-          </a:prstGeom>
-          <a:noFill/>
-        </p:spPr>
-        <p:txBody>
-          <a:bodyPr wrap="square">
-            <a:spAutoFit/>
-          </a:bodyPr>
-          <a:lstStyle/>
-          <a:p>
-            <a:pPr algn="l">
-              <a:defRPr sz="1700" b="0" i="0">
-                <a:solidFill>
-                  <a:srgbClr val="E8ECF4"/>
-                </a:solidFill>
-                <a:latin typeface="Arial"/>
-              </a:defRPr>
-            </a:pPr>
-            <a:r>
-              <a:t>Read examples/sample-event-plan.json</a:t>
-            </a:r>
-          </a:p>
-        </p:txBody>
-      </p:sp>
-      <p:sp>
-        <p:nvSpPr>
-          <p:cNvPr id="22" name="Oval 21"/>
-          <p:cNvSpPr/>
-          <p:nvPr/>
-        </p:nvSpPr>
-        <p:spPr>
-          <a:xfrm>
-            <a:off x="6336792" y="5029200"/>
-            <a:ext cx="91440" cy="91440"/>
-          </a:xfrm>
-          <a:prstGeom prst="ellipse">
-            <a:avLst/>
-          </a:prstGeom>
-          <a:solidFill>
-            <a:srgbClr val="56C495"/>
-          </a:solidFill>
-          <a:ln>
-            <a:noFill/>
-          </a:ln>
-        </p:spPr>
-        <p:style>
-          <a:lnRef idx="1">
-            <a:schemeClr val="accent1"/>
-          </a:lnRef>
-          <a:fillRef idx="3">
-            <a:schemeClr val="accent1"/>
-          </a:fillRef>
-          <a:effectRef idx="2">
-            <a:schemeClr val="accent1"/>
-          </a:effectRef>
-          <a:fontRef idx="minor">
-            <a:schemeClr val="lt1"/>
-          </a:fontRef>
-        </p:style>
-        <p:txBody>
-          <a:bodyPr rtlCol="0" anchor="ctr"/>
-          <a:lstStyle/>
-          <a:p>
-            <a:pPr algn="ctr"/>
-          </a:p>
-        </p:txBody>
-      </p:sp>
-      <p:sp>
-        <p:nvSpPr>
-          <p:cNvPr id="23" name="TextBox 22"/>
-          <p:cNvSpPr txBox="1"/>
-          <p:nvPr/>
-        </p:nvSpPr>
-        <p:spPr>
-          <a:xfrm>
-            <a:off x="6656832" y="4892040"/>
-            <a:ext cx="5029200" cy="822960"/>
-          </a:xfrm>
-          <a:prstGeom prst="rect">
-            <a:avLst/>
-          </a:prstGeom>
-          <a:noFill/>
-        </p:spPr>
-        <p:txBody>
-          <a:bodyPr wrap="square">
-            <a:spAutoFit/>
-          </a:bodyPr>
-          <a:lstStyle/>
-          <a:p>
-            <a:pPr algn="l">
-              <a:defRPr sz="1700" b="0" i="0">
-                <a:solidFill>
-                  <a:srgbClr val="E8ECF4"/>
-                </a:solidFill>
-                <a:latin typeface="Arial"/>
-              </a:defRPr>
-            </a:pPr>
-            <a:r>
-              <a:t>Real names, real date, on-tone</a:t>
-            </a:r>
-          </a:p>
-        </p:txBody>
-      </p:sp>
-      <p:sp>
-        <p:nvSpPr>
-          <p:cNvPr id="24" name="TextBox 23"/>
-          <p:cNvSpPr txBox="1"/>
-          <p:nvPr/>
-        </p:nvSpPr>
-        <p:spPr>
-          <a:xfrm>
-            <a:off x="11430000" y="6400800"/>
-            <a:ext cx="457200" cy="274320"/>
-          </a:xfrm>
-          <a:prstGeom prst="rect">
-            <a:avLst/>
-          </a:prstGeom>
-          <a:noFill/>
-        </p:spPr>
-        <p:txBody>
-          <a:bodyPr wrap="square">
-            <a:spAutoFit/>
-          </a:bodyPr>
-          <a:lstStyle/>
-          <a:p>
             <a:pPr algn="r">
-              <a:defRPr sz="1200" b="0" i="0">
+              <a:defRPr sz="1100" b="0" i="0">
                 <a:solidFill>
                   <a:srgbClr val="9CA3B4"/>
                 </a:solidFill>
@@ -15073,7 +13470,7 @@
         </p:nvSpPr>
         <p:spPr>
           <a:xfrm>
-            <a:off x="457200" y="365760"/>
+            <a:off x="457200" y="320040"/>
             <a:ext cx="9144000" cy="731520"/>
           </a:xfrm>
           <a:prstGeom prst="rect">
@@ -15088,7 +13485,7 @@
           <a:lstStyle/>
           <a:p>
             <a:pPr algn="l">
-              <a:defRPr sz="3000" b="1" i="0">
+              <a:defRPr sz="2800" b="1" i="0">
                 <a:solidFill>
                   <a:srgbClr val="E8ECF4"/>
                 </a:solidFill>
@@ -15109,7 +13506,7 @@
         </p:nvSpPr>
         <p:spPr>
           <a:xfrm>
-            <a:off x="10515600" y="1051560"/>
+            <a:off x="10515600" y="960120"/>
             <a:ext cx="1188720" cy="365760"/>
           </a:xfrm>
           <a:prstGeom prst="roundRect">
@@ -15152,7 +13549,7 @@
         </p:nvSpPr>
         <p:spPr>
           <a:xfrm>
-            <a:off x="10515600" y="1078992"/>
+            <a:off x="10515600" y="987552"/>
             <a:ext cx="1188720" cy="365760"/>
           </a:xfrm>
           <a:prstGeom prst="rect">
@@ -15188,7 +13585,7 @@
         </p:nvSpPr>
         <p:spPr>
           <a:xfrm>
-            <a:off x="457200" y="1280160"/>
+            <a:off x="457200" y="1188720"/>
             <a:ext cx="11274552" cy="4389120"/>
           </a:xfrm>
           <a:prstGeom prst="roundRect">
@@ -15233,7 +13630,7 @@
         </p:nvSpPr>
         <p:spPr>
           <a:xfrm>
-            <a:off x="731520" y="1508760"/>
+            <a:off x="731520" y="1417320"/>
             <a:ext cx="164592" cy="164592"/>
           </a:xfrm>
           <a:prstGeom prst="ellipse">
@@ -15276,7 +13673,7 @@
         </p:nvSpPr>
         <p:spPr>
           <a:xfrm>
-            <a:off x="1051560" y="1508760"/>
+            <a:off x="1051560" y="1417320"/>
             <a:ext cx="164592" cy="164592"/>
           </a:xfrm>
           <a:prstGeom prst="ellipse">
@@ -15319,7 +13716,7 @@
         </p:nvSpPr>
         <p:spPr>
           <a:xfrm>
-            <a:off x="1371600" y="1508760"/>
+            <a:off x="1371600" y="1417320"/>
             <a:ext cx="164592" cy="164592"/>
           </a:xfrm>
           <a:prstGeom prst="ellipse">
@@ -15362,8 +13759,8 @@
         </p:nvSpPr>
         <p:spPr>
           <a:xfrm>
-            <a:off x="731520" y="2011680"/>
-            <a:ext cx="10698480" cy="3474720"/>
+            <a:off x="731520" y="1920240"/>
+            <a:ext cx="10698480" cy="3611879"/>
           </a:xfrm>
           <a:prstGeom prst="rect">
             <a:avLst/>
@@ -15377,7 +13774,7 @@
           <a:lstStyle/>
           <a:p>
             <a:pPr algn="l">
-              <a:defRPr sz="1500" b="0" i="0">
+              <a:defRPr sz="1400" b="0" i="0">
                 <a:solidFill>
                   <a:srgbClr val="E8ECF4"/>
                 </a:solidFill>
@@ -15385,10 +13782,18 @@
               </a:defRPr>
             </a:pPr>
             <a:r>
-              <a:t>CLAUDE.md              Always-on rules (personality, schemas)</a:t>
+              <a:t>Layer                  Purpose</a:t>
             </a:r>
             <a:br/>
             <a:r>
+              <a:t>─────────────────────  ──────────────────────────────────────────</a:t>
+            </a:r>
+            <a:br/>
+            <a:r>
+              <a:t>CLAUDE.md              Always-on rules (personality, schemas, constraints)</a:t>
+            </a:r>
+            <a:br/>
+            <a:r>
               <a:t>examples/              Reference outputs the AI mimics</a:t>
             </a:r>
             <a:br/>
@@ -15401,11 +13806,11 @@
             </a:r>
             <a:br/>
             <a:r>
-              <a:t>PRPs/                  Implementation blueprint (how to build)</a:t>
+              <a:t>PRPs/                  Implementation blueprint (how to build it)</a:t>
             </a:r>
             <a:br/>
             <a:r>
-              <a:t>.claude/commands/      Reusable workflows (composable tools)</a:t>
+              <a:t>.claude/commands/      Reusable workflows</a:t>
             </a:r>
           </a:p>
         </p:txBody>
@@ -15418,8 +13823,8 @@
         </p:nvSpPr>
         <p:spPr>
           <a:xfrm>
-            <a:off x="457200" y="5852160"/>
-            <a:ext cx="11274552" cy="548640"/>
+            <a:off x="457200" y="5760720"/>
+            <a:ext cx="11274552" cy="457200"/>
           </a:xfrm>
           <a:prstGeom prst="rect">
             <a:avLst/>
@@ -15433,15 +13838,15 @@
           <a:lstStyle/>
           <a:p>
             <a:pPr algn="ctr">
-              <a:defRPr sz="1700" b="0" i="1">
-                <a:solidFill>
-                  <a:srgbClr val="9CA3B4"/>
+              <a:defRPr sz="1600" b="1" i="0">
+                <a:solidFill>
+                  <a:srgbClr val="E8ECF4"/>
                 </a:solidFill>
                 <a:latin typeface="Arial"/>
               </a:defRPr>
             </a:pPr>
             <a:r>
-              <a:t>Each layer adds context. More context = better results.</a:t>
+              <a:t>Each layer adds context.</a:t>
             </a:r>
           </a:p>
         </p:txBody>
@@ -15497,7 +13902,7 @@
         </p:nvSpPr>
         <p:spPr>
           <a:xfrm>
-            <a:off x="11430000" y="6400800"/>
+            <a:off x="11430000" y="6446520"/>
             <a:ext cx="457200" cy="274320"/>
           </a:xfrm>
           <a:prstGeom prst="rect">
@@ -15512,7 +13917,7 @@
           <a:lstStyle/>
           <a:p>
             <a:pPr algn="r">
-              <a:defRPr sz="1200" b="0" i="0">
+              <a:defRPr sz="1100" b="0" i="0">
                 <a:solidFill>
                   <a:srgbClr val="9CA3B4"/>
                 </a:solidFill>
@@ -15559,7 +13964,7 @@
         </p:nvSpPr>
         <p:spPr>
           <a:xfrm>
-            <a:off x="457200" y="365760"/>
+            <a:off x="457200" y="320040"/>
             <a:ext cx="9144000" cy="731520"/>
           </a:xfrm>
           <a:prstGeom prst="rect">
@@ -15574,7 +13979,7 @@
           <a:lstStyle/>
           <a:p>
             <a:pPr algn="l">
-              <a:defRPr sz="3000" b="1" i="0">
+              <a:defRPr sz="2800" b="1" i="0">
                 <a:solidFill>
                   <a:srgbClr val="E8ECF4"/>
                 </a:solidFill>
@@ -15595,7 +14000,7 @@
         </p:nvSpPr>
         <p:spPr>
           <a:xfrm>
-            <a:off x="10515600" y="1051560"/>
+            <a:off x="10515600" y="960120"/>
             <a:ext cx="1188720" cy="365760"/>
           </a:xfrm>
           <a:prstGeom prst="roundRect">
@@ -15638,7 +14043,7 @@
         </p:nvSpPr>
         <p:spPr>
           <a:xfrm>
-            <a:off x="10515600" y="1078992"/>
+            <a:off x="10515600" y="987552"/>
             <a:ext cx="1188720" cy="365760"/>
           </a:xfrm>
           <a:prstGeom prst="rect">
@@ -15674,8 +14079,8 @@
         </p:nvSpPr>
         <p:spPr>
           <a:xfrm>
-            <a:off x="457200" y="1280160"/>
-            <a:ext cx="11274552" cy="4389120"/>
+            <a:off x="457200" y="1188720"/>
+            <a:ext cx="11274552" cy="4572000"/>
           </a:xfrm>
           <a:prstGeom prst="roundRect">
             <a:avLst/>
@@ -15719,7 +14124,7 @@
         </p:nvSpPr>
         <p:spPr>
           <a:xfrm>
-            <a:off x="731520" y="1508760"/>
+            <a:off x="731520" y="1417320"/>
             <a:ext cx="164592" cy="164592"/>
           </a:xfrm>
           <a:prstGeom prst="ellipse">
@@ -15762,7 +14167,7 @@
         </p:nvSpPr>
         <p:spPr>
           <a:xfrm>
-            <a:off x="1051560" y="1508760"/>
+            <a:off x="1051560" y="1417320"/>
             <a:ext cx="164592" cy="164592"/>
           </a:xfrm>
           <a:prstGeom prst="ellipse">
@@ -15805,7 +14210,7 @@
         </p:nvSpPr>
         <p:spPr>
           <a:xfrm>
-            <a:off x="1371600" y="1508760"/>
+            <a:off x="1371600" y="1417320"/>
             <a:ext cx="164592" cy="164592"/>
           </a:xfrm>
           <a:prstGeom prst="ellipse">
@@ -15848,8 +14253,8 @@
         </p:nvSpPr>
         <p:spPr>
           <a:xfrm>
-            <a:off x="731520" y="2011680"/>
-            <a:ext cx="10698480" cy="3474720"/>
+            <a:off x="731520" y="1920240"/>
+            <a:ext cx="10698480" cy="3794760"/>
           </a:xfrm>
           <a:prstGeom prst="rect">
             <a:avLst/>
@@ -15875,7 +14280,7 @@
             </a:r>
             <a:br/>
             <a:r>
-              <a:t>What to build — be specific about inputs, outputs, behavior</a:t>
+              <a:t>What to build — inputs, outputs, behavior</a:t>
             </a:r>
             <a:br/>
             <a:br/>
@@ -15893,7 +14298,7 @@
             </a:r>
             <a:br/>
             <a:r>
-              <a:t>APIs, schemas, constraints — the rules it must follow</a:t>
+              <a:t>APIs, schemas, constraints</a:t>
             </a:r>
             <a:br/>
             <a:br/>
@@ -15902,7 +14307,7 @@
             </a:r>
             <a:br/>
             <a:r>
-              <a:t>Gotchas, edge cases, integration points — what could go wrong</a:t>
+              <a:t>Gotchas, edge cases, integration points</a:t>
             </a:r>
           </a:p>
         </p:txBody>
@@ -15915,7 +14320,7 @@
         </p:nvSpPr>
         <p:spPr>
           <a:xfrm>
-            <a:off x="457200" y="5852160"/>
+            <a:off x="457200" y="5943600"/>
             <a:ext cx="11274552" cy="548640"/>
           </a:xfrm>
           <a:prstGeom prst="rect">
@@ -15930,7 +14335,7 @@
           <a:lstStyle/>
           <a:p>
             <a:pPr algn="ctr">
-              <a:defRPr sz="1700" b="0" i="1">
+              <a:defRPr sz="1300" b="0" i="1">
                 <a:solidFill>
                   <a:srgbClr val="9CA3B4"/>
                 </a:solidFill>
@@ -15938,7 +14343,7 @@
               </a:defRPr>
             </a:pPr>
             <a:r>
-              <a:t>Replaces vague Slack messages with an engineering spec.</a:t>
+              <a:t>Templates: templates/INITIAL.md (blank) and templates/INITIAL_EXAMPLE.md (filled-out).</a:t>
             </a:r>
           </a:p>
         </p:txBody>
@@ -15994,7 +14399,7 @@
         </p:nvSpPr>
         <p:spPr>
           <a:xfrm>
-            <a:off x="11430000" y="6400800"/>
+            <a:off x="11430000" y="6446520"/>
             <a:ext cx="457200" cy="274320"/>
           </a:xfrm>
           <a:prstGeom prst="rect">
@@ -16009,7 +14414,7 @@
           <a:lstStyle/>
           <a:p>
             <a:pPr algn="r">
-              <a:defRPr sz="1200" b="0" i="0">
+              <a:defRPr sz="1100" b="0" i="0">
                 <a:solidFill>
                   <a:srgbClr val="9CA3B4"/>
                 </a:solidFill>
